--- a/poc/dp03-privacy/DP03-전체구조-3장.pptx
+++ b/poc/dp03-privacy/DP03-전체구조-3장.pptx
@@ -1263,11 +1263,11 @@
 </file>
 
 <file path=ppt/slides/slide1.xml><?xml version="1.0" encoding="utf-8"?>
-<p:sld xmlns:p="http://schemas.openxmlformats.org/presentationml/2006/main">
+<p:sld xmlns:a="http://schemas.openxmlformats.org/drawingml/2006/main" xmlns:ns2="http://schemas.microsoft.com/office/drawing/2014/main" xmlns:ns3="http://schemas.microsoft.com/office/powerpoint/2010/main" xmlns:p="http://schemas.openxmlformats.org/presentationml/2006/main">
   <p:cSld>
     <p:bg>
       <p:bgPr>
-        <a:solidFill xmlns:a="http://schemas.openxmlformats.org/drawingml/2006/main">
+        <a:solidFill>
           <a:srgbClr val="FFFFFF"/>
         </a:solidFill>
       </p:bgPr>
@@ -1279,42 +1279,42 @@
         <p:nvPr/>
       </p:nvGrpSpPr>
       <p:grpSpPr>
-        <a:xfrm xmlns:a="http://schemas.openxmlformats.org/drawingml/2006/main"/>
+        <a:xfrm/>
       </p:grpSpPr>
       <p:sp>
         <p:nvSpPr>
           <p:cNvPr id="1" name="">
-            <a:extLst xmlns:a="http://schemas.openxmlformats.org/drawingml/2006/main">
+            <a:extLst>
               <a:ext uri="{FF2B5EF4-FFF2-40B4-BE49-F238E27FC236}">
-                <a16:creationId xmlns:a16="http://schemas.microsoft.com/office/drawing/2014/main" id="{207CD310-E6AE-46E6-8F91-893715F3FDD2}"/>
+                <ns2:creationId id="{207CD310-E6AE-46E6-8F91-893715F3FDD2}"/>
               </a:ext>
             </a:extLst>
           </p:cNvPr>
           <p:cNvSpPr>
-            <a:spLocks xmlns:a="http://schemas.openxmlformats.org/drawingml/2006/main" noGrp="1"/>
-          </p:cNvSpPr>
-          <p:nvPr/>
-        </p:nvSpPr>
-        <p:spPr>
-          <a:xfrm xmlns:a="http://schemas.openxmlformats.org/drawingml/2006/main">
+            <a:spLocks noGrp="1"/>
+          </p:cNvSpPr>
+          <p:nvPr/>
+        </p:nvSpPr>
+        <p:spPr>
+          <a:xfrm>
             <a:off x="400050" y="285750"/>
             <a:ext cx="4953000" cy="209550"/>
           </a:xfrm>
-          <a:prstGeom xmlns:a="http://schemas.openxmlformats.org/drawingml/2006/main" prst="rect">
+          <a:prstGeom prst="rect">
             <a:avLst/>
           </a:prstGeom>
-          <a:noFill xmlns:a="http://schemas.openxmlformats.org/drawingml/2006/main"/>
-          <a:ln xmlns:a="http://schemas.openxmlformats.org/drawingml/2006/main" w="0">
+          <a:noFill/>
+          <a:ln w="0">
             <a:noFill/>
             <a:prstDash val="solid"/>
           </a:ln>
         </p:spPr>
         <p:txBody>
-          <a:bodyPr xmlns:a="http://schemas.openxmlformats.org/drawingml/2006/main" lIns="0" tIns="0" rIns="0" bIns="0" anchor="t">
+          <a:bodyPr lIns="0" tIns="0" rIns="0" bIns="0" anchor="t">
             <a:normAutofit fontScale="100000"/>
           </a:bodyPr>
-          <a:lstStyle xmlns:a="http://schemas.openxmlformats.org/drawingml/2006/main"/>
-          <a:p xmlns:a="http://schemas.openxmlformats.org/drawingml/2006/main">
+          <a:lstStyle/>
+          <a:p>
             <a:pPr algn="l">
               <a:lnSpc>
                 <a:spcPct val="112000"/>
@@ -1346,37 +1346,37 @@
       <p:sp>
         <p:nvSpPr>
           <p:cNvPr id="2" name="">
-            <a:extLst xmlns:a="http://schemas.openxmlformats.org/drawingml/2006/main">
+            <a:extLst>
               <a:ext uri="{FF2B5EF4-FFF2-40B4-BE49-F238E27FC236}">
-                <a16:creationId xmlns:a16="http://schemas.microsoft.com/office/drawing/2014/main" id="{77780D31-E99A-44B9-BD60-C6C8A03A3181}"/>
+                <ns2:creationId id="{77780D31-E99A-44B9-BD60-C6C8A03A3181}"/>
               </a:ext>
             </a:extLst>
           </p:cNvPr>
           <p:cNvSpPr>
-            <a:spLocks xmlns:a="http://schemas.openxmlformats.org/drawingml/2006/main" noGrp="1"/>
-          </p:cNvSpPr>
-          <p:nvPr/>
-        </p:nvSpPr>
-        <p:spPr>
-          <a:xfrm xmlns:a="http://schemas.openxmlformats.org/drawingml/2006/main">
+            <a:spLocks noGrp="1"/>
+          </p:cNvSpPr>
+          <p:nvPr/>
+        </p:nvSpPr>
+        <p:spPr>
+          <a:xfrm>
             <a:off x="400050" y="552450"/>
             <a:ext cx="9810750" cy="495300"/>
           </a:xfrm>
-          <a:prstGeom xmlns:a="http://schemas.openxmlformats.org/drawingml/2006/main" prst="rect">
+          <a:prstGeom prst="rect">
             <a:avLst/>
           </a:prstGeom>
-          <a:noFill xmlns:a="http://schemas.openxmlformats.org/drawingml/2006/main"/>
-          <a:ln xmlns:a="http://schemas.openxmlformats.org/drawingml/2006/main" w="0">
+          <a:noFill/>
+          <a:ln w="0">
             <a:noFill/>
             <a:prstDash val="solid"/>
           </a:ln>
         </p:spPr>
         <p:txBody>
-          <a:bodyPr xmlns:a="http://schemas.openxmlformats.org/drawingml/2006/main" lIns="0" tIns="0" rIns="0" bIns="0" anchor="t">
+          <a:bodyPr lIns="0" tIns="0" rIns="0" bIns="0" anchor="t">
             <a:normAutofit fontScale="89978"/>
           </a:bodyPr>
-          <a:lstStyle xmlns:a="http://schemas.openxmlformats.org/drawingml/2006/main"/>
-          <a:p xmlns:a="http://schemas.openxmlformats.org/drawingml/2006/main">
+          <a:lstStyle/>
+          <a:p>
             <a:pPr algn="l">
               <a:lnSpc>
                 <a:spcPct val="112000"/>
@@ -1408,37 +1408,37 @@
       <p:sp>
         <p:nvSpPr>
           <p:cNvPr id="3" name="">
-            <a:extLst xmlns:a="http://schemas.openxmlformats.org/drawingml/2006/main">
+            <a:extLst>
               <a:ext uri="{FF2B5EF4-FFF2-40B4-BE49-F238E27FC236}">
-                <a16:creationId xmlns:a16="http://schemas.microsoft.com/office/drawing/2014/main" id="{4B4148C1-02E1-4959-A7C6-3CBCFB080B5D}"/>
+                <ns2:creationId id="{4B4148C1-02E1-4959-A7C6-3CBCFB080B5D}"/>
               </a:ext>
             </a:extLst>
           </p:cNvPr>
           <p:cNvSpPr>
-            <a:spLocks xmlns:a="http://schemas.openxmlformats.org/drawingml/2006/main" noGrp="1"/>
-          </p:cNvSpPr>
-          <p:nvPr/>
-        </p:nvSpPr>
-        <p:spPr>
-          <a:xfrm xmlns:a="http://schemas.openxmlformats.org/drawingml/2006/main">
+            <a:spLocks noGrp="1"/>
+          </p:cNvSpPr>
+          <p:nvPr/>
+        </p:nvSpPr>
+        <p:spPr>
+          <a:xfrm>
             <a:off x="419100" y="1076325"/>
             <a:ext cx="9334500" cy="323850"/>
           </a:xfrm>
-          <a:prstGeom xmlns:a="http://schemas.openxmlformats.org/drawingml/2006/main" prst="rect">
+          <a:prstGeom prst="rect">
             <a:avLst/>
           </a:prstGeom>
-          <a:noFill xmlns:a="http://schemas.openxmlformats.org/drawingml/2006/main"/>
-          <a:ln xmlns:a="http://schemas.openxmlformats.org/drawingml/2006/main" w="0">
+          <a:noFill/>
+          <a:ln w="0">
             <a:noFill/>
             <a:prstDash val="solid"/>
           </a:ln>
         </p:spPr>
         <p:txBody>
-          <a:bodyPr xmlns:a="http://schemas.openxmlformats.org/drawingml/2006/main" lIns="0" tIns="0" rIns="0" bIns="0" anchor="t">
+          <a:bodyPr lIns="0" tIns="0" rIns="0" bIns="0" anchor="t">
             <a:normAutofit fontScale="100000"/>
           </a:bodyPr>
-          <a:lstStyle xmlns:a="http://schemas.openxmlformats.org/drawingml/2006/main"/>
-          <a:p xmlns:a="http://schemas.openxmlformats.org/drawingml/2006/main">
+          <a:lstStyle/>
+          <a:p>
             <a:pPr algn="l">
               <a:lnSpc>
                 <a:spcPct val="108000"/>
@@ -1470,27 +1470,27 @@
       <p:sp>
         <p:nvSpPr>
           <p:cNvPr id="4" name="">
-            <a:extLst xmlns:a="http://schemas.openxmlformats.org/drawingml/2006/main">
+            <a:extLst>
               <a:ext uri="{FF2B5EF4-FFF2-40B4-BE49-F238E27FC236}">
-                <a16:creationId xmlns:a16="http://schemas.microsoft.com/office/drawing/2014/main" id="{B8CE2880-01BA-4820-B33F-5A4142CB1FD8}"/>
+                <ns2:creationId id="{B8CE2880-01BA-4820-B33F-5A4142CB1FD8}"/>
               </a:ext>
             </a:extLst>
           </p:cNvPr>
           <p:cNvSpPr>
-            <a:spLocks xmlns:a="http://schemas.openxmlformats.org/drawingml/2006/main" noGrp="1"/>
-          </p:cNvSpPr>
-          <p:nvPr/>
-        </p:nvSpPr>
-        <p:spPr>
-          <a:xfrm xmlns:a="http://schemas.openxmlformats.org/drawingml/2006/main">
+            <a:spLocks noGrp="1"/>
+          </p:cNvSpPr>
+          <p:nvPr/>
+        </p:nvSpPr>
+        <p:spPr>
+          <a:xfrm>
             <a:off x="400050" y="1447800"/>
             <a:ext cx="11391900" cy="0"/>
           </a:xfrm>
-          <a:prstGeom xmlns:a="http://schemas.openxmlformats.org/drawingml/2006/main" prst="line">
+          <a:prstGeom prst="line">
             <a:avLst/>
           </a:prstGeom>
-          <a:noFill xmlns:a="http://schemas.openxmlformats.org/drawingml/2006/main"/>
-          <a:ln xmlns:a="http://schemas.openxmlformats.org/drawingml/2006/main" w="9525">
+          <a:noFill/>
+          <a:ln w="9525">
             <a:solidFill>
               <a:srgbClr val="B8BCC4"/>
             </a:solidFill>
@@ -1501,37 +1501,37 @@
       <p:sp>
         <p:nvSpPr>
           <p:cNvPr id="5" name="">
-            <a:extLst xmlns:a="http://schemas.openxmlformats.org/drawingml/2006/main">
+            <a:extLst>
               <a:ext uri="{FF2B5EF4-FFF2-40B4-BE49-F238E27FC236}">
-                <a16:creationId xmlns:a16="http://schemas.microsoft.com/office/drawing/2014/main" id="{9D3488D9-D0D9-4199-9D64-546A3BB5D30E}"/>
+                <ns2:creationId id="{9D3488D9-D0D9-4199-9D64-546A3BB5D30E}"/>
               </a:ext>
             </a:extLst>
           </p:cNvPr>
           <p:cNvSpPr>
-            <a:spLocks xmlns:a="http://schemas.openxmlformats.org/drawingml/2006/main" noGrp="1"/>
-          </p:cNvSpPr>
-          <p:nvPr/>
-        </p:nvSpPr>
-        <p:spPr>
-          <a:xfrm xmlns:a="http://schemas.openxmlformats.org/drawingml/2006/main">
+            <a:spLocks noGrp="1"/>
+          </p:cNvSpPr>
+          <p:nvPr/>
+        </p:nvSpPr>
+        <p:spPr>
+          <a:xfrm>
             <a:off x="11277600" y="6324600"/>
             <a:ext cx="514350" cy="228600"/>
           </a:xfrm>
-          <a:prstGeom xmlns:a="http://schemas.openxmlformats.org/drawingml/2006/main" prst="rect">
+          <a:prstGeom prst="rect">
             <a:avLst/>
           </a:prstGeom>
-          <a:noFill xmlns:a="http://schemas.openxmlformats.org/drawingml/2006/main"/>
-          <a:ln xmlns:a="http://schemas.openxmlformats.org/drawingml/2006/main" w="0">
+          <a:noFill/>
+          <a:ln w="0">
             <a:noFill/>
             <a:prstDash val="solid"/>
           </a:ln>
         </p:spPr>
         <p:txBody>
-          <a:bodyPr xmlns:a="http://schemas.openxmlformats.org/drawingml/2006/main" lIns="0" tIns="0" rIns="0" bIns="0" anchor="t">
+          <a:bodyPr lIns="0" tIns="0" rIns="0" bIns="0" anchor="t">
             <a:normAutofit fontScale="100000"/>
           </a:bodyPr>
-          <a:lstStyle xmlns:a="http://schemas.openxmlformats.org/drawingml/2006/main"/>
-          <a:p xmlns:a="http://schemas.openxmlformats.org/drawingml/2006/main">
+          <a:lstStyle/>
+          <a:p>
             <a:pPr algn="r">
               <a:lnSpc>
                 <a:spcPct val="112000"/>
@@ -1563,31 +1563,31 @@
       <p:sp>
         <p:nvSpPr>
           <p:cNvPr id="6" name="">
-            <a:extLst xmlns:a="http://schemas.openxmlformats.org/drawingml/2006/main">
+            <a:extLst>
               <a:ext uri="{FF2B5EF4-FFF2-40B4-BE49-F238E27FC236}">
-                <a16:creationId xmlns:a16="http://schemas.microsoft.com/office/drawing/2014/main" id="{A9AD3EC9-E37B-4406-8B3C-EBFE61207D10}"/>
+                <ns2:creationId id="{A9AD3EC9-E37B-4406-8B3C-EBFE61207D10}"/>
               </a:ext>
             </a:extLst>
           </p:cNvPr>
           <p:cNvSpPr>
-            <a:spLocks xmlns:a="http://schemas.openxmlformats.org/drawingml/2006/main" noGrp="1"/>
-          </p:cNvSpPr>
-          <p:nvPr/>
-        </p:nvSpPr>
-        <p:spPr>
-          <a:xfrm xmlns:a="http://schemas.openxmlformats.org/drawingml/2006/main">
+            <a:spLocks noGrp="1"/>
+          </p:cNvSpPr>
+          <p:nvPr/>
+        </p:nvSpPr>
+        <p:spPr>
+          <a:xfrm>
             <a:off x="400050" y="1676400"/>
             <a:ext cx="11391900" cy="590550"/>
           </a:xfrm>
-          <a:prstGeom xmlns:a="http://schemas.openxmlformats.org/drawingml/2006/main" prst="roundRect">
+          <a:prstGeom prst="roundRect">
             <a:avLst>
               <a:gd name="adj" fmla="val 0"/>
             </a:avLst>
           </a:prstGeom>
-          <a:solidFill xmlns:a="http://schemas.openxmlformats.org/drawingml/2006/main">
+          <a:solidFill>
             <a:srgbClr val="EDEDED"/>
           </a:solidFill>
-          <a:ln xmlns:a="http://schemas.openxmlformats.org/drawingml/2006/main" w="11430">
+          <a:ln w="11430">
             <a:solidFill>
               <a:srgbClr val="B8BCC4"/>
             </a:solidFill>
@@ -1595,11 +1595,11 @@
           </a:ln>
         </p:spPr>
         <p:txBody>
-          <a:bodyPr xmlns:a="http://schemas.openxmlformats.org/drawingml/2006/main" lIns="114300" tIns="76200" rIns="114300" bIns="76200" anchor="ctr">
+          <a:bodyPr lIns="114300" tIns="76200" rIns="114300" bIns="76200" anchor="ctr">
             <a:normAutofit fontScale="82190"/>
           </a:bodyPr>
-          <a:lstStyle xmlns:a="http://schemas.openxmlformats.org/drawingml/2006/main"/>
-          <a:p xmlns:a="http://schemas.openxmlformats.org/drawingml/2006/main">
+          <a:lstStyle/>
+          <a:p>
             <a:pPr algn="ctr">
               <a:lnSpc>
                 <a:spcPct val="106000"/>
@@ -1626,7 +1626,7 @@
               <a:t>Schema Registry / Core SDK</a:t>
             </a:r>
           </a:p>
-          <a:p xmlns:a="http://schemas.openxmlformats.org/drawingml/2006/main">
+          <a:p>
             <a:pPr algn="ctr">
               <a:lnSpc>
                 <a:spcPct val="106000"/>
@@ -1658,37 +1658,37 @@
       <p:sp>
         <p:nvSpPr>
           <p:cNvPr id="7" name="">
-            <a:extLst xmlns:a="http://schemas.openxmlformats.org/drawingml/2006/main">
+            <a:extLst>
               <a:ext uri="{FF2B5EF4-FFF2-40B4-BE49-F238E27FC236}">
-                <a16:creationId xmlns:a16="http://schemas.microsoft.com/office/drawing/2014/main" id="{A0DC2BAE-26CF-456A-B814-88FA7BA7FF39}"/>
+                <ns2:creationId id="{A0DC2BAE-26CF-456A-B814-88FA7BA7FF39}"/>
               </a:ext>
             </a:extLst>
           </p:cNvPr>
           <p:cNvSpPr>
-            <a:spLocks xmlns:a="http://schemas.openxmlformats.org/drawingml/2006/main" noGrp="1"/>
-          </p:cNvSpPr>
-          <p:nvPr/>
-        </p:nvSpPr>
-        <p:spPr>
-          <a:xfrm xmlns:a="http://schemas.openxmlformats.org/drawingml/2006/main">
+            <a:spLocks noGrp="1"/>
+          </p:cNvSpPr>
+          <p:nvPr/>
+        </p:nvSpPr>
+        <p:spPr>
+          <a:xfrm>
             <a:off x="7620000" y="2362200"/>
             <a:ext cx="3619500" cy="228600"/>
           </a:xfrm>
-          <a:prstGeom xmlns:a="http://schemas.openxmlformats.org/drawingml/2006/main" prst="rect">
+          <a:prstGeom prst="rect">
             <a:avLst/>
           </a:prstGeom>
-          <a:noFill xmlns:a="http://schemas.openxmlformats.org/drawingml/2006/main"/>
-          <a:ln xmlns:a="http://schemas.openxmlformats.org/drawingml/2006/main" w="0">
+          <a:noFill/>
+          <a:ln w="0">
             <a:noFill/>
             <a:prstDash val="solid"/>
           </a:ln>
         </p:spPr>
         <p:txBody>
-          <a:bodyPr xmlns:a="http://schemas.openxmlformats.org/drawingml/2006/main" lIns="0" tIns="0" rIns="0" bIns="0" anchor="t">
+          <a:bodyPr lIns="0" tIns="0" rIns="0" bIns="0" anchor="t">
             <a:normAutofit fontScale="100000"/>
           </a:bodyPr>
-          <a:lstStyle xmlns:a="http://schemas.openxmlformats.org/drawingml/2006/main"/>
-          <a:p xmlns:a="http://schemas.openxmlformats.org/drawingml/2006/main">
+          <a:lstStyle/>
+          <a:p>
             <a:pPr algn="ctr">
               <a:lnSpc>
                 <a:spcPct val="112000"/>
@@ -1720,31 +1720,31 @@
       <p:sp>
         <p:nvSpPr>
           <p:cNvPr id="8" name="">
-            <a:extLst xmlns:a="http://schemas.openxmlformats.org/drawingml/2006/main">
+            <a:extLst>
               <a:ext uri="{FF2B5EF4-FFF2-40B4-BE49-F238E27FC236}">
-                <a16:creationId xmlns:a16="http://schemas.microsoft.com/office/drawing/2014/main" id="{B5D4F87F-0D00-4BA7-B650-78A9F920A0C3}"/>
+                <ns2:creationId id="{B5D4F87F-0D00-4BA7-B650-78A9F920A0C3}"/>
               </a:ext>
             </a:extLst>
           </p:cNvPr>
           <p:cNvSpPr>
-            <a:spLocks xmlns:a="http://schemas.openxmlformats.org/drawingml/2006/main" noGrp="1"/>
-          </p:cNvSpPr>
-          <p:nvPr/>
-        </p:nvSpPr>
-        <p:spPr>
-          <a:xfrm xmlns:a="http://schemas.openxmlformats.org/drawingml/2006/main">
+            <a:spLocks noGrp="1"/>
+          </p:cNvSpPr>
+          <p:nvPr/>
+        </p:nvSpPr>
+        <p:spPr>
+          <a:xfrm>
             <a:off x="514350" y="3048000"/>
             <a:ext cx="1657350" cy="819150"/>
           </a:xfrm>
-          <a:prstGeom xmlns:a="http://schemas.openxmlformats.org/drawingml/2006/main" prst="roundRect">
+          <a:prstGeom prst="roundRect">
             <a:avLst>
               <a:gd name="adj" fmla="val 9302"/>
             </a:avLst>
           </a:prstGeom>
-          <a:solidFill xmlns:a="http://schemas.openxmlformats.org/drawingml/2006/main">
+          <a:solidFill>
             <a:srgbClr val="E6EEF8"/>
           </a:solidFill>
-          <a:ln xmlns:a="http://schemas.openxmlformats.org/drawingml/2006/main" w="11430">
+          <a:ln w="11430">
             <a:solidFill>
               <a:srgbClr val="426A9A"/>
             </a:solidFill>
@@ -1752,11 +1752,11 @@
           </a:ln>
         </p:spPr>
         <p:txBody>
-          <a:bodyPr xmlns:a="http://schemas.openxmlformats.org/drawingml/2006/main" lIns="114300" tIns="76200" rIns="114300" bIns="76200" anchor="ctr">
+          <a:bodyPr lIns="114300" tIns="76200" rIns="114300" bIns="76200" anchor="ctr">
             <a:normAutofit fontScale="95088"/>
           </a:bodyPr>
-          <a:lstStyle xmlns:a="http://schemas.openxmlformats.org/drawingml/2006/main"/>
-          <a:p xmlns:a="http://schemas.openxmlformats.org/drawingml/2006/main">
+          <a:lstStyle/>
+          <a:p>
             <a:pPr algn="ctr">
               <a:lnSpc>
                 <a:spcPct val="106000"/>
@@ -1783,7 +1783,7 @@
               <a:t>원본 입력</a:t>
             </a:r>
           </a:p>
-          <a:p xmlns:a="http://schemas.openxmlformats.org/drawingml/2006/main">
+          <a:p>
             <a:pPr algn="ctr">
               <a:lnSpc>
                 <a:spcPct val="106000"/>
@@ -1815,31 +1815,31 @@
       <p:sp>
         <p:nvSpPr>
           <p:cNvPr id="9" name="">
-            <a:extLst xmlns:a="http://schemas.openxmlformats.org/drawingml/2006/main">
+            <a:extLst>
               <a:ext uri="{FF2B5EF4-FFF2-40B4-BE49-F238E27FC236}">
-                <a16:creationId xmlns:a16="http://schemas.microsoft.com/office/drawing/2014/main" id="{A226A944-8CD8-4B56-9A3C-576A5D4C4DB4}"/>
+                <ns2:creationId id="{A226A944-8CD8-4B56-9A3C-576A5D4C4DB4}"/>
               </a:ext>
             </a:extLst>
           </p:cNvPr>
           <p:cNvSpPr>
-            <a:spLocks xmlns:a="http://schemas.openxmlformats.org/drawingml/2006/main" noGrp="1"/>
-          </p:cNvSpPr>
-          <p:nvPr/>
-        </p:nvSpPr>
-        <p:spPr>
-          <a:xfrm xmlns:a="http://schemas.openxmlformats.org/drawingml/2006/main">
+            <a:spLocks noGrp="1"/>
+          </p:cNvSpPr>
+          <p:nvPr/>
+        </p:nvSpPr>
+        <p:spPr>
+          <a:xfrm>
             <a:off x="2724150" y="3048000"/>
             <a:ext cx="1924050" cy="819150"/>
           </a:xfrm>
-          <a:prstGeom xmlns:a="http://schemas.openxmlformats.org/drawingml/2006/main" prst="roundRect">
+          <a:prstGeom prst="roundRect">
             <a:avLst>
               <a:gd name="adj" fmla="val 9302"/>
             </a:avLst>
           </a:prstGeom>
-          <a:solidFill xmlns:a="http://schemas.openxmlformats.org/drawingml/2006/main">
+          <a:solidFill>
             <a:srgbClr val="E4F0DD"/>
           </a:solidFill>
-          <a:ln xmlns:a="http://schemas.openxmlformats.org/drawingml/2006/main" w="11430">
+          <a:ln w="11430">
             <a:solidFill>
               <a:srgbClr val="4D7C2F"/>
             </a:solidFill>
@@ -1847,11 +1847,11 @@
           </a:ln>
         </p:spPr>
         <p:txBody>
-          <a:bodyPr xmlns:a="http://schemas.openxmlformats.org/drawingml/2006/main" lIns="114300" tIns="76200" rIns="114300" bIns="76200" anchor="ctr">
+          <a:bodyPr lIns="114300" tIns="76200" rIns="114300" bIns="76200" anchor="ctr">
             <a:normAutofit fontScale="100000"/>
           </a:bodyPr>
-          <a:lstStyle xmlns:a="http://schemas.openxmlformats.org/drawingml/2006/main"/>
-          <a:p xmlns:a="http://schemas.openxmlformats.org/drawingml/2006/main">
+          <a:lstStyle/>
+          <a:p>
             <a:pPr algn="ctr">
               <a:lnSpc>
                 <a:spcPct val="106000"/>
@@ -1878,7 +1878,7 @@
               <a:t>정규화기</a:t>
             </a:r>
           </a:p>
-          <a:p xmlns:a="http://schemas.openxmlformats.org/drawingml/2006/main">
+          <a:p>
             <a:pPr algn="ctr">
               <a:lnSpc>
                 <a:spcPct val="106000"/>
@@ -1910,31 +1910,31 @@
       <p:sp>
         <p:nvSpPr>
           <p:cNvPr id="10" name="">
-            <a:extLst xmlns:a="http://schemas.openxmlformats.org/drawingml/2006/main">
+            <a:extLst>
               <a:ext uri="{FF2B5EF4-FFF2-40B4-BE49-F238E27FC236}">
-                <a16:creationId xmlns:a16="http://schemas.microsoft.com/office/drawing/2014/main" id="{8C647034-0FB3-495E-A649-35CE93ED011A}"/>
+                <ns2:creationId id="{8C647034-0FB3-495E-A649-35CE93ED011A}"/>
               </a:ext>
             </a:extLst>
           </p:cNvPr>
           <p:cNvSpPr>
-            <a:spLocks xmlns:a="http://schemas.openxmlformats.org/drawingml/2006/main" noGrp="1"/>
-          </p:cNvSpPr>
-          <p:nvPr/>
-        </p:nvSpPr>
-        <p:spPr>
-          <a:xfrm xmlns:a="http://schemas.openxmlformats.org/drawingml/2006/main">
+            <a:spLocks noGrp="1"/>
+          </p:cNvSpPr>
+          <p:nvPr/>
+        </p:nvSpPr>
+        <p:spPr>
+          <a:xfrm>
             <a:off x="5200650" y="3048000"/>
             <a:ext cx="1885950" cy="819150"/>
           </a:xfrm>
-          <a:prstGeom xmlns:a="http://schemas.openxmlformats.org/drawingml/2006/main" prst="roundRect">
+          <a:prstGeom prst="roundRect">
             <a:avLst>
               <a:gd name="adj" fmla="val 9302"/>
             </a:avLst>
           </a:prstGeom>
-          <a:solidFill xmlns:a="http://schemas.openxmlformats.org/drawingml/2006/main">
+          <a:solidFill>
             <a:srgbClr val="F6F6F6"/>
           </a:solidFill>
-          <a:ln xmlns:a="http://schemas.openxmlformats.org/drawingml/2006/main" w="11430">
+          <a:ln w="11430">
             <a:solidFill>
               <a:srgbClr val="B8BCC4"/>
             </a:solidFill>
@@ -1942,11 +1942,11 @@
           </a:ln>
         </p:spPr>
         <p:txBody>
-          <a:bodyPr xmlns:a="http://schemas.openxmlformats.org/drawingml/2006/main" lIns="114300" tIns="76200" rIns="114300" bIns="76200" anchor="ctr">
+          <a:bodyPr lIns="114300" tIns="76200" rIns="114300" bIns="76200" anchor="ctr">
             <a:normAutofit fontScale="100000"/>
           </a:bodyPr>
-          <a:lstStyle xmlns:a="http://schemas.openxmlformats.org/drawingml/2006/main"/>
-          <a:p xmlns:a="http://schemas.openxmlformats.org/drawingml/2006/main">
+          <a:lstStyle/>
+          <a:p>
             <a:pPr algn="ctr">
               <a:lnSpc>
                 <a:spcPct val="106000"/>
@@ -1973,7 +1973,7 @@
               <a:t>안전 사실값</a:t>
             </a:r>
           </a:p>
-          <a:p xmlns:a="http://schemas.openxmlformats.org/drawingml/2006/main">
+          <a:p>
             <a:pPr algn="ctr">
               <a:lnSpc>
                 <a:spcPct val="106000"/>
@@ -2005,31 +2005,31 @@
       <p:sp>
         <p:nvSpPr>
           <p:cNvPr id="11" name="">
-            <a:extLst xmlns:a="http://schemas.openxmlformats.org/drawingml/2006/main">
+            <a:extLst>
               <a:ext uri="{FF2B5EF4-FFF2-40B4-BE49-F238E27FC236}">
-                <a16:creationId xmlns:a16="http://schemas.microsoft.com/office/drawing/2014/main" id="{19156F27-850C-47E2-84CE-292DF5F886A8}"/>
+                <ns2:creationId id="{19156F27-850C-47E2-84CE-292DF5F886A8}"/>
               </a:ext>
             </a:extLst>
           </p:cNvPr>
           <p:cNvSpPr>
-            <a:spLocks xmlns:a="http://schemas.openxmlformats.org/drawingml/2006/main" noGrp="1"/>
-          </p:cNvSpPr>
-          <p:nvPr/>
-        </p:nvSpPr>
-        <p:spPr>
-          <a:xfrm xmlns:a="http://schemas.openxmlformats.org/drawingml/2006/main">
+            <a:spLocks noGrp="1"/>
+          </p:cNvSpPr>
+          <p:nvPr/>
+        </p:nvSpPr>
+        <p:spPr>
+          <a:xfrm>
             <a:off x="7639050" y="3048000"/>
             <a:ext cx="2000250" cy="819150"/>
           </a:xfrm>
-          <a:prstGeom xmlns:a="http://schemas.openxmlformats.org/drawingml/2006/main" prst="roundRect">
+          <a:prstGeom prst="roundRect">
             <a:avLst>
               <a:gd name="adj" fmla="val 9302"/>
             </a:avLst>
           </a:prstGeom>
-          <a:solidFill xmlns:a="http://schemas.openxmlformats.org/drawingml/2006/main">
+          <a:solidFill>
             <a:srgbClr val="E4F0DD"/>
           </a:solidFill>
-          <a:ln xmlns:a="http://schemas.openxmlformats.org/drawingml/2006/main" w="11430">
+          <a:ln w="11430">
             <a:solidFill>
               <a:srgbClr val="4D7C2F"/>
             </a:solidFill>
@@ -2037,11 +2037,11 @@
           </a:ln>
         </p:spPr>
         <p:txBody>
-          <a:bodyPr xmlns:a="http://schemas.openxmlformats.org/drawingml/2006/main" lIns="114300" tIns="76200" rIns="114300" bIns="76200" anchor="ctr">
+          <a:bodyPr lIns="114300" tIns="76200" rIns="114300" bIns="76200" anchor="ctr">
             <a:normAutofit fontScale="95088"/>
           </a:bodyPr>
-          <a:lstStyle xmlns:a="http://schemas.openxmlformats.org/drawingml/2006/main"/>
-          <a:p xmlns:a="http://schemas.openxmlformats.org/drawingml/2006/main">
+          <a:lstStyle/>
+          <a:p>
             <a:pPr algn="ctr">
               <a:lnSpc>
                 <a:spcPct val="106000"/>
@@ -2068,7 +2068,7 @@
               <a:t>출력 빌더</a:t>
             </a:r>
           </a:p>
-          <a:p xmlns:a="http://schemas.openxmlformats.org/drawingml/2006/main">
+          <a:p>
             <a:pPr algn="ctr">
               <a:lnSpc>
                 <a:spcPct val="106000"/>
@@ -2101,20 +2101,20 @@
         <p:nvCxnSpPr>
           <p:cNvPr id="36" name=""/>
           <p:cNvCxnSpPr>
-            <a:stCxn xmlns:a="http://schemas.openxmlformats.org/drawingml/2006/main" id="8" idx="3"/>
-            <a:endCxn xmlns:a="http://schemas.openxmlformats.org/drawingml/2006/main" id="9" idx="1"/>
+            <a:stCxn id="8" idx="3"/>
+            <a:endCxn id="9" idx="1"/>
           </p:cNvCxnSpPr>
           <p:nvPr/>
         </p:nvCxnSpPr>
         <p:spPr>
-          <a:xfrm xmlns:a="http://schemas.openxmlformats.org/drawingml/2006/main">
+          <a:xfrm>
             <a:off x="2171700" y="3457575"/>
             <a:ext cx="552450" cy="0"/>
           </a:xfrm>
-          <a:prstGeom xmlns:a="http://schemas.openxmlformats.org/drawingml/2006/main" prst="straightConnector1">
+          <a:prstGeom prst="straightConnector1">
             <a:avLst/>
           </a:prstGeom>
-          <a:ln xmlns:a="http://schemas.openxmlformats.org/drawingml/2006/main" w="15240">
+          <a:ln w="15240">
             <a:solidFill>
               <a:srgbClr val="000000"/>
             </a:solidFill>
@@ -2128,20 +2128,20 @@
         <p:nvCxnSpPr>
           <p:cNvPr id="37" name=""/>
           <p:cNvCxnSpPr>
-            <a:stCxn xmlns:a="http://schemas.openxmlformats.org/drawingml/2006/main" id="9" idx="3"/>
-            <a:endCxn xmlns:a="http://schemas.openxmlformats.org/drawingml/2006/main" id="10" idx="1"/>
+            <a:stCxn id="9" idx="3"/>
+            <a:endCxn id="10" idx="1"/>
           </p:cNvCxnSpPr>
           <p:nvPr/>
         </p:nvCxnSpPr>
         <p:spPr>
-          <a:xfrm xmlns:a="http://schemas.openxmlformats.org/drawingml/2006/main">
+          <a:xfrm>
             <a:off x="4648200" y="3457575"/>
             <a:ext cx="552450" cy="0"/>
           </a:xfrm>
-          <a:prstGeom xmlns:a="http://schemas.openxmlformats.org/drawingml/2006/main" prst="straightConnector1">
+          <a:prstGeom prst="straightConnector1">
             <a:avLst/>
           </a:prstGeom>
-          <a:ln xmlns:a="http://schemas.openxmlformats.org/drawingml/2006/main" w="15240">
+          <a:ln w="15240">
             <a:solidFill>
               <a:srgbClr val="000000"/>
             </a:solidFill>
@@ -2155,20 +2155,20 @@
         <p:nvCxnSpPr>
           <p:cNvPr id="38" name=""/>
           <p:cNvCxnSpPr>
-            <a:stCxn xmlns:a="http://schemas.openxmlformats.org/drawingml/2006/main" id="10" idx="3"/>
-            <a:endCxn xmlns:a="http://schemas.openxmlformats.org/drawingml/2006/main" id="11" idx="1"/>
+            <a:stCxn id="10" idx="3"/>
+            <a:endCxn id="11" idx="1"/>
           </p:cNvCxnSpPr>
           <p:nvPr/>
         </p:nvCxnSpPr>
         <p:spPr>
-          <a:xfrm xmlns:a="http://schemas.openxmlformats.org/drawingml/2006/main">
+          <a:xfrm>
             <a:off x="7086600" y="3457575"/>
             <a:ext cx="552450" cy="0"/>
           </a:xfrm>
-          <a:prstGeom xmlns:a="http://schemas.openxmlformats.org/drawingml/2006/main" prst="straightConnector1">
+          <a:prstGeom prst="straightConnector1">
             <a:avLst/>
           </a:prstGeom>
-          <a:ln xmlns:a="http://schemas.openxmlformats.org/drawingml/2006/main" w="15240">
+          <a:ln w="15240">
             <a:solidFill>
               <a:srgbClr val="000000"/>
             </a:solidFill>
@@ -2181,31 +2181,31 @@
       <p:sp>
         <p:nvSpPr>
           <p:cNvPr id="15" name="">
-            <a:extLst xmlns:a="http://schemas.openxmlformats.org/drawingml/2006/main">
+            <a:extLst>
               <a:ext uri="{FF2B5EF4-FFF2-40B4-BE49-F238E27FC236}">
-                <a16:creationId xmlns:a16="http://schemas.microsoft.com/office/drawing/2014/main" id="{0D5F4FD0-1942-4FE7-8B3F-66B941073CB0}"/>
+                <ns2:creationId id="{0D5F4FD0-1942-4FE7-8B3F-66B941073CB0}"/>
               </a:ext>
             </a:extLst>
           </p:cNvPr>
           <p:cNvSpPr>
-            <a:spLocks xmlns:a="http://schemas.openxmlformats.org/drawingml/2006/main" noGrp="1"/>
-          </p:cNvSpPr>
-          <p:nvPr/>
-        </p:nvSpPr>
-        <p:spPr>
-          <a:xfrm xmlns:a="http://schemas.openxmlformats.org/drawingml/2006/main">
+            <a:spLocks noGrp="1"/>
+          </p:cNvSpPr>
+          <p:nvPr/>
+        </p:nvSpPr>
+        <p:spPr>
+          <a:xfrm>
             <a:off x="10134600" y="2609850"/>
             <a:ext cx="1657350" cy="628650"/>
           </a:xfrm>
-          <a:prstGeom xmlns:a="http://schemas.openxmlformats.org/drawingml/2006/main" prst="roundRect">
+          <a:prstGeom prst="roundRect">
             <a:avLst>
               <a:gd name="adj" fmla="val 12121"/>
             </a:avLst>
           </a:prstGeom>
-          <a:solidFill xmlns:a="http://schemas.openxmlformats.org/drawingml/2006/main">
+          <a:solidFill>
             <a:srgbClr val="F2E5C4"/>
           </a:solidFill>
-          <a:ln xmlns:a="http://schemas.openxmlformats.org/drawingml/2006/main" w="11430">
+          <a:ln w="11430">
             <a:solidFill>
               <a:srgbClr val="8A5A00"/>
             </a:solidFill>
@@ -2213,11 +2213,11 @@
           </a:ln>
         </p:spPr>
         <p:txBody>
-          <a:bodyPr xmlns:a="http://schemas.openxmlformats.org/drawingml/2006/main" lIns="114300" tIns="76200" rIns="114300" bIns="76200" anchor="ctr">
+          <a:bodyPr lIns="114300" tIns="76200" rIns="114300" bIns="76200" anchor="ctr">
             <a:normAutofit fontScale="100000"/>
           </a:bodyPr>
-          <a:lstStyle xmlns:a="http://schemas.openxmlformats.org/drawingml/2006/main"/>
-          <a:p xmlns:a="http://schemas.openxmlformats.org/drawingml/2006/main">
+          <a:lstStyle/>
+          <a:p>
             <a:pPr algn="ctr">
               <a:lnSpc>
                 <a:spcPct val="106000"/>
@@ -2244,7 +2244,7 @@
               <a:t>OutcomeSpace</a:t>
             </a:r>
           </a:p>
-          <a:p xmlns:a="http://schemas.openxmlformats.org/drawingml/2006/main">
+          <a:p>
             <a:pPr algn="ctr">
               <a:lnSpc>
                 <a:spcPct val="106000"/>
@@ -2276,31 +2276,31 @@
       <p:sp>
         <p:nvSpPr>
           <p:cNvPr id="16" name="">
-            <a:extLst xmlns:a="http://schemas.openxmlformats.org/drawingml/2006/main">
+            <a:extLst>
               <a:ext uri="{FF2B5EF4-FFF2-40B4-BE49-F238E27FC236}">
-                <a16:creationId xmlns:a16="http://schemas.microsoft.com/office/drawing/2014/main" id="{F04C340D-B272-4137-9314-44910A223CA9}"/>
+                <ns2:creationId id="{F04C340D-B272-4137-9314-44910A223CA9}"/>
               </a:ext>
             </a:extLst>
           </p:cNvPr>
           <p:cNvSpPr>
-            <a:spLocks xmlns:a="http://schemas.openxmlformats.org/drawingml/2006/main" noGrp="1"/>
-          </p:cNvSpPr>
-          <p:nvPr/>
-        </p:nvSpPr>
-        <p:spPr>
-          <a:xfrm xmlns:a="http://schemas.openxmlformats.org/drawingml/2006/main">
+            <a:spLocks noGrp="1"/>
+          </p:cNvSpPr>
+          <p:nvPr/>
+        </p:nvSpPr>
+        <p:spPr>
+          <a:xfrm>
             <a:off x="10134600" y="3467100"/>
             <a:ext cx="1657350" cy="628650"/>
           </a:xfrm>
-          <a:prstGeom xmlns:a="http://schemas.openxmlformats.org/drawingml/2006/main" prst="roundRect">
+          <a:prstGeom prst="roundRect">
             <a:avLst>
               <a:gd name="adj" fmla="val 12121"/>
             </a:avLst>
           </a:prstGeom>
-          <a:solidFill xmlns:a="http://schemas.openxmlformats.org/drawingml/2006/main">
+          <a:solidFill>
             <a:srgbClr val="EFE7F4"/>
           </a:solidFill>
-          <a:ln xmlns:a="http://schemas.openxmlformats.org/drawingml/2006/main" w="11430">
+          <a:ln w="11430">
             <a:solidFill>
               <a:srgbClr val="7B5B8E"/>
             </a:solidFill>
@@ -2308,11 +2308,11 @@
           </a:ln>
         </p:spPr>
         <p:txBody>
-          <a:bodyPr xmlns:a="http://schemas.openxmlformats.org/drawingml/2006/main" lIns="114300" tIns="76200" rIns="114300" bIns="76200" anchor="ctr">
+          <a:bodyPr lIns="114300" tIns="76200" rIns="114300" bIns="76200" anchor="ctr">
             <a:normAutofit fontScale="100000"/>
           </a:bodyPr>
-          <a:lstStyle xmlns:a="http://schemas.openxmlformats.org/drawingml/2006/main"/>
-          <a:p xmlns:a="http://schemas.openxmlformats.org/drawingml/2006/main">
+          <a:lstStyle/>
+          <a:p>
             <a:pPr algn="ctr">
               <a:lnSpc>
                 <a:spcPct val="106000"/>
@@ -2339,7 +2339,7 @@
               <a:t>구조화 계획 요청</a:t>
             </a:r>
           </a:p>
-          <a:p xmlns:a="http://schemas.openxmlformats.org/drawingml/2006/main">
+          <a:p>
             <a:pPr algn="ctr">
               <a:lnSpc>
                 <a:spcPct val="106000"/>
@@ -2371,31 +2371,31 @@
       <p:sp>
         <p:nvSpPr>
           <p:cNvPr id="17" name="">
-            <a:extLst xmlns:a="http://schemas.openxmlformats.org/drawingml/2006/main">
+            <a:extLst>
               <a:ext uri="{FF2B5EF4-FFF2-40B4-BE49-F238E27FC236}">
-                <a16:creationId xmlns:a16="http://schemas.microsoft.com/office/drawing/2014/main" id="{DA2D863F-5C28-4E36-AB30-88987CB62E33}"/>
+                <ns2:creationId id="{DA2D863F-5C28-4E36-AB30-88987CB62E33}"/>
               </a:ext>
             </a:extLst>
           </p:cNvPr>
           <p:cNvSpPr>
-            <a:spLocks xmlns:a="http://schemas.openxmlformats.org/drawingml/2006/main" noGrp="1"/>
-          </p:cNvSpPr>
-          <p:nvPr/>
-        </p:nvSpPr>
-        <p:spPr>
-          <a:xfrm xmlns:a="http://schemas.openxmlformats.org/drawingml/2006/main">
+            <a:spLocks noGrp="1"/>
+          </p:cNvSpPr>
+          <p:nvPr/>
+        </p:nvSpPr>
+        <p:spPr>
+          <a:xfrm>
             <a:off x="4000500" y="4876800"/>
             <a:ext cx="1962150" cy="628650"/>
           </a:xfrm>
-          <a:prstGeom xmlns:a="http://schemas.openxmlformats.org/drawingml/2006/main" prst="roundRect">
+          <a:prstGeom prst="roundRect">
             <a:avLst>
               <a:gd name="adj" fmla="val 12121"/>
             </a:avLst>
           </a:prstGeom>
-          <a:solidFill xmlns:a="http://schemas.openxmlformats.org/drawingml/2006/main">
+          <a:solidFill>
             <a:srgbClr val="F0E1CF"/>
           </a:solidFill>
-          <a:ln xmlns:a="http://schemas.openxmlformats.org/drawingml/2006/main" w="11430">
+          <a:ln w="11430">
             <a:solidFill>
               <a:srgbClr val="875214"/>
             </a:solidFill>
@@ -2403,11 +2403,11 @@
           </a:ln>
         </p:spPr>
         <p:txBody>
-          <a:bodyPr xmlns:a="http://schemas.openxmlformats.org/drawingml/2006/main" lIns="114300" tIns="76200" rIns="114300" bIns="76200" anchor="ctr">
+          <a:bodyPr lIns="114300" tIns="76200" rIns="114300" bIns="76200" anchor="ctr">
             <a:normAutofit fontScale="98956"/>
           </a:bodyPr>
-          <a:lstStyle xmlns:a="http://schemas.openxmlformats.org/drawingml/2006/main"/>
-          <a:p xmlns:a="http://schemas.openxmlformats.org/drawingml/2006/main">
+          <a:lstStyle/>
+          <a:p>
             <a:pPr algn="ctr">
               <a:lnSpc>
                 <a:spcPct val="106000"/>
@@ -2434,7 +2434,7 @@
               <a:t>PII Vault</a:t>
             </a:r>
           </a:p>
-          <a:p xmlns:a="http://schemas.openxmlformats.org/drawingml/2006/main">
+          <a:p>
             <a:pPr algn="ctr">
               <a:lnSpc>
                 <a:spcPct val="106000"/>
@@ -2458,7 +2458,7 @@
                 <a:ea typeface="Helvetica Neue"/>
                 <a:cs typeface="Helvetica Neue"/>
               </a:rPr>
-              <a:t>실행 단계 복원</a:t>
+              <a:t>실행 시 PII 조회</a:t>
             </a:r>
           </a:p>
         </p:txBody>
@@ -2466,31 +2466,31 @@
       <p:sp>
         <p:nvSpPr>
           <p:cNvPr id="18" name="">
-            <a:extLst xmlns:a="http://schemas.openxmlformats.org/drawingml/2006/main">
+            <a:extLst>
               <a:ext uri="{FF2B5EF4-FFF2-40B4-BE49-F238E27FC236}">
-                <a16:creationId xmlns:a16="http://schemas.microsoft.com/office/drawing/2014/main" id="{8DF7791C-2381-4FBC-B393-854DB64286FC}"/>
+                <ns2:creationId id="{8DF7791C-2381-4FBC-B393-854DB64286FC}"/>
               </a:ext>
             </a:extLst>
           </p:cNvPr>
           <p:cNvSpPr>
-            <a:spLocks xmlns:a="http://schemas.openxmlformats.org/drawingml/2006/main" noGrp="1"/>
-          </p:cNvSpPr>
-          <p:nvPr/>
-        </p:nvSpPr>
-        <p:spPr>
-          <a:xfrm xmlns:a="http://schemas.openxmlformats.org/drawingml/2006/main">
+            <a:spLocks noGrp="1"/>
+          </p:cNvSpPr>
+          <p:nvPr/>
+        </p:nvSpPr>
+        <p:spPr>
+          <a:xfrm>
             <a:off x="6343650" y="4876800"/>
             <a:ext cx="1962150" cy="628650"/>
           </a:xfrm>
-          <a:prstGeom xmlns:a="http://schemas.openxmlformats.org/drawingml/2006/main" prst="roundRect">
+          <a:prstGeom prst="roundRect">
             <a:avLst>
               <a:gd name="adj" fmla="val 12121"/>
             </a:avLst>
           </a:prstGeom>
-          <a:solidFill xmlns:a="http://schemas.openxmlformats.org/drawingml/2006/main">
+          <a:solidFill>
             <a:srgbClr val="F2E5C4"/>
           </a:solidFill>
-          <a:ln xmlns:a="http://schemas.openxmlformats.org/drawingml/2006/main" w="11430">
+          <a:ln w="11430">
             <a:solidFill>
               <a:srgbClr val="8A5A00"/>
             </a:solidFill>
@@ -2498,11 +2498,11 @@
           </a:ln>
         </p:spPr>
         <p:txBody>
-          <a:bodyPr xmlns:a="http://schemas.openxmlformats.org/drawingml/2006/main" lIns="114300" tIns="76200" rIns="114300" bIns="76200" anchor="ctr">
+          <a:bodyPr lIns="114300" tIns="76200" rIns="114300" bIns="76200" anchor="ctr">
             <a:normAutofit fontScale="98956"/>
           </a:bodyPr>
-          <a:lstStyle xmlns:a="http://schemas.openxmlformats.org/drawingml/2006/main"/>
-          <a:p xmlns:a="http://schemas.openxmlformats.org/drawingml/2006/main">
+          <a:lstStyle/>
+          <a:p>
             <a:pPr algn="ctr">
               <a:lnSpc>
                 <a:spcPct val="106000"/>
@@ -2529,7 +2529,7 @@
               <a:t>ufun</a:t>
             </a:r>
           </a:p>
-          <a:p xmlns:a="http://schemas.openxmlformats.org/drawingml/2006/main">
+          <a:p>
             <a:pPr algn="ctr">
               <a:lnSpc>
                 <a:spcPct val="106000"/>
@@ -2562,22 +2562,22 @@
         <p:nvCxnSpPr>
           <p:cNvPr id="43" name=""/>
           <p:cNvCxnSpPr>
-            <a:stCxn xmlns:a="http://schemas.openxmlformats.org/drawingml/2006/main" id="11" idx="3"/>
-            <a:endCxn xmlns:a="http://schemas.openxmlformats.org/drawingml/2006/main" id="15" idx="1"/>
+            <a:stCxn id="11" idx="3"/>
+            <a:endCxn id="15" idx="1"/>
           </p:cNvCxnSpPr>
           <p:nvPr/>
         </p:nvCxnSpPr>
         <p:spPr>
-          <a:xfrm xmlns:a="http://schemas.openxmlformats.org/drawingml/2006/main" flipV="1">
+          <a:xfrm flipV="1">
             <a:off x="9639300" y="2924175"/>
             <a:ext cx="495300" cy="533400"/>
           </a:xfrm>
-          <a:prstGeom xmlns:a="http://schemas.openxmlformats.org/drawingml/2006/main" prst="bentConnector3">
+          <a:prstGeom prst="bentConnector3">
             <a:avLst>
               <a:gd name="adj1" fmla="val 50000"/>
             </a:avLst>
           </a:prstGeom>
-          <a:ln xmlns:a="http://schemas.openxmlformats.org/drawingml/2006/main" w="15240">
+          <a:ln w="15240">
             <a:solidFill>
               <a:srgbClr val="000000"/>
             </a:solidFill>
@@ -2591,22 +2591,22 @@
         <p:nvCxnSpPr>
           <p:cNvPr id="44" name=""/>
           <p:cNvCxnSpPr>
-            <a:stCxn xmlns:a="http://schemas.openxmlformats.org/drawingml/2006/main" id="11" idx="3"/>
-            <a:endCxn xmlns:a="http://schemas.openxmlformats.org/drawingml/2006/main" id="16" idx="1"/>
+            <a:stCxn id="11" idx="3"/>
+            <a:endCxn id="16" idx="1"/>
           </p:cNvCxnSpPr>
           <p:nvPr/>
         </p:nvCxnSpPr>
         <p:spPr>
-          <a:xfrm xmlns:a="http://schemas.openxmlformats.org/drawingml/2006/main">
+          <a:xfrm>
             <a:off x="9639300" y="3457575"/>
             <a:ext cx="495300" cy="323850"/>
           </a:xfrm>
-          <a:prstGeom xmlns:a="http://schemas.openxmlformats.org/drawingml/2006/main" prst="bentConnector3">
+          <a:prstGeom prst="bentConnector3">
             <a:avLst>
               <a:gd name="adj1" fmla="val 50000"/>
             </a:avLst>
           </a:prstGeom>
-          <a:ln xmlns:a="http://schemas.openxmlformats.org/drawingml/2006/main" w="15240">
+          <a:ln w="15240">
             <a:solidFill>
               <a:srgbClr val="000000"/>
             </a:solidFill>
@@ -2620,24 +2620,24 @@
         <p:nvCxnSpPr>
           <p:cNvPr id="45" name=""/>
           <p:cNvCxnSpPr>
-            <a:stCxn xmlns:a="http://schemas.openxmlformats.org/drawingml/2006/main" id="8" idx="2"/>
-            <a:endCxn xmlns:a="http://schemas.openxmlformats.org/drawingml/2006/main" id="17" idx="1"/>
+            <a:stCxn id="8" idx="2"/>
+            <a:endCxn id="17" idx="1"/>
           </p:cNvCxnSpPr>
           <p:nvPr/>
         </p:nvCxnSpPr>
         <p:spPr>
-          <a:xfrm xmlns:a="http://schemas.openxmlformats.org/drawingml/2006/main">
+          <a:xfrm>
             <a:off x="1343025" y="3867150"/>
             <a:ext cx="2657475" cy="1323975"/>
           </a:xfrm>
-          <a:prstGeom xmlns:a="http://schemas.openxmlformats.org/drawingml/2006/main" prst="bentConnector5">
+          <a:prstGeom prst="bentConnector5">
             <a:avLst>
               <a:gd name="adj1" fmla="val 0"/>
               <a:gd name="adj2" fmla="val 17266"/>
               <a:gd name="adj3" fmla="val 91398"/>
             </a:avLst>
           </a:prstGeom>
-          <a:ln xmlns:a="http://schemas.openxmlformats.org/drawingml/2006/main" w="13335">
+          <a:ln w="13335">
             <a:solidFill>
               <a:srgbClr val="555555"/>
             </a:solidFill>
@@ -2651,24 +2651,24 @@
         <p:nvCxnSpPr>
           <p:cNvPr id="46" name=""/>
           <p:cNvCxnSpPr>
-            <a:stCxn xmlns:a="http://schemas.openxmlformats.org/drawingml/2006/main" id="8" idx="2"/>
-            <a:endCxn xmlns:a="http://schemas.openxmlformats.org/drawingml/2006/main" id="18" idx="1"/>
+            <a:stCxn id="8" idx="2"/>
+            <a:endCxn id="18" idx="1"/>
           </p:cNvCxnSpPr>
           <p:nvPr/>
         </p:nvCxnSpPr>
         <p:spPr>
-          <a:xfrm xmlns:a="http://schemas.openxmlformats.org/drawingml/2006/main">
+          <a:xfrm>
             <a:off x="1343025" y="3867150"/>
             <a:ext cx="5000625" cy="1323975"/>
           </a:xfrm>
-          <a:prstGeom xmlns:a="http://schemas.openxmlformats.org/drawingml/2006/main" prst="bentConnector5">
+          <a:prstGeom prst="bentConnector5">
             <a:avLst>
               <a:gd name="adj1" fmla="val 0"/>
               <a:gd name="adj2" fmla="val 17266"/>
               <a:gd name="adj3" fmla="val 95429"/>
             </a:avLst>
           </a:prstGeom>
-          <a:ln xmlns:a="http://schemas.openxmlformats.org/drawingml/2006/main" w="13335">
+          <a:ln w="13335">
             <a:solidFill>
               <a:srgbClr val="555555"/>
             </a:solidFill>
@@ -2681,37 +2681,37 @@
       <p:sp>
         <p:nvSpPr>
           <p:cNvPr id="23" name="">
-            <a:extLst xmlns:a="http://schemas.openxmlformats.org/drawingml/2006/main">
+            <a:extLst>
               <a:ext uri="{FF2B5EF4-FFF2-40B4-BE49-F238E27FC236}">
-                <a16:creationId xmlns:a16="http://schemas.microsoft.com/office/drawing/2014/main" id="{CCBF0699-708A-4EB3-84C0-CF03929C9DAB}"/>
+                <ns2:creationId id="{CCBF0699-708A-4EB3-84C0-CF03929C9DAB}"/>
               </a:ext>
             </a:extLst>
           </p:cNvPr>
           <p:cNvSpPr>
-            <a:spLocks xmlns:a="http://schemas.openxmlformats.org/drawingml/2006/main" noGrp="1"/>
-          </p:cNvSpPr>
-          <p:nvPr/>
-        </p:nvSpPr>
-        <p:spPr>
-          <a:xfrm xmlns:a="http://schemas.openxmlformats.org/drawingml/2006/main">
+            <a:spLocks noGrp="1"/>
+          </p:cNvSpPr>
+          <p:nvPr/>
+        </p:nvSpPr>
+        <p:spPr>
+          <a:xfrm>
             <a:off x="514350" y="5905500"/>
             <a:ext cx="9715500" cy="323850"/>
           </a:xfrm>
-          <a:prstGeom xmlns:a="http://schemas.openxmlformats.org/drawingml/2006/main" prst="rect">
+          <a:prstGeom prst="rect">
             <a:avLst/>
           </a:prstGeom>
-          <a:noFill xmlns:a="http://schemas.openxmlformats.org/drawingml/2006/main"/>
-          <a:ln xmlns:a="http://schemas.openxmlformats.org/drawingml/2006/main" w="0">
+          <a:noFill/>
+          <a:ln w="0">
             <a:noFill/>
             <a:prstDash val="solid"/>
           </a:ln>
         </p:spPr>
         <p:txBody>
-          <a:bodyPr xmlns:a="http://schemas.openxmlformats.org/drawingml/2006/main" lIns="0" tIns="0" rIns="0" bIns="0" anchor="t">
+          <a:bodyPr lIns="0" tIns="0" rIns="0" bIns="0" anchor="t">
             <a:normAutofit fontScale="100000"/>
           </a:bodyPr>
-          <a:lstStyle xmlns:a="http://schemas.openxmlformats.org/drawingml/2006/main"/>
-          <a:p xmlns:a="http://schemas.openxmlformats.org/drawingml/2006/main">
+          <a:lstStyle/>
+          <a:p>
             <a:pPr algn="l">
               <a:lnSpc>
                 <a:spcPct val="112000"/>
@@ -2743,37 +2743,37 @@
       <p:sp>
         <p:nvSpPr>
           <p:cNvPr id="24" name="">
-            <a:extLst xmlns:a="http://schemas.openxmlformats.org/drawingml/2006/main">
+            <a:extLst>
               <a:ext uri="{FF2B5EF4-FFF2-40B4-BE49-F238E27FC236}">
-                <a16:creationId xmlns:a16="http://schemas.microsoft.com/office/drawing/2014/main" id="{0FCD4727-54D5-4E69-A11B-48100B1B052F}"/>
+                <ns2:creationId id="{0FCD4727-54D5-4E69-A11B-48100B1B052F}"/>
               </a:ext>
             </a:extLst>
           </p:cNvPr>
           <p:cNvSpPr>
-            <a:spLocks xmlns:a="http://schemas.openxmlformats.org/drawingml/2006/main" noGrp="1"/>
-          </p:cNvSpPr>
-          <p:nvPr/>
-        </p:nvSpPr>
-        <p:spPr>
-          <a:xfrm xmlns:a="http://schemas.openxmlformats.org/drawingml/2006/main">
+            <a:spLocks noGrp="1"/>
+          </p:cNvSpPr>
+          <p:nvPr/>
+        </p:nvSpPr>
+        <p:spPr>
+          <a:xfrm>
             <a:off x="514350" y="6172200"/>
             <a:ext cx="9906000" cy="247650"/>
           </a:xfrm>
-          <a:prstGeom xmlns:a="http://schemas.openxmlformats.org/drawingml/2006/main" prst="rect">
+          <a:prstGeom prst="rect">
             <a:avLst/>
           </a:prstGeom>
-          <a:noFill xmlns:a="http://schemas.openxmlformats.org/drawingml/2006/main"/>
-          <a:ln xmlns:a="http://schemas.openxmlformats.org/drawingml/2006/main" w="0">
+          <a:noFill/>
+          <a:ln w="0">
             <a:noFill/>
             <a:prstDash val="solid"/>
           </a:ln>
         </p:spPr>
         <p:txBody>
-          <a:bodyPr xmlns:a="http://schemas.openxmlformats.org/drawingml/2006/main" lIns="0" tIns="0" rIns="0" bIns="0" anchor="t">
+          <a:bodyPr lIns="0" tIns="0" rIns="0" bIns="0" anchor="t">
             <a:normAutofit fontScale="100000"/>
           </a:bodyPr>
-          <a:lstStyle xmlns:a="http://schemas.openxmlformats.org/drawingml/2006/main"/>
-          <a:p xmlns:a="http://schemas.openxmlformats.org/drawingml/2006/main">
+          <a:lstStyle/>
+          <a:p>
             <a:pPr algn="l">
               <a:lnSpc>
                 <a:spcPct val="112000"/>
@@ -2805,7 +2805,7 @@
     </p:spTree>
     <p:extLst>
       <p:ext uri="{BB962C8B-B14F-4D97-AF65-F5344CB8AC3E}">
-        <p14:creationId xmlns:p14="http://schemas.microsoft.com/office/powerpoint/2010/main" val="1699337005"/>
+        <ns3:creationId val="1699337005"/>
       </p:ext>
     </p:extLst>
   </p:cSld>
@@ -2813,11 +2813,11 @@
 </file>
 
 <file path=ppt/slides/slide2.xml><?xml version="1.0" encoding="utf-8"?>
-<p:sld xmlns:p="http://schemas.openxmlformats.org/presentationml/2006/main">
+<p:sld xmlns:a="http://schemas.openxmlformats.org/drawingml/2006/main" xmlns:ns2="http://schemas.microsoft.com/office/drawing/2014/main" xmlns:ns3="http://schemas.microsoft.com/office/powerpoint/2010/main" xmlns:p="http://schemas.openxmlformats.org/presentationml/2006/main">
   <p:cSld>
     <p:bg>
       <p:bgPr>
-        <a:solidFill xmlns:a="http://schemas.openxmlformats.org/drawingml/2006/main">
+        <a:solidFill>
           <a:srgbClr val="FFFFFF"/>
         </a:solidFill>
       </p:bgPr>
@@ -2829,42 +2829,42 @@
         <p:nvPr/>
       </p:nvGrpSpPr>
       <p:grpSpPr>
-        <a:xfrm xmlns:a="http://schemas.openxmlformats.org/drawingml/2006/main"/>
+        <a:xfrm/>
       </p:grpSpPr>
       <p:sp>
         <p:nvSpPr>
           <p:cNvPr id="1" name="">
-            <a:extLst xmlns:a="http://schemas.openxmlformats.org/drawingml/2006/main">
+            <a:extLst>
               <a:ext uri="{FF2B5EF4-FFF2-40B4-BE49-F238E27FC236}">
-                <a16:creationId xmlns:a16="http://schemas.microsoft.com/office/drawing/2014/main" id="{7DE252F2-CAA1-47D0-BCCB-3AEC7CBE834A}"/>
+                <ns2:creationId id="{7DE252F2-CAA1-47D0-BCCB-3AEC7CBE834A}"/>
               </a:ext>
             </a:extLst>
           </p:cNvPr>
           <p:cNvSpPr>
-            <a:spLocks xmlns:a="http://schemas.openxmlformats.org/drawingml/2006/main" noGrp="1"/>
-          </p:cNvSpPr>
-          <p:nvPr/>
-        </p:nvSpPr>
-        <p:spPr>
-          <a:xfrm xmlns:a="http://schemas.openxmlformats.org/drawingml/2006/main">
+            <a:spLocks noGrp="1"/>
+          </p:cNvSpPr>
+          <p:nvPr/>
+        </p:nvSpPr>
+        <p:spPr>
+          <a:xfrm>
             <a:off x="400050" y="285750"/>
             <a:ext cx="4953000" cy="209550"/>
           </a:xfrm>
-          <a:prstGeom xmlns:a="http://schemas.openxmlformats.org/drawingml/2006/main" prst="rect">
+          <a:prstGeom prst="rect">
             <a:avLst/>
           </a:prstGeom>
-          <a:noFill xmlns:a="http://schemas.openxmlformats.org/drawingml/2006/main"/>
-          <a:ln xmlns:a="http://schemas.openxmlformats.org/drawingml/2006/main" w="0">
+          <a:noFill/>
+          <a:ln w="0">
             <a:noFill/>
             <a:prstDash val="solid"/>
           </a:ln>
         </p:spPr>
         <p:txBody>
-          <a:bodyPr xmlns:a="http://schemas.openxmlformats.org/drawingml/2006/main" lIns="0" tIns="0" rIns="0" bIns="0" anchor="t">
+          <a:bodyPr lIns="0" tIns="0" rIns="0" bIns="0" anchor="t">
             <a:normAutofit fontScale="100000"/>
           </a:bodyPr>
-          <a:lstStyle xmlns:a="http://schemas.openxmlformats.org/drawingml/2006/main"/>
-          <a:p xmlns:a="http://schemas.openxmlformats.org/drawingml/2006/main">
+          <a:lstStyle/>
+          <a:p>
             <a:pPr algn="l">
               <a:lnSpc>
                 <a:spcPct val="112000"/>
@@ -2896,37 +2896,37 @@
       <p:sp>
         <p:nvSpPr>
           <p:cNvPr id="2" name="">
-            <a:extLst xmlns:a="http://schemas.openxmlformats.org/drawingml/2006/main">
+            <a:extLst>
               <a:ext uri="{FF2B5EF4-FFF2-40B4-BE49-F238E27FC236}">
-                <a16:creationId xmlns:a16="http://schemas.microsoft.com/office/drawing/2014/main" id="{55302F58-36E6-44D6-9784-3CD032A47C61}"/>
+                <ns2:creationId id="{55302F58-36E6-44D6-9784-3CD032A47C61}"/>
               </a:ext>
             </a:extLst>
           </p:cNvPr>
           <p:cNvSpPr>
-            <a:spLocks xmlns:a="http://schemas.openxmlformats.org/drawingml/2006/main" noGrp="1"/>
-          </p:cNvSpPr>
-          <p:nvPr/>
-        </p:nvSpPr>
-        <p:spPr>
-          <a:xfrm xmlns:a="http://schemas.openxmlformats.org/drawingml/2006/main">
+            <a:spLocks noGrp="1"/>
+          </p:cNvSpPr>
+          <p:nvPr/>
+        </p:nvSpPr>
+        <p:spPr>
+          <a:xfrm>
             <a:off x="400050" y="552450"/>
             <a:ext cx="9810750" cy="495300"/>
           </a:xfrm>
-          <a:prstGeom xmlns:a="http://schemas.openxmlformats.org/drawingml/2006/main" prst="rect">
+          <a:prstGeom prst="rect">
             <a:avLst/>
           </a:prstGeom>
-          <a:noFill xmlns:a="http://schemas.openxmlformats.org/drawingml/2006/main"/>
-          <a:ln xmlns:a="http://schemas.openxmlformats.org/drawingml/2006/main" w="0">
+          <a:noFill/>
+          <a:ln w="0">
             <a:noFill/>
             <a:prstDash val="solid"/>
           </a:ln>
         </p:spPr>
         <p:txBody>
-          <a:bodyPr xmlns:a="http://schemas.openxmlformats.org/drawingml/2006/main" lIns="0" tIns="0" rIns="0" bIns="0" anchor="t">
+          <a:bodyPr lIns="0" tIns="0" rIns="0" bIns="0" anchor="t">
             <a:normAutofit fontScale="89978"/>
           </a:bodyPr>
-          <a:lstStyle xmlns:a="http://schemas.openxmlformats.org/drawingml/2006/main"/>
-          <a:p xmlns:a="http://schemas.openxmlformats.org/drawingml/2006/main">
+          <a:lstStyle/>
+          <a:p>
             <a:pPr algn="l">
               <a:lnSpc>
                 <a:spcPct val="112000"/>
@@ -2958,37 +2958,37 @@
       <p:sp>
         <p:nvSpPr>
           <p:cNvPr id="3" name="">
-            <a:extLst xmlns:a="http://schemas.openxmlformats.org/drawingml/2006/main">
+            <a:extLst>
               <a:ext uri="{FF2B5EF4-FFF2-40B4-BE49-F238E27FC236}">
-                <a16:creationId xmlns:a16="http://schemas.microsoft.com/office/drawing/2014/main" id="{99808DC2-59CD-4AE6-A36D-A864DE2B0E9F}"/>
+                <ns2:creationId id="{99808DC2-59CD-4AE6-A36D-A864DE2B0E9F}"/>
               </a:ext>
             </a:extLst>
           </p:cNvPr>
           <p:cNvSpPr>
-            <a:spLocks xmlns:a="http://schemas.openxmlformats.org/drawingml/2006/main" noGrp="1"/>
-          </p:cNvSpPr>
-          <p:nvPr/>
-        </p:nvSpPr>
-        <p:spPr>
-          <a:xfrm xmlns:a="http://schemas.openxmlformats.org/drawingml/2006/main">
+            <a:spLocks noGrp="1"/>
+          </p:cNvSpPr>
+          <p:nvPr/>
+        </p:nvSpPr>
+        <p:spPr>
+          <a:xfrm>
             <a:off x="419100" y="1076325"/>
             <a:ext cx="9334500" cy="323850"/>
           </a:xfrm>
-          <a:prstGeom xmlns:a="http://schemas.openxmlformats.org/drawingml/2006/main" prst="rect">
+          <a:prstGeom prst="rect">
             <a:avLst/>
           </a:prstGeom>
-          <a:noFill xmlns:a="http://schemas.openxmlformats.org/drawingml/2006/main"/>
-          <a:ln xmlns:a="http://schemas.openxmlformats.org/drawingml/2006/main" w="0">
+          <a:noFill/>
+          <a:ln w="0">
             <a:noFill/>
             <a:prstDash val="solid"/>
           </a:ln>
         </p:spPr>
         <p:txBody>
-          <a:bodyPr xmlns:a="http://schemas.openxmlformats.org/drawingml/2006/main" lIns="0" tIns="0" rIns="0" bIns="0" anchor="t">
+          <a:bodyPr lIns="0" tIns="0" rIns="0" bIns="0" anchor="t">
             <a:normAutofit fontScale="100000"/>
           </a:bodyPr>
-          <a:lstStyle xmlns:a="http://schemas.openxmlformats.org/drawingml/2006/main"/>
-          <a:p xmlns:a="http://schemas.openxmlformats.org/drawingml/2006/main">
+          <a:lstStyle/>
+          <a:p>
             <a:pPr algn="l">
               <a:lnSpc>
                 <a:spcPct val="108000"/>
@@ -3020,27 +3020,27 @@
       <p:sp>
         <p:nvSpPr>
           <p:cNvPr id="4" name="">
-            <a:extLst xmlns:a="http://schemas.openxmlformats.org/drawingml/2006/main">
+            <a:extLst>
               <a:ext uri="{FF2B5EF4-FFF2-40B4-BE49-F238E27FC236}">
-                <a16:creationId xmlns:a16="http://schemas.microsoft.com/office/drawing/2014/main" id="{84A2F24B-74EF-42D8-8438-45C9AC0081B8}"/>
+                <ns2:creationId id="{84A2F24B-74EF-42D8-8438-45C9AC0081B8}"/>
               </a:ext>
             </a:extLst>
           </p:cNvPr>
           <p:cNvSpPr>
-            <a:spLocks xmlns:a="http://schemas.openxmlformats.org/drawingml/2006/main" noGrp="1"/>
-          </p:cNvSpPr>
-          <p:nvPr/>
-        </p:nvSpPr>
-        <p:spPr>
-          <a:xfrm xmlns:a="http://schemas.openxmlformats.org/drawingml/2006/main">
+            <a:spLocks noGrp="1"/>
+          </p:cNvSpPr>
+          <p:nvPr/>
+        </p:nvSpPr>
+        <p:spPr>
+          <a:xfrm>
             <a:off x="400050" y="1447800"/>
             <a:ext cx="11391900" cy="0"/>
           </a:xfrm>
-          <a:prstGeom xmlns:a="http://schemas.openxmlformats.org/drawingml/2006/main" prst="line">
+          <a:prstGeom prst="line">
             <a:avLst/>
           </a:prstGeom>
-          <a:noFill xmlns:a="http://schemas.openxmlformats.org/drawingml/2006/main"/>
-          <a:ln xmlns:a="http://schemas.openxmlformats.org/drawingml/2006/main" w="9525">
+          <a:noFill/>
+          <a:ln w="9525">
             <a:solidFill>
               <a:srgbClr val="B8BCC4"/>
             </a:solidFill>
@@ -3051,37 +3051,37 @@
       <p:sp>
         <p:nvSpPr>
           <p:cNvPr id="5" name="">
-            <a:extLst xmlns:a="http://schemas.openxmlformats.org/drawingml/2006/main">
+            <a:extLst>
               <a:ext uri="{FF2B5EF4-FFF2-40B4-BE49-F238E27FC236}">
-                <a16:creationId xmlns:a16="http://schemas.microsoft.com/office/drawing/2014/main" id="{5028A55A-2E17-42D4-9A89-1C69C3731727}"/>
+                <ns2:creationId id="{5028A55A-2E17-42D4-9A89-1C69C3731727}"/>
               </a:ext>
             </a:extLst>
           </p:cNvPr>
           <p:cNvSpPr>
-            <a:spLocks xmlns:a="http://schemas.openxmlformats.org/drawingml/2006/main" noGrp="1"/>
-          </p:cNvSpPr>
-          <p:nvPr/>
-        </p:nvSpPr>
-        <p:spPr>
-          <a:xfrm xmlns:a="http://schemas.openxmlformats.org/drawingml/2006/main">
+            <a:spLocks noGrp="1"/>
+          </p:cNvSpPr>
+          <p:nvPr/>
+        </p:nvSpPr>
+        <p:spPr>
+          <a:xfrm>
             <a:off x="11277600" y="6324600"/>
             <a:ext cx="514350" cy="228600"/>
           </a:xfrm>
-          <a:prstGeom xmlns:a="http://schemas.openxmlformats.org/drawingml/2006/main" prst="rect">
+          <a:prstGeom prst="rect">
             <a:avLst/>
           </a:prstGeom>
-          <a:noFill xmlns:a="http://schemas.openxmlformats.org/drawingml/2006/main"/>
-          <a:ln xmlns:a="http://schemas.openxmlformats.org/drawingml/2006/main" w="0">
+          <a:noFill/>
+          <a:ln w="0">
             <a:noFill/>
             <a:prstDash val="solid"/>
           </a:ln>
         </p:spPr>
         <p:txBody>
-          <a:bodyPr xmlns:a="http://schemas.openxmlformats.org/drawingml/2006/main" lIns="0" tIns="0" rIns="0" bIns="0" anchor="t">
+          <a:bodyPr lIns="0" tIns="0" rIns="0" bIns="0" anchor="t">
             <a:normAutofit fontScale="100000"/>
           </a:bodyPr>
-          <a:lstStyle xmlns:a="http://schemas.openxmlformats.org/drawingml/2006/main"/>
-          <a:p xmlns:a="http://schemas.openxmlformats.org/drawingml/2006/main">
+          <a:lstStyle/>
+          <a:p>
             <a:pPr algn="r">
               <a:lnSpc>
                 <a:spcPct val="112000"/>
@@ -3113,27 +3113,27 @@
       <p:sp>
         <p:nvSpPr>
           <p:cNvPr id="6" name="on-device-trust-boundary">
-            <a:extLst xmlns:a="http://schemas.openxmlformats.org/drawingml/2006/main">
+            <a:extLst>
               <a:ext uri="{FF2B5EF4-FFF2-40B4-BE49-F238E27FC236}">
-                <a16:creationId xmlns:a16="http://schemas.microsoft.com/office/drawing/2014/main" id="{0E1BAA1F-0B4D-4669-A986-88062C6507F9}"/>
+                <ns2:creationId id="{0E1BAA1F-0B4D-4669-A986-88062C6507F9}"/>
               </a:ext>
             </a:extLst>
           </p:cNvPr>
           <p:cNvSpPr>
-            <a:spLocks xmlns:a="http://schemas.openxmlformats.org/drawingml/2006/main" noGrp="1"/>
-          </p:cNvSpPr>
-          <p:nvPr/>
-        </p:nvSpPr>
-        <p:spPr>
-          <a:xfrm xmlns:a="http://schemas.openxmlformats.org/drawingml/2006/main">
+            <a:spLocks noGrp="1"/>
+          </p:cNvSpPr>
+          <p:nvPr/>
+        </p:nvSpPr>
+        <p:spPr>
+          <a:xfrm>
             <a:off x="400050" y="1657350"/>
             <a:ext cx="9563100" cy="4476750"/>
           </a:xfrm>
-          <a:prstGeom xmlns:a="http://schemas.openxmlformats.org/drawingml/2006/main" prst="rect">
+          <a:prstGeom prst="rect">
             <a:avLst/>
           </a:prstGeom>
-          <a:noFill xmlns:a="http://schemas.openxmlformats.org/drawingml/2006/main"/>
-          <a:ln xmlns:a="http://schemas.openxmlformats.org/drawingml/2006/main" w="13335">
+          <a:noFill/>
+          <a:ln w="13335">
             <a:solidFill>
               <a:srgbClr val="D98282"/>
             </a:solidFill>
@@ -3144,37 +3144,37 @@
       <p:sp>
         <p:nvSpPr>
           <p:cNvPr id="7" name="">
-            <a:extLst xmlns:a="http://schemas.openxmlformats.org/drawingml/2006/main">
+            <a:extLst>
               <a:ext uri="{FF2B5EF4-FFF2-40B4-BE49-F238E27FC236}">
-                <a16:creationId xmlns:a16="http://schemas.microsoft.com/office/drawing/2014/main" id="{2FBBC9DE-E154-4B30-A807-B958D3C5658F}"/>
+                <ns2:creationId id="{2FBBC9DE-E154-4B30-A807-B958D3C5658F}"/>
               </a:ext>
             </a:extLst>
           </p:cNvPr>
           <p:cNvSpPr>
-            <a:spLocks xmlns:a="http://schemas.openxmlformats.org/drawingml/2006/main" noGrp="1"/>
-          </p:cNvSpPr>
-          <p:nvPr/>
-        </p:nvSpPr>
-        <p:spPr>
-          <a:xfrm xmlns:a="http://schemas.openxmlformats.org/drawingml/2006/main">
+            <a:spLocks noGrp="1"/>
+          </p:cNvSpPr>
+          <p:nvPr/>
+        </p:nvSpPr>
+        <p:spPr>
+          <a:xfrm>
             <a:off x="514350" y="1733550"/>
             <a:ext cx="9334500" cy="266700"/>
           </a:xfrm>
-          <a:prstGeom xmlns:a="http://schemas.openxmlformats.org/drawingml/2006/main" prst="rect">
+          <a:prstGeom prst="rect">
             <a:avLst/>
           </a:prstGeom>
-          <a:noFill xmlns:a="http://schemas.openxmlformats.org/drawingml/2006/main"/>
-          <a:ln xmlns:a="http://schemas.openxmlformats.org/drawingml/2006/main" w="0">
+          <a:noFill/>
+          <a:ln w="0">
             <a:noFill/>
             <a:prstDash val="solid"/>
           </a:ln>
         </p:spPr>
         <p:txBody>
-          <a:bodyPr xmlns:a="http://schemas.openxmlformats.org/drawingml/2006/main" lIns="0" tIns="0" rIns="0" bIns="0" anchor="t">
+          <a:bodyPr lIns="0" tIns="0" rIns="0" bIns="0" anchor="t">
             <a:normAutofit fontScale="100000"/>
           </a:bodyPr>
-          <a:lstStyle xmlns:a="http://schemas.openxmlformats.org/drawingml/2006/main"/>
-          <a:p xmlns:a="http://schemas.openxmlformats.org/drawingml/2006/main">
+          <a:lstStyle/>
+          <a:p>
             <a:pPr algn="ctr">
               <a:lnSpc>
                 <a:spcPct val="112000"/>
@@ -3206,37 +3206,37 @@
       <p:sp>
         <p:nvSpPr>
           <p:cNvPr id="8" name="">
-            <a:extLst xmlns:a="http://schemas.openxmlformats.org/drawingml/2006/main">
+            <a:extLst>
               <a:ext uri="{FF2B5EF4-FFF2-40B4-BE49-F238E27FC236}">
-                <a16:creationId xmlns:a16="http://schemas.microsoft.com/office/drawing/2014/main" id="{D1C06D33-3327-4ED2-8F46-49419C60B421}"/>
+                <ns2:creationId id="{D1C06D33-3327-4ED2-8F46-49419C60B421}"/>
               </a:ext>
             </a:extLst>
           </p:cNvPr>
           <p:cNvSpPr>
-            <a:spLocks xmlns:a="http://schemas.openxmlformats.org/drawingml/2006/main" noGrp="1"/>
-          </p:cNvSpPr>
-          <p:nvPr/>
-        </p:nvSpPr>
-        <p:spPr>
-          <a:xfrm xmlns:a="http://schemas.openxmlformats.org/drawingml/2006/main">
+            <a:spLocks noGrp="1"/>
+          </p:cNvSpPr>
+          <p:nvPr/>
+        </p:nvSpPr>
+        <p:spPr>
+          <a:xfrm>
             <a:off x="10325100" y="1695450"/>
             <a:ext cx="1143000" cy="228600"/>
           </a:xfrm>
-          <a:prstGeom xmlns:a="http://schemas.openxmlformats.org/drawingml/2006/main" prst="rect">
+          <a:prstGeom prst="rect">
             <a:avLst/>
           </a:prstGeom>
-          <a:noFill xmlns:a="http://schemas.openxmlformats.org/drawingml/2006/main"/>
-          <a:ln xmlns:a="http://schemas.openxmlformats.org/drawingml/2006/main" w="0">
+          <a:noFill/>
+          <a:ln w="0">
             <a:noFill/>
             <a:prstDash val="solid"/>
           </a:ln>
         </p:spPr>
         <p:txBody>
-          <a:bodyPr xmlns:a="http://schemas.openxmlformats.org/drawingml/2006/main" lIns="0" tIns="0" rIns="0" bIns="0" anchor="t">
+          <a:bodyPr lIns="0" tIns="0" rIns="0" bIns="0" anchor="t">
             <a:normAutofit fontScale="100000"/>
           </a:bodyPr>
-          <a:lstStyle xmlns:a="http://schemas.openxmlformats.org/drawingml/2006/main"/>
-          <a:p xmlns:a="http://schemas.openxmlformats.org/drawingml/2006/main">
+          <a:lstStyle/>
+          <a:p>
             <a:pPr algn="ctr">
               <a:lnSpc>
                 <a:spcPct val="112000"/>
@@ -3268,31 +3268,31 @@
       <p:sp>
         <p:nvSpPr>
           <p:cNvPr id="9" name="">
-            <a:extLst xmlns:a="http://schemas.openxmlformats.org/drawingml/2006/main">
+            <a:extLst>
               <a:ext uri="{FF2B5EF4-FFF2-40B4-BE49-F238E27FC236}">
-                <a16:creationId xmlns:a16="http://schemas.microsoft.com/office/drawing/2014/main" id="{8369FB22-112F-4502-945C-44D833AE7BB2}"/>
+                <ns2:creationId id="{8369FB22-112F-4502-945C-44D833AE7BB2}"/>
               </a:ext>
             </a:extLst>
           </p:cNvPr>
           <p:cNvSpPr>
-            <a:spLocks xmlns:a="http://schemas.openxmlformats.org/drawingml/2006/main" noGrp="1"/>
-          </p:cNvSpPr>
-          <p:nvPr/>
-        </p:nvSpPr>
-        <p:spPr>
-          <a:xfrm xmlns:a="http://schemas.openxmlformats.org/drawingml/2006/main">
+            <a:spLocks noGrp="1"/>
+          </p:cNvSpPr>
+          <p:nvPr/>
+        </p:nvSpPr>
+        <p:spPr>
+          <a:xfrm>
             <a:off x="628650" y="2362200"/>
             <a:ext cx="1314450" cy="552450"/>
           </a:xfrm>
-          <a:prstGeom xmlns:a="http://schemas.openxmlformats.org/drawingml/2006/main" prst="roundRect">
+          <a:prstGeom prst="roundRect">
             <a:avLst>
               <a:gd name="adj" fmla="val 12069"/>
             </a:avLst>
           </a:prstGeom>
-          <a:solidFill xmlns:a="http://schemas.openxmlformats.org/drawingml/2006/main">
+          <a:solidFill>
             <a:srgbClr val="E6EEF8"/>
           </a:solidFill>
-          <a:ln xmlns:a="http://schemas.openxmlformats.org/drawingml/2006/main" w="11430">
+          <a:ln w="11430">
             <a:solidFill>
               <a:srgbClr val="426A9A"/>
             </a:solidFill>
@@ -3300,11 +3300,11 @@
           </a:ln>
         </p:spPr>
         <p:txBody>
-          <a:bodyPr xmlns:a="http://schemas.openxmlformats.org/drawingml/2006/main" lIns="76200" tIns="57150" rIns="76200" bIns="57150" anchor="ctr">
+          <a:bodyPr lIns="76200" tIns="57150" rIns="76200" bIns="57150" anchor="ctr">
             <a:normAutofit fontScale="100000"/>
           </a:bodyPr>
-          <a:lstStyle xmlns:a="http://schemas.openxmlformats.org/drawingml/2006/main"/>
-          <a:p xmlns:a="http://schemas.openxmlformats.org/drawingml/2006/main">
+          <a:lstStyle/>
+          <a:p>
             <a:pPr algn="ctr">
               <a:lnSpc>
                 <a:spcPct val="105000"/>
@@ -3331,7 +3331,7 @@
               <a:t>IDS</a:t>
             </a:r>
           </a:p>
-          <a:p xmlns:a="http://schemas.openxmlformats.org/drawingml/2006/main">
+          <a:p>
             <a:pPr algn="ctr">
               <a:lnSpc>
                 <a:spcPct val="105000"/>
@@ -3363,31 +3363,31 @@
       <p:sp>
         <p:nvSpPr>
           <p:cNvPr id="10" name="">
-            <a:extLst xmlns:a="http://schemas.openxmlformats.org/drawingml/2006/main">
+            <a:extLst>
               <a:ext uri="{FF2B5EF4-FFF2-40B4-BE49-F238E27FC236}">
-                <a16:creationId xmlns:a16="http://schemas.microsoft.com/office/drawing/2014/main" id="{2890E2A9-D66B-4E31-8234-32D4BF530972}"/>
+                <ns2:creationId id="{2890E2A9-D66B-4E31-8234-32D4BF530972}"/>
               </a:ext>
             </a:extLst>
           </p:cNvPr>
           <p:cNvSpPr>
-            <a:spLocks xmlns:a="http://schemas.openxmlformats.org/drawingml/2006/main" noGrp="1"/>
-          </p:cNvSpPr>
-          <p:nvPr/>
-        </p:nvSpPr>
-        <p:spPr>
-          <a:xfrm xmlns:a="http://schemas.openxmlformats.org/drawingml/2006/main">
+            <a:spLocks noGrp="1"/>
+          </p:cNvSpPr>
+          <p:nvPr/>
+        </p:nvSpPr>
+        <p:spPr>
+          <a:xfrm>
             <a:off x="628650" y="3390900"/>
             <a:ext cx="1314450" cy="552450"/>
           </a:xfrm>
-          <a:prstGeom xmlns:a="http://schemas.openxmlformats.org/drawingml/2006/main" prst="roundRect">
+          <a:prstGeom prst="roundRect">
             <a:avLst>
               <a:gd name="adj" fmla="val 12069"/>
             </a:avLst>
           </a:prstGeom>
-          <a:solidFill xmlns:a="http://schemas.openxmlformats.org/drawingml/2006/main">
+          <a:solidFill>
             <a:srgbClr val="F6F6F6"/>
           </a:solidFill>
-          <a:ln xmlns:a="http://schemas.openxmlformats.org/drawingml/2006/main" w="11430">
+          <a:ln w="11430">
             <a:solidFill>
               <a:srgbClr val="B8BCC4"/>
             </a:solidFill>
@@ -3395,11 +3395,11 @@
           </a:ln>
         </p:spPr>
         <p:txBody>
-          <a:bodyPr xmlns:a="http://schemas.openxmlformats.org/drawingml/2006/main" lIns="76200" tIns="57150" rIns="76200" bIns="57150" anchor="ctr">
+          <a:bodyPr lIns="76200" tIns="57150" rIns="76200" bIns="57150" anchor="ctr">
             <a:normAutofit fontScale="100000"/>
           </a:bodyPr>
-          <a:lstStyle xmlns:a="http://schemas.openxmlformats.org/drawingml/2006/main"/>
-          <a:p xmlns:a="http://schemas.openxmlformats.org/drawingml/2006/main">
+          <a:lstStyle/>
+          <a:p>
             <a:pPr algn="ctr">
               <a:lnSpc>
                 <a:spcPct val="105000"/>
@@ -3426,7 +3426,7 @@
               <a:t>DPA</a:t>
             </a:r>
           </a:p>
-          <a:p xmlns:a="http://schemas.openxmlformats.org/drawingml/2006/main">
+          <a:p>
             <a:pPr algn="ctr">
               <a:lnSpc>
                 <a:spcPct val="105000"/>
@@ -3458,31 +3458,31 @@
       <p:sp>
         <p:nvSpPr>
           <p:cNvPr id="11" name="">
-            <a:extLst xmlns:a="http://schemas.openxmlformats.org/drawingml/2006/main">
+            <a:extLst>
               <a:ext uri="{FF2B5EF4-FFF2-40B4-BE49-F238E27FC236}">
-                <a16:creationId xmlns:a16="http://schemas.microsoft.com/office/drawing/2014/main" id="{7DD64727-434F-4E17-9764-B53F0A066412}"/>
+                <ns2:creationId id="{7DD64727-434F-4E17-9764-B53F0A066412}"/>
               </a:ext>
             </a:extLst>
           </p:cNvPr>
           <p:cNvSpPr>
-            <a:spLocks xmlns:a="http://schemas.openxmlformats.org/drawingml/2006/main" noGrp="1"/>
-          </p:cNvSpPr>
-          <p:nvPr/>
-        </p:nvSpPr>
-        <p:spPr>
-          <a:xfrm xmlns:a="http://schemas.openxmlformats.org/drawingml/2006/main">
+            <a:spLocks noGrp="1"/>
+          </p:cNvSpPr>
+          <p:nvPr/>
+        </p:nvSpPr>
+        <p:spPr>
+          <a:xfrm>
             <a:off x="628650" y="4419600"/>
             <a:ext cx="1314450" cy="552450"/>
           </a:xfrm>
-          <a:prstGeom xmlns:a="http://schemas.openxmlformats.org/drawingml/2006/main" prst="roundRect">
+          <a:prstGeom prst="roundRect">
             <a:avLst>
               <a:gd name="adj" fmla="val 12069"/>
             </a:avLst>
           </a:prstGeom>
-          <a:solidFill xmlns:a="http://schemas.openxmlformats.org/drawingml/2006/main">
+          <a:solidFill>
             <a:srgbClr val="E6EEF8"/>
           </a:solidFill>
-          <a:ln xmlns:a="http://schemas.openxmlformats.org/drawingml/2006/main" w="11430">
+          <a:ln w="11430">
             <a:solidFill>
               <a:srgbClr val="426A9A"/>
             </a:solidFill>
@@ -3490,11 +3490,11 @@
           </a:ln>
         </p:spPr>
         <p:txBody>
-          <a:bodyPr xmlns:a="http://schemas.openxmlformats.org/drawingml/2006/main" lIns="76200" tIns="57150" rIns="76200" bIns="57150" anchor="ctr">
+          <a:bodyPr lIns="76200" tIns="57150" rIns="76200" bIns="57150" anchor="ctr">
             <a:normAutofit fontScale="100000"/>
           </a:bodyPr>
-          <a:lstStyle xmlns:a="http://schemas.openxmlformats.org/drawingml/2006/main"/>
-          <a:p xmlns:a="http://schemas.openxmlformats.org/drawingml/2006/main">
+          <a:lstStyle/>
+          <a:p>
             <a:pPr algn="ctr">
               <a:lnSpc>
                 <a:spcPct val="105000"/>
@@ -3521,7 +3521,7 @@
               <a:t>Sub-Agent</a:t>
             </a:r>
           </a:p>
-          <a:p xmlns:a="http://schemas.openxmlformats.org/drawingml/2006/main">
+          <a:p>
             <a:pPr algn="ctr">
               <a:lnSpc>
                 <a:spcPct val="105000"/>
@@ -3553,27 +3553,27 @@
       <p:sp>
         <p:nvSpPr>
           <p:cNvPr id="12" name="">
-            <a:extLst xmlns:a="http://schemas.openxmlformats.org/drawingml/2006/main">
+            <a:extLst>
               <a:ext uri="{FF2B5EF4-FFF2-40B4-BE49-F238E27FC236}">
-                <a16:creationId xmlns:a16="http://schemas.microsoft.com/office/drawing/2014/main" id="{29D48D3A-5602-486B-AE9A-5A1253F47322}"/>
+                <ns2:creationId id="{29D48D3A-5602-486B-AE9A-5A1253F47322}"/>
               </a:ext>
             </a:extLst>
           </p:cNvPr>
           <p:cNvSpPr>
-            <a:spLocks xmlns:a="http://schemas.openxmlformats.org/drawingml/2006/main" noGrp="1"/>
-          </p:cNvSpPr>
-          <p:nvPr/>
-        </p:nvSpPr>
-        <p:spPr>
-          <a:xfrm xmlns:a="http://schemas.openxmlformats.org/drawingml/2006/main">
+            <a:spLocks noGrp="1"/>
+          </p:cNvSpPr>
+          <p:nvPr/>
+        </p:nvSpPr>
+        <p:spPr>
+          <a:xfrm>
             <a:off x="2381250" y="2019300"/>
             <a:ext cx="3219450" cy="3028950"/>
           </a:xfrm>
-          <a:prstGeom xmlns:a="http://schemas.openxmlformats.org/drawingml/2006/main" prst="rect">
+          <a:prstGeom prst="rect">
             <a:avLst/>
           </a:prstGeom>
-          <a:noFill xmlns:a="http://schemas.openxmlformats.org/drawingml/2006/main"/>
-          <a:ln xmlns:a="http://schemas.openxmlformats.org/drawingml/2006/main" w="11430">
+          <a:noFill/>
+          <a:ln w="11430">
             <a:solidFill>
               <a:srgbClr val="4D7C2F"/>
             </a:solidFill>
@@ -3584,31 +3584,31 @@
       <p:sp>
         <p:nvSpPr>
           <p:cNvPr id="13" name="">
-            <a:extLst xmlns:a="http://schemas.openxmlformats.org/drawingml/2006/main">
+            <a:extLst>
               <a:ext uri="{FF2B5EF4-FFF2-40B4-BE49-F238E27FC236}">
-                <a16:creationId xmlns:a16="http://schemas.microsoft.com/office/drawing/2014/main" id="{C8F94F43-0535-45D6-B9AE-A17B8F508575}"/>
+                <ns2:creationId id="{C8F94F43-0535-45D6-B9AE-A17B8F508575}"/>
               </a:ext>
             </a:extLst>
           </p:cNvPr>
           <p:cNvSpPr>
-            <a:spLocks xmlns:a="http://schemas.openxmlformats.org/drawingml/2006/main" noGrp="1"/>
-          </p:cNvSpPr>
-          <p:nvPr/>
-        </p:nvSpPr>
-        <p:spPr>
-          <a:xfrm xmlns:a="http://schemas.openxmlformats.org/drawingml/2006/main">
+            <a:spLocks noGrp="1"/>
+          </p:cNvSpPr>
+          <p:nvPr/>
+        </p:nvSpPr>
+        <p:spPr>
+          <a:xfrm>
             <a:off x="2381250" y="2019300"/>
             <a:ext cx="3219450" cy="323850"/>
           </a:xfrm>
-          <a:prstGeom xmlns:a="http://schemas.openxmlformats.org/drawingml/2006/main" prst="roundRect">
+          <a:prstGeom prst="roundRect">
             <a:avLst>
               <a:gd name="adj" fmla="val 0"/>
             </a:avLst>
           </a:prstGeom>
-          <a:solidFill xmlns:a="http://schemas.openxmlformats.org/drawingml/2006/main">
+          <a:solidFill>
             <a:srgbClr val="E4F0DD"/>
           </a:solidFill>
-          <a:ln xmlns:a="http://schemas.openxmlformats.org/drawingml/2006/main" w="11430">
+          <a:ln w="11430">
             <a:solidFill>
               <a:srgbClr val="4D7C2F"/>
             </a:solidFill>
@@ -3616,11 +3616,11 @@
           </a:ln>
         </p:spPr>
         <p:txBody>
-          <a:bodyPr xmlns:a="http://schemas.openxmlformats.org/drawingml/2006/main" lIns="114300" tIns="76200" rIns="114300" bIns="76200" anchor="ctr">
+          <a:bodyPr lIns="114300" tIns="76200" rIns="114300" bIns="76200" anchor="ctr">
             <a:normAutofit fontScale="83241"/>
           </a:bodyPr>
-          <a:lstStyle xmlns:a="http://schemas.openxmlformats.org/drawingml/2006/main"/>
-          <a:p xmlns:a="http://schemas.openxmlformats.org/drawingml/2006/main">
+          <a:lstStyle/>
+          <a:p>
             <a:pPr algn="ctr">
               <a:lnSpc>
                 <a:spcPct val="106000"/>
@@ -3652,31 +3652,31 @@
       <p:sp>
         <p:nvSpPr>
           <p:cNvPr id="14" name="">
-            <a:extLst xmlns:a="http://schemas.openxmlformats.org/drawingml/2006/main">
+            <a:extLst>
               <a:ext uri="{FF2B5EF4-FFF2-40B4-BE49-F238E27FC236}">
-                <a16:creationId xmlns:a16="http://schemas.microsoft.com/office/drawing/2014/main" id="{2537D077-5353-4FD6-83CB-172E18B4E882}"/>
+                <ns2:creationId id="{2537D077-5353-4FD6-83CB-172E18B4E882}"/>
               </a:ext>
             </a:extLst>
           </p:cNvPr>
           <p:cNvSpPr>
-            <a:spLocks xmlns:a="http://schemas.openxmlformats.org/drawingml/2006/main" noGrp="1"/>
-          </p:cNvSpPr>
-          <p:nvPr/>
-        </p:nvSpPr>
-        <p:spPr>
-          <a:xfrm xmlns:a="http://schemas.openxmlformats.org/drawingml/2006/main">
+            <a:spLocks noGrp="1"/>
+          </p:cNvSpPr>
+          <p:nvPr/>
+        </p:nvSpPr>
+        <p:spPr>
+          <a:xfrm>
             <a:off x="2609850" y="2514600"/>
             <a:ext cx="1352550" cy="552450"/>
           </a:xfrm>
-          <a:prstGeom xmlns:a="http://schemas.openxmlformats.org/drawingml/2006/main" prst="roundRect">
+          <a:prstGeom prst="roundRect">
             <a:avLst>
               <a:gd name="adj" fmla="val 12069"/>
             </a:avLst>
           </a:prstGeom>
-          <a:solidFill xmlns:a="http://schemas.openxmlformats.org/drawingml/2006/main">
+          <a:solidFill>
             <a:srgbClr val="EAF2E4"/>
           </a:solidFill>
-          <a:ln xmlns:a="http://schemas.openxmlformats.org/drawingml/2006/main" w="11430">
+          <a:ln w="11430">
             <a:solidFill>
               <a:srgbClr val="4D7C2F"/>
             </a:solidFill>
@@ -3684,11 +3684,11 @@
           </a:ln>
         </p:spPr>
         <p:txBody>
-          <a:bodyPr xmlns:a="http://schemas.openxmlformats.org/drawingml/2006/main" lIns="76200" tIns="57150" rIns="76200" bIns="57150" anchor="ctr">
+          <a:bodyPr lIns="76200" tIns="57150" rIns="76200" bIns="57150" anchor="ctr">
             <a:normAutofit fontScale="100000"/>
           </a:bodyPr>
-          <a:lstStyle xmlns:a="http://schemas.openxmlformats.org/drawingml/2006/main"/>
-          <a:p xmlns:a="http://schemas.openxmlformats.org/drawingml/2006/main">
+          <a:lstStyle/>
+          <a:p>
             <a:pPr algn="ctr">
               <a:lnSpc>
                 <a:spcPct val="105000"/>
@@ -3715,7 +3715,7 @@
               <a:t>Schema Registry</a:t>
             </a:r>
           </a:p>
-          <a:p xmlns:a="http://schemas.openxmlformats.org/drawingml/2006/main">
+          <a:p>
             <a:pPr algn="ctr">
               <a:lnSpc>
                 <a:spcPct val="105000"/>
@@ -3747,31 +3747,31 @@
       <p:sp>
         <p:nvSpPr>
           <p:cNvPr id="15" name="">
-            <a:extLst xmlns:a="http://schemas.openxmlformats.org/drawingml/2006/main">
+            <a:extLst>
               <a:ext uri="{FF2B5EF4-FFF2-40B4-BE49-F238E27FC236}">
-                <a16:creationId xmlns:a16="http://schemas.microsoft.com/office/drawing/2014/main" id="{3980445D-FB18-4A73-BF73-9E574371D3E3}"/>
+                <ns2:creationId id="{3980445D-FB18-4A73-BF73-9E574371D3E3}"/>
               </a:ext>
             </a:extLst>
           </p:cNvPr>
           <p:cNvSpPr>
-            <a:spLocks xmlns:a="http://schemas.openxmlformats.org/drawingml/2006/main" noGrp="1"/>
-          </p:cNvSpPr>
-          <p:nvPr/>
-        </p:nvSpPr>
-        <p:spPr>
-          <a:xfrm xmlns:a="http://schemas.openxmlformats.org/drawingml/2006/main">
+            <a:spLocks noGrp="1"/>
+          </p:cNvSpPr>
+          <p:nvPr/>
+        </p:nvSpPr>
+        <p:spPr>
+          <a:xfrm>
             <a:off x="2609850" y="3295650"/>
             <a:ext cx="1352550" cy="552450"/>
           </a:xfrm>
-          <a:prstGeom xmlns:a="http://schemas.openxmlformats.org/drawingml/2006/main" prst="roundRect">
+          <a:prstGeom prst="roundRect">
             <a:avLst>
               <a:gd name="adj" fmla="val 12069"/>
             </a:avLst>
           </a:prstGeom>
-          <a:solidFill xmlns:a="http://schemas.openxmlformats.org/drawingml/2006/main">
+          <a:solidFill>
             <a:srgbClr val="E4F0DD"/>
           </a:solidFill>
-          <a:ln xmlns:a="http://schemas.openxmlformats.org/drawingml/2006/main" w="11430">
+          <a:ln w="11430">
             <a:solidFill>
               <a:srgbClr val="4D7C2F"/>
             </a:solidFill>
@@ -3779,11 +3779,11 @@
           </a:ln>
         </p:spPr>
         <p:txBody>
-          <a:bodyPr xmlns:a="http://schemas.openxmlformats.org/drawingml/2006/main" lIns="76200" tIns="57150" rIns="76200" bIns="57150" anchor="ctr">
+          <a:bodyPr lIns="76200" tIns="57150" rIns="76200" bIns="57150" anchor="ctr">
             <a:normAutofit fontScale="100000"/>
           </a:bodyPr>
-          <a:lstStyle xmlns:a="http://schemas.openxmlformats.org/drawingml/2006/main"/>
-          <a:p xmlns:a="http://schemas.openxmlformats.org/drawingml/2006/main">
+          <a:lstStyle/>
+          <a:p>
             <a:pPr algn="ctr">
               <a:lnSpc>
                 <a:spcPct val="105000"/>
@@ -3810,7 +3810,7 @@
               <a:t>정규화기</a:t>
             </a:r>
           </a:p>
-          <a:p xmlns:a="http://schemas.openxmlformats.org/drawingml/2006/main">
+          <a:p>
             <a:pPr algn="ctr">
               <a:lnSpc>
                 <a:spcPct val="105000"/>
@@ -3842,31 +3842,31 @@
       <p:sp>
         <p:nvSpPr>
           <p:cNvPr id="16" name="">
-            <a:extLst xmlns:a="http://schemas.openxmlformats.org/drawingml/2006/main">
+            <a:extLst>
               <a:ext uri="{FF2B5EF4-FFF2-40B4-BE49-F238E27FC236}">
-                <a16:creationId xmlns:a16="http://schemas.microsoft.com/office/drawing/2014/main" id="{85053FF5-2B09-445A-B5CF-7376D7C9E4A9}"/>
+                <ns2:creationId id="{85053FF5-2B09-445A-B5CF-7376D7C9E4A9}"/>
               </a:ext>
             </a:extLst>
           </p:cNvPr>
           <p:cNvSpPr>
-            <a:spLocks xmlns:a="http://schemas.openxmlformats.org/drawingml/2006/main" noGrp="1"/>
-          </p:cNvSpPr>
-          <p:nvPr/>
-        </p:nvSpPr>
-        <p:spPr>
-          <a:xfrm xmlns:a="http://schemas.openxmlformats.org/drawingml/2006/main">
+            <a:spLocks noGrp="1"/>
+          </p:cNvSpPr>
+          <p:nvPr/>
+        </p:nvSpPr>
+        <p:spPr>
+          <a:xfrm>
             <a:off x="2609850" y="4076700"/>
             <a:ext cx="1352550" cy="552450"/>
           </a:xfrm>
-          <a:prstGeom xmlns:a="http://schemas.openxmlformats.org/drawingml/2006/main" prst="roundRect">
+          <a:prstGeom prst="roundRect">
             <a:avLst>
               <a:gd name="adj" fmla="val 12069"/>
             </a:avLst>
           </a:prstGeom>
-          <a:solidFill xmlns:a="http://schemas.openxmlformats.org/drawingml/2006/main">
+          <a:solidFill>
             <a:srgbClr val="E4F0DD"/>
           </a:solidFill>
-          <a:ln xmlns:a="http://schemas.openxmlformats.org/drawingml/2006/main" w="11430">
+          <a:ln w="11430">
             <a:solidFill>
               <a:srgbClr val="4D7C2F"/>
             </a:solidFill>
@@ -3874,11 +3874,11 @@
           </a:ln>
         </p:spPr>
         <p:txBody>
-          <a:bodyPr xmlns:a="http://schemas.openxmlformats.org/drawingml/2006/main" lIns="76200" tIns="57150" rIns="76200" bIns="57150" anchor="ctr">
+          <a:bodyPr lIns="76200" tIns="57150" rIns="76200" bIns="57150" anchor="ctr">
             <a:normAutofit fontScale="79791"/>
           </a:bodyPr>
-          <a:lstStyle xmlns:a="http://schemas.openxmlformats.org/drawingml/2006/main"/>
-          <a:p xmlns:a="http://schemas.openxmlformats.org/drawingml/2006/main">
+          <a:lstStyle/>
+          <a:p>
             <a:pPr algn="ctr">
               <a:lnSpc>
                 <a:spcPct val="105000"/>
@@ -3905,7 +3905,7 @@
               <a:t>출력 빌더</a:t>
             </a:r>
           </a:p>
-          <a:p xmlns:a="http://schemas.openxmlformats.org/drawingml/2006/main">
+          <a:p>
             <a:pPr algn="ctr">
               <a:lnSpc>
                 <a:spcPct val="105000"/>
@@ -3937,31 +3937,31 @@
       <p:sp>
         <p:nvSpPr>
           <p:cNvPr id="17" name="">
-            <a:extLst xmlns:a="http://schemas.openxmlformats.org/drawingml/2006/main">
+            <a:extLst>
               <a:ext uri="{FF2B5EF4-FFF2-40B4-BE49-F238E27FC236}">
-                <a16:creationId xmlns:a16="http://schemas.microsoft.com/office/drawing/2014/main" id="{15E9802E-2C89-43CA-B3E7-6458BEEC817E}"/>
+                <ns2:creationId id="{15E9802E-2C89-43CA-B3E7-6458BEEC817E}"/>
               </a:ext>
             </a:extLst>
           </p:cNvPr>
           <p:cNvSpPr>
-            <a:spLocks xmlns:a="http://schemas.openxmlformats.org/drawingml/2006/main" noGrp="1"/>
-          </p:cNvSpPr>
-          <p:nvPr/>
-        </p:nvSpPr>
-        <p:spPr>
-          <a:xfrm xmlns:a="http://schemas.openxmlformats.org/drawingml/2006/main">
+            <a:spLocks noGrp="1"/>
+          </p:cNvSpPr>
+          <p:nvPr/>
+        </p:nvSpPr>
+        <p:spPr>
+          <a:xfrm>
             <a:off x="4210050" y="3295650"/>
             <a:ext cx="1123950" cy="552450"/>
           </a:xfrm>
-          <a:prstGeom xmlns:a="http://schemas.openxmlformats.org/drawingml/2006/main" prst="roundRect">
+          <a:prstGeom prst="roundRect">
             <a:avLst>
               <a:gd name="adj" fmla="val 12069"/>
             </a:avLst>
           </a:prstGeom>
-          <a:solidFill xmlns:a="http://schemas.openxmlformats.org/drawingml/2006/main">
+          <a:solidFill>
             <a:srgbClr val="F0E1CF"/>
           </a:solidFill>
-          <a:ln xmlns:a="http://schemas.openxmlformats.org/drawingml/2006/main" w="11430">
+          <a:ln w="11430">
             <a:solidFill>
               <a:srgbClr val="875214"/>
             </a:solidFill>
@@ -3969,11 +3969,11 @@
           </a:ln>
         </p:spPr>
         <p:txBody>
-          <a:bodyPr xmlns:a="http://schemas.openxmlformats.org/drawingml/2006/main" lIns="76200" tIns="57150" rIns="76200" bIns="57150" anchor="ctr">
+          <a:bodyPr lIns="76200" tIns="57150" rIns="76200" bIns="57150" anchor="ctr">
             <a:normAutofit fontScale="100000"/>
           </a:bodyPr>
-          <a:lstStyle xmlns:a="http://schemas.openxmlformats.org/drawingml/2006/main"/>
-          <a:p xmlns:a="http://schemas.openxmlformats.org/drawingml/2006/main">
+          <a:lstStyle/>
+          <a:p>
             <a:pPr algn="ctr">
               <a:lnSpc>
                 <a:spcPct val="105000"/>
@@ -4000,7 +4000,7 @@
               <a:t>PII Vault</a:t>
             </a:r>
           </a:p>
-          <a:p xmlns:a="http://schemas.openxmlformats.org/drawingml/2006/main">
+          <a:p>
             <a:pPr algn="ctr">
               <a:lnSpc>
                 <a:spcPct val="105000"/>
@@ -4024,7 +4024,7 @@
                 <a:ea typeface="Helvetica Neue"/>
                 <a:cs typeface="Helvetica Neue"/>
               </a:rPr>
-              <a:t>실행 복원</a:t>
+              <a:t>실행 시 PII 조회</a:t>
             </a:r>
           </a:p>
         </p:txBody>
@@ -4032,31 +4032,31 @@
       <p:sp>
         <p:nvSpPr>
           <p:cNvPr id="18" name="">
-            <a:extLst xmlns:a="http://schemas.openxmlformats.org/drawingml/2006/main">
+            <a:extLst>
               <a:ext uri="{FF2B5EF4-FFF2-40B4-BE49-F238E27FC236}">
-                <a16:creationId xmlns:a16="http://schemas.microsoft.com/office/drawing/2014/main" id="{DB5566C3-5DA6-42BD-AAE3-AF50AD8E6E11}"/>
+                <ns2:creationId id="{DB5566C3-5DA6-42BD-AAE3-AF50AD8E6E11}"/>
               </a:ext>
             </a:extLst>
           </p:cNvPr>
           <p:cNvSpPr>
-            <a:spLocks xmlns:a="http://schemas.openxmlformats.org/drawingml/2006/main" noGrp="1"/>
-          </p:cNvSpPr>
-          <p:nvPr/>
-        </p:nvSpPr>
-        <p:spPr>
-          <a:xfrm xmlns:a="http://schemas.openxmlformats.org/drawingml/2006/main">
+            <a:spLocks noGrp="1"/>
+          </p:cNvSpPr>
+          <p:nvPr/>
+        </p:nvSpPr>
+        <p:spPr>
+          <a:xfrm>
             <a:off x="4210050" y="2514600"/>
             <a:ext cx="1123950" cy="552450"/>
           </a:xfrm>
-          <a:prstGeom xmlns:a="http://schemas.openxmlformats.org/drawingml/2006/main" prst="roundRect">
+          <a:prstGeom prst="roundRect">
             <a:avLst>
               <a:gd name="adj" fmla="val 12069"/>
             </a:avLst>
           </a:prstGeom>
-          <a:solidFill xmlns:a="http://schemas.openxmlformats.org/drawingml/2006/main">
+          <a:solidFill>
             <a:srgbClr val="F2E5C4"/>
           </a:solidFill>
-          <a:ln xmlns:a="http://schemas.openxmlformats.org/drawingml/2006/main" w="11430">
+          <a:ln w="11430">
             <a:solidFill>
               <a:srgbClr val="8A5A00"/>
             </a:solidFill>
@@ -4064,11 +4064,11 @@
           </a:ln>
         </p:spPr>
         <p:txBody>
-          <a:bodyPr xmlns:a="http://schemas.openxmlformats.org/drawingml/2006/main" lIns="76200" tIns="57150" rIns="76200" bIns="57150" anchor="ctr">
+          <a:bodyPr lIns="76200" tIns="57150" rIns="76200" bIns="57150" anchor="ctr">
             <a:normAutofit fontScale="100000"/>
           </a:bodyPr>
-          <a:lstStyle xmlns:a="http://schemas.openxmlformats.org/drawingml/2006/main"/>
-          <a:p xmlns:a="http://schemas.openxmlformats.org/drawingml/2006/main">
+          <a:lstStyle/>
+          <a:p>
             <a:pPr algn="ctr">
               <a:lnSpc>
                 <a:spcPct val="105000"/>
@@ -4092,10 +4092,10 @@
                 <a:ea typeface="Helvetica Neue"/>
                 <a:cs typeface="Helvetica Neue"/>
               </a:rPr>
-              <a:t>ufun 재료</a:t>
-            </a:r>
-          </a:p>
-          <a:p xmlns:a="http://schemas.openxmlformats.org/drawingml/2006/main">
+              <a:t>ufun 입력값</a:t>
+            </a:r>
+          </a:p>
+          <a:p>
             <a:pPr algn="ctr">
               <a:lnSpc>
                 <a:spcPct val="105000"/>
@@ -4119,7 +4119,7 @@
                 <a:ea typeface="Helvetica Neue"/>
                 <a:cs typeface="Helvetica Neue"/>
               </a:rPr>
-              <a:t>선호 · 유보값</a:t>
+              <a:t>선호 · 제약 안전값</a:t>
             </a:r>
           </a:p>
         </p:txBody>
@@ -4128,22 +4128,22 @@
         <p:nvCxnSpPr>
           <p:cNvPr id="64" name=""/>
           <p:cNvCxnSpPr>
-            <a:stCxn xmlns:a="http://schemas.openxmlformats.org/drawingml/2006/main" id="9" idx="3"/>
-            <a:endCxn xmlns:a="http://schemas.openxmlformats.org/drawingml/2006/main" id="15" idx="1"/>
+            <a:stCxn id="9" idx="3"/>
+            <a:endCxn id="15" idx="1"/>
           </p:cNvCxnSpPr>
           <p:nvPr/>
         </p:nvCxnSpPr>
         <p:spPr>
-          <a:xfrm xmlns:a="http://schemas.openxmlformats.org/drawingml/2006/main">
+          <a:xfrm>
             <a:off x="1943100" y="2638425"/>
             <a:ext cx="666750" cy="933450"/>
           </a:xfrm>
-          <a:prstGeom xmlns:a="http://schemas.openxmlformats.org/drawingml/2006/main" prst="bentConnector3">
+          <a:prstGeom prst="bentConnector3">
             <a:avLst>
               <a:gd name="adj1" fmla="val 50000"/>
             </a:avLst>
           </a:prstGeom>
-          <a:ln xmlns:a="http://schemas.openxmlformats.org/drawingml/2006/main" w="15240">
+          <a:ln w="15240">
             <a:solidFill>
               <a:srgbClr val="000000"/>
             </a:solidFill>
@@ -4157,20 +4157,20 @@
         <p:nvCxnSpPr>
           <p:cNvPr id="65" name=""/>
           <p:cNvCxnSpPr>
-            <a:stCxn xmlns:a="http://schemas.openxmlformats.org/drawingml/2006/main" id="10" idx="3"/>
-            <a:endCxn xmlns:a="http://schemas.openxmlformats.org/drawingml/2006/main" id="15" idx="1"/>
+            <a:stCxn id="10" idx="3"/>
+            <a:endCxn id="15" idx="1"/>
           </p:cNvCxnSpPr>
           <p:nvPr/>
         </p:nvCxnSpPr>
         <p:spPr>
-          <a:xfrm xmlns:a="http://schemas.openxmlformats.org/drawingml/2006/main" flipV="1">
+          <a:xfrm flipV="1">
             <a:off x="1943100" y="3571875"/>
             <a:ext cx="666750" cy="95250"/>
           </a:xfrm>
-          <a:prstGeom xmlns:a="http://schemas.openxmlformats.org/drawingml/2006/main" prst="straightConnector1">
+          <a:prstGeom prst="straightConnector1">
             <a:avLst/>
           </a:prstGeom>
-          <a:ln xmlns:a="http://schemas.openxmlformats.org/drawingml/2006/main" w="15240">
+          <a:ln w="15240">
             <a:solidFill>
               <a:srgbClr val="000000"/>
             </a:solidFill>
@@ -4184,22 +4184,22 @@
         <p:nvCxnSpPr>
           <p:cNvPr id="66" name=""/>
           <p:cNvCxnSpPr>
-            <a:stCxn xmlns:a="http://schemas.openxmlformats.org/drawingml/2006/main" id="11" idx="3"/>
-            <a:endCxn xmlns:a="http://schemas.openxmlformats.org/drawingml/2006/main" id="15" idx="1"/>
+            <a:stCxn id="11" idx="3"/>
+            <a:endCxn id="15" idx="1"/>
           </p:cNvCxnSpPr>
           <p:nvPr/>
         </p:nvCxnSpPr>
         <p:spPr>
-          <a:xfrm xmlns:a="http://schemas.openxmlformats.org/drawingml/2006/main" flipV="1">
+          <a:xfrm flipV="1">
             <a:off x="1943100" y="3571875"/>
             <a:ext cx="666750" cy="1123950"/>
           </a:xfrm>
-          <a:prstGeom xmlns:a="http://schemas.openxmlformats.org/drawingml/2006/main" prst="bentConnector3">
+          <a:prstGeom prst="bentConnector3">
             <a:avLst>
               <a:gd name="adj1" fmla="val 50000"/>
             </a:avLst>
           </a:prstGeom>
-          <a:ln xmlns:a="http://schemas.openxmlformats.org/drawingml/2006/main" w="15240">
+          <a:ln w="15240">
             <a:solidFill>
               <a:srgbClr val="000000"/>
             </a:solidFill>
@@ -4213,20 +4213,20 @@
         <p:nvCxnSpPr>
           <p:cNvPr id="67" name=""/>
           <p:cNvCxnSpPr>
-            <a:stCxn xmlns:a="http://schemas.openxmlformats.org/drawingml/2006/main" id="14" idx="2"/>
-            <a:endCxn xmlns:a="http://schemas.openxmlformats.org/drawingml/2006/main" id="15" idx="0"/>
+            <a:stCxn id="14" idx="2"/>
+            <a:endCxn id="15" idx="0"/>
           </p:cNvCxnSpPr>
           <p:nvPr/>
         </p:nvCxnSpPr>
         <p:spPr>
-          <a:xfrm xmlns:a="http://schemas.openxmlformats.org/drawingml/2006/main">
+          <a:xfrm>
             <a:off x="3286125" y="3067050"/>
             <a:ext cx="0" cy="228600"/>
           </a:xfrm>
-          <a:prstGeom xmlns:a="http://schemas.openxmlformats.org/drawingml/2006/main" prst="straightConnector1">
+          <a:prstGeom prst="straightConnector1">
             <a:avLst/>
           </a:prstGeom>
-          <a:ln xmlns:a="http://schemas.openxmlformats.org/drawingml/2006/main" w="15240">
+          <a:ln w="15240">
             <a:solidFill>
               <a:srgbClr val="000000"/>
             </a:solidFill>
@@ -4240,20 +4240,20 @@
         <p:nvCxnSpPr>
           <p:cNvPr id="68" name=""/>
           <p:cNvCxnSpPr>
-            <a:stCxn xmlns:a="http://schemas.openxmlformats.org/drawingml/2006/main" id="15" idx="2"/>
-            <a:endCxn xmlns:a="http://schemas.openxmlformats.org/drawingml/2006/main" id="16" idx="0"/>
+            <a:stCxn id="15" idx="2"/>
+            <a:endCxn id="16" idx="0"/>
           </p:cNvCxnSpPr>
           <p:nvPr/>
         </p:nvCxnSpPr>
         <p:spPr>
-          <a:xfrm xmlns:a="http://schemas.openxmlformats.org/drawingml/2006/main">
+          <a:xfrm>
             <a:off x="3286125" y="3848100"/>
             <a:ext cx="0" cy="228600"/>
           </a:xfrm>
-          <a:prstGeom xmlns:a="http://schemas.openxmlformats.org/drawingml/2006/main" prst="straightConnector1">
+          <a:prstGeom prst="straightConnector1">
             <a:avLst/>
           </a:prstGeom>
-          <a:ln xmlns:a="http://schemas.openxmlformats.org/drawingml/2006/main" w="15240">
+          <a:ln w="15240">
             <a:solidFill>
               <a:srgbClr val="000000"/>
             </a:solidFill>
@@ -4267,22 +4267,22 @@
         <p:nvCxnSpPr>
           <p:cNvPr id="69" name=""/>
           <p:cNvCxnSpPr>
-            <a:stCxn xmlns:a="http://schemas.openxmlformats.org/drawingml/2006/main" id="15" idx="3"/>
-            <a:endCxn xmlns:a="http://schemas.openxmlformats.org/drawingml/2006/main" id="18" idx="1"/>
+            <a:stCxn id="15" idx="3"/>
+            <a:endCxn id="18" idx="1"/>
           </p:cNvCxnSpPr>
           <p:nvPr/>
         </p:nvCxnSpPr>
         <p:spPr>
-          <a:xfrm xmlns:a="http://schemas.openxmlformats.org/drawingml/2006/main" flipV="1">
+          <a:xfrm flipV="1">
             <a:off x="3962400" y="2790825"/>
             <a:ext cx="247650" cy="781050"/>
           </a:xfrm>
-          <a:prstGeom xmlns:a="http://schemas.openxmlformats.org/drawingml/2006/main" prst="bentConnector3">
+          <a:prstGeom prst="bentConnector3">
             <a:avLst>
               <a:gd name="adj1" fmla="val 50000"/>
             </a:avLst>
           </a:prstGeom>
-          <a:ln xmlns:a="http://schemas.openxmlformats.org/drawingml/2006/main" w="12383">
+          <a:ln w="12383">
             <a:solidFill>
               <a:srgbClr val="555555"/>
             </a:solidFill>
@@ -4296,22 +4296,22 @@
         <p:nvCxnSpPr>
           <p:cNvPr id="70" name=""/>
           <p:cNvCxnSpPr>
-            <a:stCxn xmlns:a="http://schemas.openxmlformats.org/drawingml/2006/main" id="16" idx="3"/>
-            <a:endCxn xmlns:a="http://schemas.openxmlformats.org/drawingml/2006/main" id="17" idx="1"/>
+            <a:stCxn id="16" idx="3"/>
+            <a:endCxn id="17" idx="1"/>
           </p:cNvCxnSpPr>
           <p:nvPr/>
         </p:nvCxnSpPr>
         <p:spPr>
-          <a:xfrm xmlns:a="http://schemas.openxmlformats.org/drawingml/2006/main" flipV="1">
+          <a:xfrm flipV="1">
             <a:off x="3962400" y="3571875"/>
             <a:ext cx="247650" cy="781050"/>
           </a:xfrm>
-          <a:prstGeom xmlns:a="http://schemas.openxmlformats.org/drawingml/2006/main" prst="bentConnector3">
+          <a:prstGeom prst="bentConnector3">
             <a:avLst>
               <a:gd name="adj1" fmla="val 50000"/>
             </a:avLst>
           </a:prstGeom>
-          <a:ln xmlns:a="http://schemas.openxmlformats.org/drawingml/2006/main" w="12383">
+          <a:ln w="12383">
             <a:solidFill>
               <a:srgbClr val="555555"/>
             </a:solidFill>
@@ -4324,31 +4324,31 @@
       <p:sp>
         <p:nvSpPr>
           <p:cNvPr id="26" name="">
-            <a:extLst xmlns:a="http://schemas.openxmlformats.org/drawingml/2006/main">
+            <a:extLst>
               <a:ext uri="{FF2B5EF4-FFF2-40B4-BE49-F238E27FC236}">
-                <a16:creationId xmlns:a16="http://schemas.microsoft.com/office/drawing/2014/main" id="{12ECF449-2642-4522-8610-BFEFAA3A50ED}"/>
+                <ns2:creationId id="{12ECF449-2642-4522-8610-BFEFAA3A50ED}"/>
               </a:ext>
             </a:extLst>
           </p:cNvPr>
           <p:cNvSpPr>
-            <a:spLocks xmlns:a="http://schemas.openxmlformats.org/drawingml/2006/main" noGrp="1"/>
-          </p:cNvSpPr>
-          <p:nvPr/>
-        </p:nvSpPr>
-        <p:spPr>
-          <a:xfrm xmlns:a="http://schemas.openxmlformats.org/drawingml/2006/main">
+            <a:spLocks noGrp="1"/>
+          </p:cNvSpPr>
+          <p:nvPr/>
+        </p:nvSpPr>
+        <p:spPr>
+          <a:xfrm>
             <a:off x="5962650" y="3333750"/>
             <a:ext cx="590550" cy="800100"/>
           </a:xfrm>
-          <a:prstGeom xmlns:a="http://schemas.openxmlformats.org/drawingml/2006/main" prst="roundRect">
+          <a:prstGeom prst="roundRect">
             <a:avLst>
               <a:gd name="adj" fmla="val 0"/>
             </a:avLst>
           </a:prstGeom>
-          <a:solidFill xmlns:a="http://schemas.openxmlformats.org/drawingml/2006/main">
+          <a:solidFill>
             <a:srgbClr val="EDEDED"/>
           </a:solidFill>
-          <a:ln xmlns:a="http://schemas.openxmlformats.org/drawingml/2006/main" w="11430">
+          <a:ln w="11430">
             <a:solidFill>
               <a:srgbClr val="B8BCC4"/>
             </a:solidFill>
@@ -4356,11 +4356,11 @@
           </a:ln>
         </p:spPr>
         <p:txBody>
-          <a:bodyPr xmlns:a="http://schemas.openxmlformats.org/drawingml/2006/main" lIns="76200" tIns="57150" rIns="76200" bIns="57150" anchor="ctr">
+          <a:bodyPr lIns="76200" tIns="57150" rIns="76200" bIns="57150" anchor="ctr">
             <a:normAutofit fontScale="100000"/>
           </a:bodyPr>
-          <a:lstStyle xmlns:a="http://schemas.openxmlformats.org/drawingml/2006/main"/>
-          <a:p xmlns:a="http://schemas.openxmlformats.org/drawingml/2006/main">
+          <a:lstStyle/>
+          <a:p>
             <a:pPr algn="ctr">
               <a:lnSpc>
                 <a:spcPct val="105000"/>
@@ -4387,7 +4387,7 @@
               <a:t>안전</a:t>
             </a:r>
           </a:p>
-          <a:p xmlns:a="http://schemas.openxmlformats.org/drawingml/2006/main">
+          <a:p>
             <a:pPr algn="ctr">
               <a:lnSpc>
                 <a:spcPct val="105000"/>
@@ -4420,20 +4420,20 @@
         <p:nvCxnSpPr>
           <p:cNvPr id="72" name=""/>
           <p:cNvCxnSpPr>
-            <a:stCxn xmlns:a="http://schemas.openxmlformats.org/drawingml/2006/main" id="16" idx="3"/>
-            <a:endCxn xmlns:a="http://schemas.openxmlformats.org/drawingml/2006/main" id="26" idx="1"/>
+            <a:stCxn id="16" idx="3"/>
+            <a:endCxn id="26" idx="1"/>
           </p:cNvCxnSpPr>
           <p:nvPr/>
         </p:nvCxnSpPr>
         <p:spPr>
-          <a:xfrm xmlns:a="http://schemas.openxmlformats.org/drawingml/2006/main" flipV="1">
+          <a:xfrm flipV="1">
             <a:off x="3962400" y="3733800"/>
             <a:ext cx="2000250" cy="619125"/>
           </a:xfrm>
-          <a:prstGeom xmlns:a="http://schemas.openxmlformats.org/drawingml/2006/main" prst="straightConnector1">
+          <a:prstGeom prst="straightConnector1">
             <a:avLst/>
           </a:prstGeom>
-          <a:ln xmlns:a="http://schemas.openxmlformats.org/drawingml/2006/main" w="15240">
+          <a:ln w="15240">
             <a:solidFill>
               <a:srgbClr val="000000"/>
             </a:solidFill>
@@ -4446,27 +4446,27 @@
       <p:sp>
         <p:nvSpPr>
           <p:cNvPr id="28" name="">
-            <a:extLst xmlns:a="http://schemas.openxmlformats.org/drawingml/2006/main">
+            <a:extLst>
               <a:ext uri="{FF2B5EF4-FFF2-40B4-BE49-F238E27FC236}">
-                <a16:creationId xmlns:a16="http://schemas.microsoft.com/office/drawing/2014/main" id="{6D8C3474-26E8-43E2-8B3F-AC710383C133}"/>
+                <ns2:creationId id="{6D8C3474-26E8-43E2-8B3F-AC710383C133}"/>
               </a:ext>
             </a:extLst>
           </p:cNvPr>
           <p:cNvSpPr>
-            <a:spLocks xmlns:a="http://schemas.openxmlformats.org/drawingml/2006/main" noGrp="1"/>
-          </p:cNvSpPr>
-          <p:nvPr/>
-        </p:nvSpPr>
-        <p:spPr>
-          <a:xfrm xmlns:a="http://schemas.openxmlformats.org/drawingml/2006/main">
+            <a:spLocks noGrp="1"/>
+          </p:cNvSpPr>
+          <p:nvPr/>
+        </p:nvSpPr>
+        <p:spPr>
+          <a:xfrm>
             <a:off x="6991350" y="2095500"/>
             <a:ext cx="2724150" cy="1638300"/>
           </a:xfrm>
-          <a:prstGeom xmlns:a="http://schemas.openxmlformats.org/drawingml/2006/main" prst="rect">
+          <a:prstGeom prst="rect">
             <a:avLst/>
           </a:prstGeom>
-          <a:noFill xmlns:a="http://schemas.openxmlformats.org/drawingml/2006/main"/>
-          <a:ln xmlns:a="http://schemas.openxmlformats.org/drawingml/2006/main" w="11430">
+          <a:noFill/>
+          <a:ln w="11430">
             <a:solidFill>
               <a:srgbClr val="8A5A00"/>
             </a:solidFill>
@@ -4477,31 +4477,31 @@
       <p:sp>
         <p:nvSpPr>
           <p:cNvPr id="29" name="">
-            <a:extLst xmlns:a="http://schemas.openxmlformats.org/drawingml/2006/main">
+            <a:extLst>
               <a:ext uri="{FF2B5EF4-FFF2-40B4-BE49-F238E27FC236}">
-                <a16:creationId xmlns:a16="http://schemas.microsoft.com/office/drawing/2014/main" id="{9DEF887C-3E93-4B1D-A3FA-D85AAD3E64BB}"/>
+                <ns2:creationId id="{9DEF887C-3E93-4B1D-A3FA-D85AAD3E64BB}"/>
               </a:ext>
             </a:extLst>
           </p:cNvPr>
           <p:cNvSpPr>
-            <a:spLocks xmlns:a="http://schemas.openxmlformats.org/drawingml/2006/main" noGrp="1"/>
-          </p:cNvSpPr>
-          <p:nvPr/>
-        </p:nvSpPr>
-        <p:spPr>
-          <a:xfrm xmlns:a="http://schemas.openxmlformats.org/drawingml/2006/main">
+            <a:spLocks noGrp="1"/>
+          </p:cNvSpPr>
+          <p:nvPr/>
+        </p:nvSpPr>
+        <p:spPr>
+          <a:xfrm>
             <a:off x="6991350" y="2095500"/>
             <a:ext cx="2724150" cy="323850"/>
           </a:xfrm>
-          <a:prstGeom xmlns:a="http://schemas.openxmlformats.org/drawingml/2006/main" prst="roundRect">
+          <a:prstGeom prst="roundRect">
             <a:avLst>
               <a:gd name="adj" fmla="val 0"/>
             </a:avLst>
           </a:prstGeom>
-          <a:solidFill xmlns:a="http://schemas.openxmlformats.org/drawingml/2006/main">
+          <a:solidFill>
             <a:srgbClr val="F2E5C4"/>
           </a:solidFill>
-          <a:ln xmlns:a="http://schemas.openxmlformats.org/drawingml/2006/main" w="11430">
+          <a:ln w="11430">
             <a:solidFill>
               <a:srgbClr val="8A5A00"/>
             </a:solidFill>
@@ -4509,11 +4509,11 @@
           </a:ln>
         </p:spPr>
         <p:txBody>
-          <a:bodyPr xmlns:a="http://schemas.openxmlformats.org/drawingml/2006/main" lIns="114300" tIns="76200" rIns="114300" bIns="76200" anchor="ctr">
+          <a:bodyPr lIns="114300" tIns="76200" rIns="114300" bIns="76200" anchor="ctr">
             <a:normAutofit fontScale="83241"/>
           </a:bodyPr>
-          <a:lstStyle xmlns:a="http://schemas.openxmlformats.org/drawingml/2006/main"/>
-          <a:p xmlns:a="http://schemas.openxmlformats.org/drawingml/2006/main">
+          <a:lstStyle/>
+          <a:p>
             <a:pPr algn="ctr">
               <a:lnSpc>
                 <a:spcPct val="106000"/>
@@ -4545,31 +4545,31 @@
       <p:sp>
         <p:nvSpPr>
           <p:cNvPr id="30" name="">
-            <a:extLst xmlns:a="http://schemas.openxmlformats.org/drawingml/2006/main">
+            <a:extLst>
               <a:ext uri="{FF2B5EF4-FFF2-40B4-BE49-F238E27FC236}">
-                <a16:creationId xmlns:a16="http://schemas.microsoft.com/office/drawing/2014/main" id="{2C82352E-3181-4D5F-80B0-B06C1251D5E9}"/>
+                <ns2:creationId id="{2C82352E-3181-4D5F-80B0-B06C1251D5E9}"/>
               </a:ext>
             </a:extLst>
           </p:cNvPr>
           <p:cNvSpPr>
-            <a:spLocks xmlns:a="http://schemas.openxmlformats.org/drawingml/2006/main" noGrp="1"/>
-          </p:cNvSpPr>
-          <p:nvPr/>
-        </p:nvSpPr>
-        <p:spPr>
-          <a:xfrm xmlns:a="http://schemas.openxmlformats.org/drawingml/2006/main">
+            <a:spLocks noGrp="1"/>
+          </p:cNvSpPr>
+          <p:nvPr/>
+        </p:nvSpPr>
+        <p:spPr>
+          <a:xfrm>
             <a:off x="7277100" y="2590800"/>
             <a:ext cx="2152650" cy="457200"/>
           </a:xfrm>
-          <a:prstGeom xmlns:a="http://schemas.openxmlformats.org/drawingml/2006/main" prst="roundRect">
+          <a:prstGeom prst="roundRect">
             <a:avLst>
               <a:gd name="adj" fmla="val 14583"/>
             </a:avLst>
           </a:prstGeom>
-          <a:solidFill xmlns:a="http://schemas.openxmlformats.org/drawingml/2006/main">
+          <a:solidFill>
             <a:srgbClr val="F2E5C4"/>
           </a:solidFill>
-          <a:ln xmlns:a="http://schemas.openxmlformats.org/drawingml/2006/main" w="11430">
+          <a:ln w="11430">
             <a:solidFill>
               <a:srgbClr val="8A5A00"/>
             </a:solidFill>
@@ -4577,11 +4577,11 @@
           </a:ln>
         </p:spPr>
         <p:txBody>
-          <a:bodyPr xmlns:a="http://schemas.openxmlformats.org/drawingml/2006/main" lIns="76200" tIns="57150" rIns="76200" bIns="57150" anchor="ctr">
+          <a:bodyPr lIns="76200" tIns="57150" rIns="76200" bIns="57150" anchor="ctr">
             <a:normAutofit fontScale="79116"/>
           </a:bodyPr>
-          <a:lstStyle xmlns:a="http://schemas.openxmlformats.org/drawingml/2006/main"/>
-          <a:p xmlns:a="http://schemas.openxmlformats.org/drawingml/2006/main">
+          <a:lstStyle/>
+          <a:p>
             <a:pPr algn="ctr">
               <a:lnSpc>
                 <a:spcPct val="105000"/>
@@ -4608,7 +4608,7 @@
               <a:t>ufun</a:t>
             </a:r>
           </a:p>
-          <a:p xmlns:a="http://schemas.openxmlformats.org/drawingml/2006/main">
+          <a:p>
             <a:pPr algn="ctr">
               <a:lnSpc>
                 <a:spcPct val="105000"/>
@@ -4640,31 +4640,31 @@
       <p:sp>
         <p:nvSpPr>
           <p:cNvPr id="31" name="">
-            <a:extLst xmlns:a="http://schemas.openxmlformats.org/drawingml/2006/main">
+            <a:extLst>
               <a:ext uri="{FF2B5EF4-FFF2-40B4-BE49-F238E27FC236}">
-                <a16:creationId xmlns:a16="http://schemas.microsoft.com/office/drawing/2014/main" id="{C4800EFB-FEB3-4654-AA9F-6B99E056D1DD}"/>
+                <ns2:creationId id="{C4800EFB-FEB3-4654-AA9F-6B99E056D1DD}"/>
               </a:ext>
             </a:extLst>
           </p:cNvPr>
           <p:cNvSpPr>
-            <a:spLocks xmlns:a="http://schemas.openxmlformats.org/drawingml/2006/main" noGrp="1"/>
-          </p:cNvSpPr>
-          <p:nvPr/>
-        </p:nvSpPr>
-        <p:spPr>
-          <a:xfrm xmlns:a="http://schemas.openxmlformats.org/drawingml/2006/main">
+            <a:spLocks noGrp="1"/>
+          </p:cNvSpPr>
+          <p:nvPr/>
+        </p:nvSpPr>
+        <p:spPr>
+          <a:xfrm>
             <a:off x="7277100" y="3181350"/>
             <a:ext cx="2152650" cy="457200"/>
           </a:xfrm>
-          <a:prstGeom xmlns:a="http://schemas.openxmlformats.org/drawingml/2006/main" prst="roundRect">
+          <a:prstGeom prst="roundRect">
             <a:avLst>
               <a:gd name="adj" fmla="val 14583"/>
             </a:avLst>
           </a:prstGeom>
-          <a:solidFill xmlns:a="http://schemas.openxmlformats.org/drawingml/2006/main">
+          <a:solidFill>
             <a:srgbClr val="F4E7C0"/>
           </a:solidFill>
-          <a:ln xmlns:a="http://schemas.openxmlformats.org/drawingml/2006/main" w="11430">
+          <a:ln w="11430">
             <a:solidFill>
               <a:srgbClr val="8A5A00"/>
             </a:solidFill>
@@ -4672,11 +4672,11 @@
           </a:ln>
         </p:spPr>
         <p:txBody>
-          <a:bodyPr xmlns:a="http://schemas.openxmlformats.org/drawingml/2006/main" lIns="76200" tIns="57150" rIns="76200" bIns="57150" anchor="ctr">
+          <a:bodyPr lIns="76200" tIns="57150" rIns="76200" bIns="57150" anchor="ctr">
             <a:normAutofit fontScale="79116"/>
           </a:bodyPr>
-          <a:lstStyle xmlns:a="http://schemas.openxmlformats.org/drawingml/2006/main"/>
-          <a:p xmlns:a="http://schemas.openxmlformats.org/drawingml/2006/main">
+          <a:lstStyle/>
+          <a:p>
             <a:pPr algn="ctr">
               <a:lnSpc>
                 <a:spcPct val="105000"/>
@@ -4703,7 +4703,7 @@
               <a:t>협상 엔진 (NegMAS)</a:t>
             </a:r>
           </a:p>
-          <a:p xmlns:a="http://schemas.openxmlformats.org/drawingml/2006/main">
+          <a:p>
             <a:pPr algn="ctr">
               <a:lnSpc>
                 <a:spcPct val="105000"/>
@@ -4735,31 +4735,31 @@
       <p:sp>
         <p:nvSpPr>
           <p:cNvPr id="32" name="">
-            <a:extLst xmlns:a="http://schemas.openxmlformats.org/drawingml/2006/main">
+            <a:extLst>
               <a:ext uri="{FF2B5EF4-FFF2-40B4-BE49-F238E27FC236}">
-                <a16:creationId xmlns:a16="http://schemas.microsoft.com/office/drawing/2014/main" id="{5B3D9642-7BB1-4DF6-9A39-60D982423A68}"/>
+                <ns2:creationId id="{5B3D9642-7BB1-4DF6-9A39-60D982423A68}"/>
               </a:ext>
             </a:extLst>
           </p:cNvPr>
           <p:cNvSpPr>
-            <a:spLocks xmlns:a="http://schemas.openxmlformats.org/drawingml/2006/main" noGrp="1"/>
-          </p:cNvSpPr>
-          <p:nvPr/>
-        </p:nvSpPr>
-        <p:spPr>
-          <a:xfrm xmlns:a="http://schemas.openxmlformats.org/drawingml/2006/main">
+            <a:spLocks noGrp="1"/>
+          </p:cNvSpPr>
+          <p:nvPr/>
+        </p:nvSpPr>
+        <p:spPr>
+          <a:xfrm>
             <a:off x="6991350" y="4095750"/>
             <a:ext cx="2724150" cy="552450"/>
           </a:xfrm>
-          <a:prstGeom xmlns:a="http://schemas.openxmlformats.org/drawingml/2006/main" prst="roundRect">
+          <a:prstGeom prst="roundRect">
             <a:avLst>
               <a:gd name="adj" fmla="val 12069"/>
             </a:avLst>
           </a:prstGeom>
-          <a:solidFill xmlns:a="http://schemas.openxmlformats.org/drawingml/2006/main">
+          <a:solidFill>
             <a:srgbClr val="E6EEF8"/>
           </a:solidFill>
-          <a:ln xmlns:a="http://schemas.openxmlformats.org/drawingml/2006/main" w="11430">
+          <a:ln w="11430">
             <a:solidFill>
               <a:srgbClr val="426A9A"/>
             </a:solidFill>
@@ -4767,11 +4767,11 @@
           </a:ln>
         </p:spPr>
         <p:txBody>
-          <a:bodyPr xmlns:a="http://schemas.openxmlformats.org/drawingml/2006/main" lIns="76200" tIns="57150" rIns="76200" bIns="57150" anchor="ctr">
+          <a:bodyPr lIns="76200" tIns="57150" rIns="76200" bIns="57150" anchor="ctr">
             <a:normAutofit fontScale="100000"/>
           </a:bodyPr>
-          <a:lstStyle xmlns:a="http://schemas.openxmlformats.org/drawingml/2006/main"/>
-          <a:p xmlns:a="http://schemas.openxmlformats.org/drawingml/2006/main">
+          <a:lstStyle/>
+          <a:p>
             <a:pPr algn="ctr">
               <a:lnSpc>
                 <a:spcPct val="105000"/>
@@ -4798,7 +4798,7 @@
               <a:t>Orchestrator</a:t>
             </a:r>
           </a:p>
-          <a:p xmlns:a="http://schemas.openxmlformats.org/drawingml/2006/main">
+          <a:p>
             <a:pPr algn="ctr">
               <a:lnSpc>
                 <a:spcPct val="105000"/>
@@ -4830,31 +4830,31 @@
       <p:sp>
         <p:nvSpPr>
           <p:cNvPr id="33" name="">
-            <a:extLst xmlns:a="http://schemas.openxmlformats.org/drawingml/2006/main">
+            <a:extLst>
               <a:ext uri="{FF2B5EF4-FFF2-40B4-BE49-F238E27FC236}">
-                <a16:creationId xmlns:a16="http://schemas.microsoft.com/office/drawing/2014/main" id="{182B16AA-78C8-48D8-85FE-3E07351EDD89}"/>
+                <ns2:creationId id="{182B16AA-78C8-48D8-85FE-3E07351EDD89}"/>
               </a:ext>
             </a:extLst>
           </p:cNvPr>
           <p:cNvSpPr>
-            <a:spLocks xmlns:a="http://schemas.openxmlformats.org/drawingml/2006/main" noGrp="1"/>
-          </p:cNvSpPr>
-          <p:nvPr/>
-        </p:nvSpPr>
-        <p:spPr>
-          <a:xfrm xmlns:a="http://schemas.openxmlformats.org/drawingml/2006/main">
+            <a:spLocks noGrp="1"/>
+          </p:cNvSpPr>
+          <p:nvPr/>
+        </p:nvSpPr>
+        <p:spPr>
+          <a:xfrm>
             <a:off x="6991350" y="5010150"/>
             <a:ext cx="2724150" cy="552450"/>
           </a:xfrm>
-          <a:prstGeom xmlns:a="http://schemas.openxmlformats.org/drawingml/2006/main" prst="roundRect">
+          <a:prstGeom prst="roundRect">
             <a:avLst>
               <a:gd name="adj" fmla="val 12069"/>
             </a:avLst>
           </a:prstGeom>
-          <a:solidFill xmlns:a="http://schemas.openxmlformats.org/drawingml/2006/main">
+          <a:solidFill>
             <a:srgbClr val="E6EEF8"/>
           </a:solidFill>
-          <a:ln xmlns:a="http://schemas.openxmlformats.org/drawingml/2006/main" w="11430">
+          <a:ln w="11430">
             <a:solidFill>
               <a:srgbClr val="426A9A"/>
             </a:solidFill>
@@ -4862,11 +4862,11 @@
           </a:ln>
         </p:spPr>
         <p:txBody>
-          <a:bodyPr xmlns:a="http://schemas.openxmlformats.org/drawingml/2006/main" lIns="76200" tIns="57150" rIns="76200" bIns="57150" anchor="ctr">
+          <a:bodyPr lIns="76200" tIns="57150" rIns="76200" bIns="57150" anchor="ctr">
             <a:normAutofit fontScale="100000"/>
           </a:bodyPr>
-          <a:lstStyle xmlns:a="http://schemas.openxmlformats.org/drawingml/2006/main"/>
-          <a:p xmlns:a="http://schemas.openxmlformats.org/drawingml/2006/main">
+          <a:lstStyle/>
+          <a:p>
             <a:pPr algn="ctr">
               <a:lnSpc>
                 <a:spcPct val="105000"/>
@@ -4893,7 +4893,7 @@
               <a:t>Sub-Agent</a:t>
             </a:r>
           </a:p>
-          <a:p xmlns:a="http://schemas.openxmlformats.org/drawingml/2006/main">
+          <a:p>
             <a:pPr algn="ctr">
               <a:lnSpc>
                 <a:spcPct val="105000"/>
@@ -4926,22 +4926,22 @@
         <p:nvCxnSpPr>
           <p:cNvPr id="79" name=""/>
           <p:cNvCxnSpPr>
-            <a:stCxn xmlns:a="http://schemas.openxmlformats.org/drawingml/2006/main" id="26" idx="3"/>
-            <a:endCxn xmlns:a="http://schemas.openxmlformats.org/drawingml/2006/main" id="30" idx="1"/>
+            <a:stCxn id="26" idx="3"/>
+            <a:endCxn id="30" idx="1"/>
           </p:cNvCxnSpPr>
           <p:nvPr/>
         </p:nvCxnSpPr>
         <p:spPr>
-          <a:xfrm xmlns:a="http://schemas.openxmlformats.org/drawingml/2006/main" flipV="1">
+          <a:xfrm flipV="1">
             <a:off x="6553200" y="2819400"/>
             <a:ext cx="723900" cy="914400"/>
           </a:xfrm>
-          <a:prstGeom xmlns:a="http://schemas.openxmlformats.org/drawingml/2006/main" prst="bentConnector3">
+          <a:prstGeom prst="bentConnector3">
             <a:avLst>
               <a:gd name="adj1" fmla="val 50000"/>
             </a:avLst>
           </a:prstGeom>
-          <a:ln xmlns:a="http://schemas.openxmlformats.org/drawingml/2006/main" w="15240">
+          <a:ln w="15240">
             <a:solidFill>
               <a:srgbClr val="000000"/>
             </a:solidFill>
@@ -4955,22 +4955,22 @@
         <p:nvCxnSpPr>
           <p:cNvPr id="80" name=""/>
           <p:cNvCxnSpPr>
-            <a:stCxn xmlns:a="http://schemas.openxmlformats.org/drawingml/2006/main" id="26" idx="3"/>
-            <a:endCxn xmlns:a="http://schemas.openxmlformats.org/drawingml/2006/main" id="31" idx="1"/>
+            <a:stCxn id="26" idx="3"/>
+            <a:endCxn id="31" idx="1"/>
           </p:cNvCxnSpPr>
           <p:nvPr/>
         </p:nvCxnSpPr>
         <p:spPr>
-          <a:xfrm xmlns:a="http://schemas.openxmlformats.org/drawingml/2006/main" flipV="1">
+          <a:xfrm flipV="1">
             <a:off x="6553200" y="3409950"/>
             <a:ext cx="723900" cy="323850"/>
           </a:xfrm>
-          <a:prstGeom xmlns:a="http://schemas.openxmlformats.org/drawingml/2006/main" prst="bentConnector3">
+          <a:prstGeom prst="bentConnector3">
             <a:avLst>
               <a:gd name="adj1" fmla="val 50000"/>
             </a:avLst>
           </a:prstGeom>
-          <a:ln xmlns:a="http://schemas.openxmlformats.org/drawingml/2006/main" w="15240">
+          <a:ln w="15240">
             <a:solidFill>
               <a:srgbClr val="000000"/>
             </a:solidFill>
@@ -4984,22 +4984,22 @@
         <p:nvCxnSpPr>
           <p:cNvPr id="81" name=""/>
           <p:cNvCxnSpPr>
-            <a:stCxn xmlns:a="http://schemas.openxmlformats.org/drawingml/2006/main" id="26" idx="3"/>
-            <a:endCxn xmlns:a="http://schemas.openxmlformats.org/drawingml/2006/main" id="32" idx="1"/>
+            <a:stCxn id="26" idx="3"/>
+            <a:endCxn id="32" idx="1"/>
           </p:cNvCxnSpPr>
           <p:nvPr/>
         </p:nvCxnSpPr>
         <p:spPr>
-          <a:xfrm xmlns:a="http://schemas.openxmlformats.org/drawingml/2006/main">
+          <a:xfrm>
             <a:off x="6553200" y="3733800"/>
             <a:ext cx="438150" cy="638175"/>
           </a:xfrm>
-          <a:prstGeom xmlns:a="http://schemas.openxmlformats.org/drawingml/2006/main" prst="bentConnector3">
+          <a:prstGeom prst="bentConnector3">
             <a:avLst>
               <a:gd name="adj1" fmla="val 50000"/>
             </a:avLst>
           </a:prstGeom>
-          <a:ln xmlns:a="http://schemas.openxmlformats.org/drawingml/2006/main" w="15240">
+          <a:ln w="15240">
             <a:solidFill>
               <a:srgbClr val="000000"/>
             </a:solidFill>
@@ -5013,20 +5013,20 @@
         <p:nvCxnSpPr>
           <p:cNvPr id="82" name=""/>
           <p:cNvCxnSpPr>
-            <a:stCxn xmlns:a="http://schemas.openxmlformats.org/drawingml/2006/main" id="32" idx="2"/>
-            <a:endCxn xmlns:a="http://schemas.openxmlformats.org/drawingml/2006/main" id="33" idx="0"/>
+            <a:stCxn id="32" idx="2"/>
+            <a:endCxn id="33" idx="0"/>
           </p:cNvCxnSpPr>
           <p:nvPr/>
         </p:nvCxnSpPr>
         <p:spPr>
-          <a:xfrm xmlns:a="http://schemas.openxmlformats.org/drawingml/2006/main">
+          <a:xfrm>
             <a:off x="8353425" y="4648200"/>
             <a:ext cx="0" cy="361950"/>
           </a:xfrm>
-          <a:prstGeom xmlns:a="http://schemas.openxmlformats.org/drawingml/2006/main" prst="straightConnector1">
+          <a:prstGeom prst="straightConnector1">
             <a:avLst/>
           </a:prstGeom>
-          <a:ln xmlns:a="http://schemas.openxmlformats.org/drawingml/2006/main" w="15240">
+          <a:ln w="15240">
             <a:solidFill>
               <a:srgbClr val="000000"/>
             </a:solidFill>
@@ -5039,31 +5039,31 @@
       <p:sp>
         <p:nvSpPr>
           <p:cNvPr id="38" name="">
-            <a:extLst xmlns:a="http://schemas.openxmlformats.org/drawingml/2006/main">
+            <a:extLst>
               <a:ext uri="{FF2B5EF4-FFF2-40B4-BE49-F238E27FC236}">
-                <a16:creationId xmlns:a16="http://schemas.microsoft.com/office/drawing/2014/main" id="{1CFAE8D3-E350-4E0A-8E81-9E0B1C7D3CCF}"/>
+                <ns2:creationId id="{1CFAE8D3-E350-4E0A-8E81-9E0B1C7D3CCF}"/>
               </a:ext>
             </a:extLst>
           </p:cNvPr>
           <p:cNvSpPr>
-            <a:spLocks xmlns:a="http://schemas.openxmlformats.org/drawingml/2006/main" noGrp="1"/>
-          </p:cNvSpPr>
-          <p:nvPr/>
-        </p:nvSpPr>
-        <p:spPr>
-          <a:xfrm xmlns:a="http://schemas.openxmlformats.org/drawingml/2006/main">
+            <a:spLocks noGrp="1"/>
+          </p:cNvSpPr>
+          <p:nvPr/>
+        </p:nvSpPr>
+        <p:spPr>
+          <a:xfrm>
             <a:off x="10325100" y="3028950"/>
             <a:ext cx="1466850" cy="552450"/>
           </a:xfrm>
-          <a:prstGeom xmlns:a="http://schemas.openxmlformats.org/drawingml/2006/main" prst="roundRect">
+          <a:prstGeom prst="roundRect">
             <a:avLst>
               <a:gd name="adj" fmla="val 12069"/>
             </a:avLst>
           </a:prstGeom>
-          <a:solidFill xmlns:a="http://schemas.openxmlformats.org/drawingml/2006/main">
+          <a:solidFill>
             <a:srgbClr val="EFE7F4"/>
           </a:solidFill>
-          <a:ln xmlns:a="http://schemas.openxmlformats.org/drawingml/2006/main" w="11430">
+          <a:ln w="11430">
             <a:solidFill>
               <a:srgbClr val="7B5B8E"/>
             </a:solidFill>
@@ -5071,11 +5071,11 @@
           </a:ln>
         </p:spPr>
         <p:txBody>
-          <a:bodyPr xmlns:a="http://schemas.openxmlformats.org/drawingml/2006/main" lIns="76200" tIns="57150" rIns="76200" bIns="57150" anchor="ctr">
+          <a:bodyPr lIns="76200" tIns="57150" rIns="76200" bIns="57150" anchor="ctr">
             <a:normAutofit fontScale="100000"/>
           </a:bodyPr>
-          <a:lstStyle xmlns:a="http://schemas.openxmlformats.org/drawingml/2006/main"/>
-          <a:p xmlns:a="http://schemas.openxmlformats.org/drawingml/2006/main">
+          <a:lstStyle/>
+          <a:p>
             <a:pPr algn="ctr">
               <a:lnSpc>
                 <a:spcPct val="105000"/>
@@ -5107,31 +5107,31 @@
       <p:sp>
         <p:nvSpPr>
           <p:cNvPr id="39" name="">
-            <a:extLst xmlns:a="http://schemas.openxmlformats.org/drawingml/2006/main">
+            <a:extLst>
               <a:ext uri="{FF2B5EF4-FFF2-40B4-BE49-F238E27FC236}">
-                <a16:creationId xmlns:a16="http://schemas.microsoft.com/office/drawing/2014/main" id="{C259539D-D93D-495C-BE02-324B0EF6391E}"/>
+                <ns2:creationId id="{C259539D-D93D-495C-BE02-324B0EF6391E}"/>
               </a:ext>
             </a:extLst>
           </p:cNvPr>
           <p:cNvSpPr>
-            <a:spLocks xmlns:a="http://schemas.openxmlformats.org/drawingml/2006/main" noGrp="1"/>
-          </p:cNvSpPr>
-          <p:nvPr/>
-        </p:nvSpPr>
-        <p:spPr>
-          <a:xfrm xmlns:a="http://schemas.openxmlformats.org/drawingml/2006/main">
+            <a:spLocks noGrp="1"/>
+          </p:cNvSpPr>
+          <p:nvPr/>
+        </p:nvSpPr>
+        <p:spPr>
+          <a:xfrm>
             <a:off x="10325100" y="4095750"/>
             <a:ext cx="1466850" cy="552450"/>
           </a:xfrm>
-          <a:prstGeom xmlns:a="http://schemas.openxmlformats.org/drawingml/2006/main" prst="roundRect">
+          <a:prstGeom prst="roundRect">
             <a:avLst>
               <a:gd name="adj" fmla="val 12069"/>
             </a:avLst>
           </a:prstGeom>
-          <a:solidFill xmlns:a="http://schemas.openxmlformats.org/drawingml/2006/main">
+          <a:solidFill>
             <a:srgbClr val="EFE7F4"/>
           </a:solidFill>
-          <a:ln xmlns:a="http://schemas.openxmlformats.org/drawingml/2006/main" w="11430">
+          <a:ln w="11430">
             <a:solidFill>
               <a:srgbClr val="7B5B8E"/>
             </a:solidFill>
@@ -5139,11 +5139,11 @@
           </a:ln>
         </p:spPr>
         <p:txBody>
-          <a:bodyPr xmlns:a="http://schemas.openxmlformats.org/drawingml/2006/main" lIns="76200" tIns="57150" rIns="76200" bIns="57150" anchor="ctr">
+          <a:bodyPr lIns="76200" tIns="57150" rIns="76200" bIns="57150" anchor="ctr">
             <a:normAutofit fontScale="100000"/>
           </a:bodyPr>
-          <a:lstStyle xmlns:a="http://schemas.openxmlformats.org/drawingml/2006/main"/>
-          <a:p xmlns:a="http://schemas.openxmlformats.org/drawingml/2006/main">
+          <a:lstStyle/>
+          <a:p>
             <a:pPr algn="ctr">
               <a:lnSpc>
                 <a:spcPct val="105000"/>
@@ -5175,31 +5175,31 @@
       <p:sp>
         <p:nvSpPr>
           <p:cNvPr id="40" name="">
-            <a:extLst xmlns:a="http://schemas.openxmlformats.org/drawingml/2006/main">
+            <a:extLst>
               <a:ext uri="{FF2B5EF4-FFF2-40B4-BE49-F238E27FC236}">
-                <a16:creationId xmlns:a16="http://schemas.microsoft.com/office/drawing/2014/main" id="{B001E3EB-37B7-48CF-9014-81386E3DA9DC}"/>
+                <ns2:creationId id="{B001E3EB-37B7-48CF-9014-81386E3DA9DC}"/>
               </a:ext>
             </a:extLst>
           </p:cNvPr>
           <p:cNvSpPr>
-            <a:spLocks xmlns:a="http://schemas.openxmlformats.org/drawingml/2006/main" noGrp="1"/>
-          </p:cNvSpPr>
-          <p:nvPr/>
-        </p:nvSpPr>
-        <p:spPr>
-          <a:xfrm xmlns:a="http://schemas.openxmlformats.org/drawingml/2006/main">
+            <a:spLocks noGrp="1"/>
+          </p:cNvSpPr>
+          <p:nvPr/>
+        </p:nvSpPr>
+        <p:spPr>
+          <a:xfrm>
             <a:off x="10325100" y="5010150"/>
             <a:ext cx="1466850" cy="552450"/>
           </a:xfrm>
-          <a:prstGeom xmlns:a="http://schemas.openxmlformats.org/drawingml/2006/main" prst="roundRect">
+          <a:prstGeom prst="roundRect">
             <a:avLst>
               <a:gd name="adj" fmla="val 12069"/>
             </a:avLst>
           </a:prstGeom>
-          <a:solidFill xmlns:a="http://schemas.openxmlformats.org/drawingml/2006/main">
+          <a:solidFill>
             <a:srgbClr val="EFE7F4"/>
           </a:solidFill>
-          <a:ln xmlns:a="http://schemas.openxmlformats.org/drawingml/2006/main" w="11430">
+          <a:ln w="11430">
             <a:solidFill>
               <a:srgbClr val="7B5B8E"/>
             </a:solidFill>
@@ -5207,11 +5207,11 @@
           </a:ln>
         </p:spPr>
         <p:txBody>
-          <a:bodyPr xmlns:a="http://schemas.openxmlformats.org/drawingml/2006/main" lIns="76200" tIns="57150" rIns="76200" bIns="57150" anchor="ctr">
+          <a:bodyPr lIns="76200" tIns="57150" rIns="76200" bIns="57150" anchor="ctr">
             <a:normAutofit fontScale="100000"/>
           </a:bodyPr>
-          <a:lstStyle xmlns:a="http://schemas.openxmlformats.org/drawingml/2006/main"/>
-          <a:p xmlns:a="http://schemas.openxmlformats.org/drawingml/2006/main">
+          <a:lstStyle/>
+          <a:p>
             <a:pPr algn="ctr">
               <a:lnSpc>
                 <a:spcPct val="105000"/>
@@ -5244,20 +5244,20 @@
         <p:nvCxnSpPr>
           <p:cNvPr id="86" name=""/>
           <p:cNvCxnSpPr>
-            <a:stCxn xmlns:a="http://schemas.openxmlformats.org/drawingml/2006/main" id="31" idx="3"/>
-            <a:endCxn xmlns:a="http://schemas.openxmlformats.org/drawingml/2006/main" id="38" idx="1"/>
+            <a:stCxn id="31" idx="3"/>
+            <a:endCxn id="38" idx="1"/>
           </p:cNvCxnSpPr>
           <p:nvPr/>
         </p:nvCxnSpPr>
         <p:spPr>
-          <a:xfrm xmlns:a="http://schemas.openxmlformats.org/drawingml/2006/main" flipV="1">
+          <a:xfrm flipV="1">
             <a:off x="9429750" y="3305175"/>
             <a:ext cx="895350" cy="104775"/>
           </a:xfrm>
-          <a:prstGeom xmlns:a="http://schemas.openxmlformats.org/drawingml/2006/main" prst="straightConnector1">
+          <a:prstGeom prst="straightConnector1">
             <a:avLst/>
           </a:prstGeom>
-          <a:ln xmlns:a="http://schemas.openxmlformats.org/drawingml/2006/main" w="15240">
+          <a:ln w="15240">
             <a:solidFill>
               <a:srgbClr val="000000"/>
             </a:solidFill>
@@ -5271,20 +5271,20 @@
         <p:nvCxnSpPr>
           <p:cNvPr id="87" name=""/>
           <p:cNvCxnSpPr>
-            <a:stCxn xmlns:a="http://schemas.openxmlformats.org/drawingml/2006/main" id="32" idx="3"/>
-            <a:endCxn xmlns:a="http://schemas.openxmlformats.org/drawingml/2006/main" id="39" idx="1"/>
+            <a:stCxn id="32" idx="3"/>
+            <a:endCxn id="39" idx="1"/>
           </p:cNvCxnSpPr>
           <p:nvPr/>
         </p:nvCxnSpPr>
         <p:spPr>
-          <a:xfrm xmlns:a="http://schemas.openxmlformats.org/drawingml/2006/main">
+          <a:xfrm>
             <a:off x="9715500" y="4371975"/>
             <a:ext cx="609600" cy="0"/>
           </a:xfrm>
-          <a:prstGeom xmlns:a="http://schemas.openxmlformats.org/drawingml/2006/main" prst="straightConnector1">
+          <a:prstGeom prst="straightConnector1">
             <a:avLst/>
           </a:prstGeom>
-          <a:ln xmlns:a="http://schemas.openxmlformats.org/drawingml/2006/main" w="15240">
+          <a:ln w="15240">
             <a:solidFill>
               <a:srgbClr val="555555"/>
             </a:solidFill>
@@ -5298,20 +5298,20 @@
         <p:nvCxnSpPr>
           <p:cNvPr id="88" name=""/>
           <p:cNvCxnSpPr>
-            <a:stCxn xmlns:a="http://schemas.openxmlformats.org/drawingml/2006/main" id="33" idx="3"/>
-            <a:endCxn xmlns:a="http://schemas.openxmlformats.org/drawingml/2006/main" id="40" idx="1"/>
+            <a:stCxn id="33" idx="3"/>
+            <a:endCxn id="40" idx="1"/>
           </p:cNvCxnSpPr>
           <p:nvPr/>
         </p:nvCxnSpPr>
         <p:spPr>
-          <a:xfrm xmlns:a="http://schemas.openxmlformats.org/drawingml/2006/main">
+          <a:xfrm>
             <a:off x="9715500" y="5286375"/>
             <a:ext cx="609600" cy="0"/>
           </a:xfrm>
-          <a:prstGeom xmlns:a="http://schemas.openxmlformats.org/drawingml/2006/main" prst="straightConnector1">
+          <a:prstGeom prst="straightConnector1">
             <a:avLst/>
           </a:prstGeom>
-          <a:ln xmlns:a="http://schemas.openxmlformats.org/drawingml/2006/main" w="15240">
+          <a:ln w="15240">
             <a:solidFill>
               <a:srgbClr val="555555"/>
             </a:solidFill>
@@ -5324,37 +5324,37 @@
       <p:sp>
         <p:nvSpPr>
           <p:cNvPr id="44" name="">
-            <a:extLst xmlns:a="http://schemas.openxmlformats.org/drawingml/2006/main">
+            <a:extLst>
               <a:ext uri="{FF2B5EF4-FFF2-40B4-BE49-F238E27FC236}">
-                <a16:creationId xmlns:a16="http://schemas.microsoft.com/office/drawing/2014/main" id="{D60CA642-B2A0-4870-93B0-EB8C21DE8939}"/>
+                <ns2:creationId id="{D60CA642-B2A0-4870-93B0-EB8C21DE8939}"/>
               </a:ext>
             </a:extLst>
           </p:cNvPr>
           <p:cNvSpPr>
-            <a:spLocks xmlns:a="http://schemas.openxmlformats.org/drawingml/2006/main" noGrp="1"/>
-          </p:cNvSpPr>
-          <p:nvPr/>
-        </p:nvSpPr>
-        <p:spPr>
-          <a:xfrm xmlns:a="http://schemas.openxmlformats.org/drawingml/2006/main">
+            <a:spLocks noGrp="1"/>
+          </p:cNvSpPr>
+          <p:nvPr/>
+        </p:nvSpPr>
+        <p:spPr>
+          <a:xfrm>
             <a:off x="2381250" y="5219700"/>
             <a:ext cx="3219450" cy="247650"/>
           </a:xfrm>
-          <a:prstGeom xmlns:a="http://schemas.openxmlformats.org/drawingml/2006/main" prst="rect">
+          <a:prstGeom prst="rect">
             <a:avLst/>
           </a:prstGeom>
-          <a:noFill xmlns:a="http://schemas.openxmlformats.org/drawingml/2006/main"/>
-          <a:ln xmlns:a="http://schemas.openxmlformats.org/drawingml/2006/main" w="0">
+          <a:noFill/>
+          <a:ln w="0">
             <a:noFill/>
             <a:prstDash val="solid"/>
           </a:ln>
         </p:spPr>
         <p:txBody>
-          <a:bodyPr xmlns:a="http://schemas.openxmlformats.org/drawingml/2006/main" lIns="0" tIns="0" rIns="0" bIns="0" anchor="t">
+          <a:bodyPr lIns="0" tIns="0" rIns="0" bIns="0" anchor="t">
             <a:normAutofit fontScale="100000"/>
           </a:bodyPr>
-          <a:lstStyle xmlns:a="http://schemas.openxmlformats.org/drawingml/2006/main"/>
-          <a:p xmlns:a="http://schemas.openxmlformats.org/drawingml/2006/main">
+          <a:lstStyle/>
+          <a:p>
             <a:pPr algn="ctr">
               <a:lnSpc>
                 <a:spcPct val="112000"/>
@@ -5386,37 +5386,37 @@
       <p:sp>
         <p:nvSpPr>
           <p:cNvPr id="45" name="">
-            <a:extLst xmlns:a="http://schemas.openxmlformats.org/drawingml/2006/main">
+            <a:extLst>
               <a:ext uri="{FF2B5EF4-FFF2-40B4-BE49-F238E27FC236}">
-                <a16:creationId xmlns:a16="http://schemas.microsoft.com/office/drawing/2014/main" id="{0E44F915-19B7-45CD-A428-2937750CEC92}"/>
+                <ns2:creationId id="{0E44F915-19B7-45CD-A428-2937750CEC92}"/>
               </a:ext>
             </a:extLst>
           </p:cNvPr>
           <p:cNvSpPr>
-            <a:spLocks xmlns:a="http://schemas.openxmlformats.org/drawingml/2006/main" noGrp="1"/>
-          </p:cNvSpPr>
-          <p:nvPr/>
-        </p:nvSpPr>
-        <p:spPr>
-          <a:xfrm xmlns:a="http://schemas.openxmlformats.org/drawingml/2006/main">
+            <a:spLocks noGrp="1"/>
+          </p:cNvSpPr>
+          <p:nvPr/>
+        </p:nvSpPr>
+        <p:spPr>
+          <a:xfrm>
             <a:off x="2247900" y="5486400"/>
             <a:ext cx="4476750" cy="342900"/>
           </a:xfrm>
-          <a:prstGeom xmlns:a="http://schemas.openxmlformats.org/drawingml/2006/main" prst="rect">
+          <a:prstGeom prst="rect">
             <a:avLst/>
           </a:prstGeom>
-          <a:noFill xmlns:a="http://schemas.openxmlformats.org/drawingml/2006/main"/>
-          <a:ln xmlns:a="http://schemas.openxmlformats.org/drawingml/2006/main" w="0">
+          <a:noFill/>
+          <a:ln w="0">
             <a:noFill/>
             <a:prstDash val="solid"/>
           </a:ln>
         </p:spPr>
         <p:txBody>
-          <a:bodyPr xmlns:a="http://schemas.openxmlformats.org/drawingml/2006/main" lIns="0" tIns="0" rIns="0" bIns="0" anchor="t">
+          <a:bodyPr lIns="0" tIns="0" rIns="0" bIns="0" anchor="t">
             <a:normAutofit fontScale="90025"/>
           </a:bodyPr>
-          <a:lstStyle xmlns:a="http://schemas.openxmlformats.org/drawingml/2006/main"/>
-          <a:p xmlns:a="http://schemas.openxmlformats.org/drawingml/2006/main">
+          <a:lstStyle/>
+          <a:p>
             <a:pPr algn="ctr">
               <a:lnSpc>
                 <a:spcPct val="112000"/>
@@ -5448,7 +5448,7 @@
     </p:spTree>
     <p:extLst>
       <p:ext uri="{BB962C8B-B14F-4D97-AF65-F5344CB8AC3E}">
-        <p14:creationId xmlns:p14="http://schemas.microsoft.com/office/powerpoint/2010/main" val="1342944255"/>
+        <ns3:creationId val="1342944255"/>
       </p:ext>
     </p:extLst>
   </p:cSld>
@@ -5456,11 +5456,11 @@
 </file>
 
 <file path=ppt/slides/slide3.xml><?xml version="1.0" encoding="utf-8"?>
-<p:sld xmlns:p="http://schemas.openxmlformats.org/presentationml/2006/main">
+<p:sld xmlns:a="http://schemas.openxmlformats.org/drawingml/2006/main" xmlns:ns2="http://schemas.microsoft.com/office/drawing/2014/main" xmlns:ns3="http://schemas.microsoft.com/office/powerpoint/2010/main" xmlns:p="http://schemas.openxmlformats.org/presentationml/2006/main">
   <p:cSld>
     <p:bg>
       <p:bgPr>
-        <a:solidFill xmlns:a="http://schemas.openxmlformats.org/drawingml/2006/main">
+        <a:solidFill>
           <a:srgbClr val="FFFFFF"/>
         </a:solidFill>
       </p:bgPr>
@@ -5472,42 +5472,42 @@
         <p:nvPr/>
       </p:nvGrpSpPr>
       <p:grpSpPr>
-        <a:xfrm xmlns:a="http://schemas.openxmlformats.org/drawingml/2006/main"/>
+        <a:xfrm/>
       </p:grpSpPr>
       <p:sp>
         <p:nvSpPr>
           <p:cNvPr id="1" name="">
-            <a:extLst xmlns:a="http://schemas.openxmlformats.org/drawingml/2006/main">
+            <a:extLst>
               <a:ext uri="{FF2B5EF4-FFF2-40B4-BE49-F238E27FC236}">
-                <a16:creationId xmlns:a16="http://schemas.microsoft.com/office/drawing/2014/main" id="{ED07C2F0-89E9-4E86-BAE3-32FB56D96A65}"/>
+                <ns2:creationId id="{ED07C2F0-89E9-4E86-BAE3-32FB56D96A65}"/>
               </a:ext>
             </a:extLst>
           </p:cNvPr>
           <p:cNvSpPr>
-            <a:spLocks xmlns:a="http://schemas.openxmlformats.org/drawingml/2006/main" noGrp="1"/>
-          </p:cNvSpPr>
-          <p:nvPr/>
-        </p:nvSpPr>
-        <p:spPr>
-          <a:xfrm xmlns:a="http://schemas.openxmlformats.org/drawingml/2006/main">
+            <a:spLocks noGrp="1"/>
+          </p:cNvSpPr>
+          <p:nvPr/>
+        </p:nvSpPr>
+        <p:spPr>
+          <a:xfrm>
             <a:off x="400050" y="285750"/>
             <a:ext cx="4953000" cy="209550"/>
           </a:xfrm>
-          <a:prstGeom xmlns:a="http://schemas.openxmlformats.org/drawingml/2006/main" prst="rect">
+          <a:prstGeom prst="rect">
             <a:avLst/>
           </a:prstGeom>
-          <a:noFill xmlns:a="http://schemas.openxmlformats.org/drawingml/2006/main"/>
-          <a:ln xmlns:a="http://schemas.openxmlformats.org/drawingml/2006/main" w="0">
+          <a:noFill/>
+          <a:ln w="0">
             <a:noFill/>
             <a:prstDash val="solid"/>
           </a:ln>
         </p:spPr>
         <p:txBody>
-          <a:bodyPr xmlns:a="http://schemas.openxmlformats.org/drawingml/2006/main" lIns="0" tIns="0" rIns="0" bIns="0" anchor="t">
+          <a:bodyPr lIns="0" tIns="0" rIns="0" bIns="0" anchor="t">
             <a:normAutofit fontScale="100000"/>
           </a:bodyPr>
-          <a:lstStyle xmlns:a="http://schemas.openxmlformats.org/drawingml/2006/main"/>
-          <a:p xmlns:a="http://schemas.openxmlformats.org/drawingml/2006/main">
+          <a:lstStyle/>
+          <a:p>
             <a:pPr algn="l">
               <a:lnSpc>
                 <a:spcPct val="112000"/>
@@ -5539,37 +5539,37 @@
       <p:sp>
         <p:nvSpPr>
           <p:cNvPr id="2" name="">
-            <a:extLst xmlns:a="http://schemas.openxmlformats.org/drawingml/2006/main">
+            <a:extLst>
               <a:ext uri="{FF2B5EF4-FFF2-40B4-BE49-F238E27FC236}">
-                <a16:creationId xmlns:a16="http://schemas.microsoft.com/office/drawing/2014/main" id="{F09560B8-FA48-41C0-B0DA-49C0860EEE38}"/>
+                <ns2:creationId id="{F09560B8-FA48-41C0-B0DA-49C0860EEE38}"/>
               </a:ext>
             </a:extLst>
           </p:cNvPr>
           <p:cNvSpPr>
-            <a:spLocks xmlns:a="http://schemas.openxmlformats.org/drawingml/2006/main" noGrp="1"/>
-          </p:cNvSpPr>
-          <p:nvPr/>
-        </p:nvSpPr>
-        <p:spPr>
-          <a:xfrm xmlns:a="http://schemas.openxmlformats.org/drawingml/2006/main">
+            <a:spLocks noGrp="1"/>
+          </p:cNvSpPr>
+          <p:nvPr/>
+        </p:nvSpPr>
+        <p:spPr>
+          <a:xfrm>
             <a:off x="400050" y="552450"/>
             <a:ext cx="9810750" cy="495300"/>
           </a:xfrm>
-          <a:prstGeom xmlns:a="http://schemas.openxmlformats.org/drawingml/2006/main" prst="rect">
+          <a:prstGeom prst="rect">
             <a:avLst/>
           </a:prstGeom>
-          <a:noFill xmlns:a="http://schemas.openxmlformats.org/drawingml/2006/main"/>
-          <a:ln xmlns:a="http://schemas.openxmlformats.org/drawingml/2006/main" w="0">
+          <a:noFill/>
+          <a:ln w="0">
             <a:noFill/>
             <a:prstDash val="solid"/>
           </a:ln>
         </p:spPr>
         <p:txBody>
-          <a:bodyPr xmlns:a="http://schemas.openxmlformats.org/drawingml/2006/main" lIns="0" tIns="0" rIns="0" bIns="0" anchor="t">
+          <a:bodyPr lIns="0" tIns="0" rIns="0" bIns="0" anchor="t">
             <a:normAutofit fontScale="89978"/>
           </a:bodyPr>
-          <a:lstStyle xmlns:a="http://schemas.openxmlformats.org/drawingml/2006/main"/>
-          <a:p xmlns:a="http://schemas.openxmlformats.org/drawingml/2006/main">
+          <a:lstStyle/>
+          <a:p>
             <a:pPr algn="l">
               <a:lnSpc>
                 <a:spcPct val="112000"/>
@@ -5601,37 +5601,37 @@
       <p:sp>
         <p:nvSpPr>
           <p:cNvPr id="3" name="">
-            <a:extLst xmlns:a="http://schemas.openxmlformats.org/drawingml/2006/main">
+            <a:extLst>
               <a:ext uri="{FF2B5EF4-FFF2-40B4-BE49-F238E27FC236}">
-                <a16:creationId xmlns:a16="http://schemas.microsoft.com/office/drawing/2014/main" id="{00E48122-072B-40AD-BB3C-B79FFCA1BA34}"/>
+                <ns2:creationId id="{00E48122-072B-40AD-BB3C-B79FFCA1BA34}"/>
               </a:ext>
             </a:extLst>
           </p:cNvPr>
           <p:cNvSpPr>
-            <a:spLocks xmlns:a="http://schemas.openxmlformats.org/drawingml/2006/main" noGrp="1"/>
-          </p:cNvSpPr>
-          <p:nvPr/>
-        </p:nvSpPr>
-        <p:spPr>
-          <a:xfrm xmlns:a="http://schemas.openxmlformats.org/drawingml/2006/main">
+            <a:spLocks noGrp="1"/>
+          </p:cNvSpPr>
+          <p:nvPr/>
+        </p:nvSpPr>
+        <p:spPr>
+          <a:xfrm>
             <a:off x="419100" y="1076325"/>
             <a:ext cx="9334500" cy="323850"/>
           </a:xfrm>
-          <a:prstGeom xmlns:a="http://schemas.openxmlformats.org/drawingml/2006/main" prst="rect">
+          <a:prstGeom prst="rect">
             <a:avLst/>
           </a:prstGeom>
-          <a:noFill xmlns:a="http://schemas.openxmlformats.org/drawingml/2006/main"/>
-          <a:ln xmlns:a="http://schemas.openxmlformats.org/drawingml/2006/main" w="0">
+          <a:noFill/>
+          <a:ln w="0">
             <a:noFill/>
             <a:prstDash val="solid"/>
           </a:ln>
         </p:spPr>
         <p:txBody>
-          <a:bodyPr xmlns:a="http://schemas.openxmlformats.org/drawingml/2006/main" lIns="0" tIns="0" rIns="0" bIns="0" anchor="t">
+          <a:bodyPr lIns="0" tIns="0" rIns="0" bIns="0" anchor="t">
             <a:normAutofit fontScale="100000"/>
           </a:bodyPr>
-          <a:lstStyle xmlns:a="http://schemas.openxmlformats.org/drawingml/2006/main"/>
-          <a:p xmlns:a="http://schemas.openxmlformats.org/drawingml/2006/main">
+          <a:lstStyle/>
+          <a:p>
             <a:pPr algn="l">
               <a:lnSpc>
                 <a:spcPct val="108000"/>
@@ -5663,27 +5663,27 @@
       <p:sp>
         <p:nvSpPr>
           <p:cNvPr id="4" name="">
-            <a:extLst xmlns:a="http://schemas.openxmlformats.org/drawingml/2006/main">
+            <a:extLst>
               <a:ext uri="{FF2B5EF4-FFF2-40B4-BE49-F238E27FC236}">
-                <a16:creationId xmlns:a16="http://schemas.microsoft.com/office/drawing/2014/main" id="{B1F420B5-6C8F-4A03-A328-DEEE2CE41EF1}"/>
+                <ns2:creationId id="{B1F420B5-6C8F-4A03-A328-DEEE2CE41EF1}"/>
               </a:ext>
             </a:extLst>
           </p:cNvPr>
           <p:cNvSpPr>
-            <a:spLocks xmlns:a="http://schemas.openxmlformats.org/drawingml/2006/main" noGrp="1"/>
-          </p:cNvSpPr>
-          <p:nvPr/>
-        </p:nvSpPr>
-        <p:spPr>
-          <a:xfrm xmlns:a="http://schemas.openxmlformats.org/drawingml/2006/main">
+            <a:spLocks noGrp="1"/>
+          </p:cNvSpPr>
+          <p:nvPr/>
+        </p:nvSpPr>
+        <p:spPr>
+          <a:xfrm>
             <a:off x="400050" y="1447800"/>
             <a:ext cx="11391900" cy="0"/>
           </a:xfrm>
-          <a:prstGeom xmlns:a="http://schemas.openxmlformats.org/drawingml/2006/main" prst="line">
+          <a:prstGeom prst="line">
             <a:avLst/>
           </a:prstGeom>
-          <a:noFill xmlns:a="http://schemas.openxmlformats.org/drawingml/2006/main"/>
-          <a:ln xmlns:a="http://schemas.openxmlformats.org/drawingml/2006/main" w="9525">
+          <a:noFill/>
+          <a:ln w="9525">
             <a:solidFill>
               <a:srgbClr val="B8BCC4"/>
             </a:solidFill>
@@ -5694,37 +5694,37 @@
       <p:sp>
         <p:nvSpPr>
           <p:cNvPr id="5" name="">
-            <a:extLst xmlns:a="http://schemas.openxmlformats.org/drawingml/2006/main">
+            <a:extLst>
               <a:ext uri="{FF2B5EF4-FFF2-40B4-BE49-F238E27FC236}">
-                <a16:creationId xmlns:a16="http://schemas.microsoft.com/office/drawing/2014/main" id="{2F09FA25-8B4B-4BB6-B0A4-70001949933D}"/>
+                <ns2:creationId id="{2F09FA25-8B4B-4BB6-B0A4-70001949933D}"/>
               </a:ext>
             </a:extLst>
           </p:cNvPr>
           <p:cNvSpPr>
-            <a:spLocks xmlns:a="http://schemas.openxmlformats.org/drawingml/2006/main" noGrp="1"/>
-          </p:cNvSpPr>
-          <p:nvPr/>
-        </p:nvSpPr>
-        <p:spPr>
-          <a:xfrm xmlns:a="http://schemas.openxmlformats.org/drawingml/2006/main">
+            <a:spLocks noGrp="1"/>
+          </p:cNvSpPr>
+          <p:nvPr/>
+        </p:nvSpPr>
+        <p:spPr>
+          <a:xfrm>
             <a:off x="11277600" y="6324600"/>
             <a:ext cx="514350" cy="228600"/>
           </a:xfrm>
-          <a:prstGeom xmlns:a="http://schemas.openxmlformats.org/drawingml/2006/main" prst="rect">
+          <a:prstGeom prst="rect">
             <a:avLst/>
           </a:prstGeom>
-          <a:noFill xmlns:a="http://schemas.openxmlformats.org/drawingml/2006/main"/>
-          <a:ln xmlns:a="http://schemas.openxmlformats.org/drawingml/2006/main" w="0">
+          <a:noFill/>
+          <a:ln w="0">
             <a:noFill/>
             <a:prstDash val="solid"/>
           </a:ln>
         </p:spPr>
         <p:txBody>
-          <a:bodyPr xmlns:a="http://schemas.openxmlformats.org/drawingml/2006/main" lIns="0" tIns="0" rIns="0" bIns="0" anchor="t">
+          <a:bodyPr lIns="0" tIns="0" rIns="0" bIns="0" anchor="t">
             <a:normAutofit fontScale="100000"/>
           </a:bodyPr>
-          <a:lstStyle xmlns:a="http://schemas.openxmlformats.org/drawingml/2006/main"/>
-          <a:p xmlns:a="http://schemas.openxmlformats.org/drawingml/2006/main">
+          <a:lstStyle/>
+          <a:p>
             <a:pPr algn="r">
               <a:lnSpc>
                 <a:spcPct val="112000"/>
@@ -5756,27 +5756,27 @@
       <p:sp>
         <p:nvSpPr>
           <p:cNvPr id="6" name="on-device-trust-boundary">
-            <a:extLst xmlns:a="http://schemas.openxmlformats.org/drawingml/2006/main">
+            <a:extLst>
               <a:ext uri="{FF2B5EF4-FFF2-40B4-BE49-F238E27FC236}">
-                <a16:creationId xmlns:a16="http://schemas.microsoft.com/office/drawing/2014/main" id="{79980F01-009C-42D3-A777-68EA50808DA4}"/>
+                <ns2:creationId id="{79980F01-009C-42D3-A777-68EA50808DA4}"/>
               </a:ext>
             </a:extLst>
           </p:cNvPr>
           <p:cNvSpPr>
-            <a:spLocks xmlns:a="http://schemas.openxmlformats.org/drawingml/2006/main" noGrp="1"/>
-          </p:cNvSpPr>
-          <p:nvPr/>
-        </p:nvSpPr>
-        <p:spPr>
-          <a:xfrm xmlns:a="http://schemas.openxmlformats.org/drawingml/2006/main">
+            <a:spLocks noGrp="1"/>
+          </p:cNvSpPr>
+          <p:nvPr/>
+        </p:nvSpPr>
+        <p:spPr>
+          <a:xfrm>
             <a:off x="400050" y="1657350"/>
             <a:ext cx="9563100" cy="4476750"/>
           </a:xfrm>
-          <a:prstGeom xmlns:a="http://schemas.openxmlformats.org/drawingml/2006/main" prst="rect">
+          <a:prstGeom prst="rect">
             <a:avLst/>
           </a:prstGeom>
-          <a:noFill xmlns:a="http://schemas.openxmlformats.org/drawingml/2006/main"/>
-          <a:ln xmlns:a="http://schemas.openxmlformats.org/drawingml/2006/main" w="13335">
+          <a:noFill/>
+          <a:ln w="13335">
             <a:solidFill>
               <a:srgbClr val="D98282"/>
             </a:solidFill>
@@ -5787,37 +5787,37 @@
       <p:sp>
         <p:nvSpPr>
           <p:cNvPr id="7" name="">
-            <a:extLst xmlns:a="http://schemas.openxmlformats.org/drawingml/2006/main">
+            <a:extLst>
               <a:ext uri="{FF2B5EF4-FFF2-40B4-BE49-F238E27FC236}">
-                <a16:creationId xmlns:a16="http://schemas.microsoft.com/office/drawing/2014/main" id="{CE5A8D8D-9713-4EFB-BF00-AFBDB619FD7E}"/>
+                <ns2:creationId id="{CE5A8D8D-9713-4EFB-BF00-AFBDB619FD7E}"/>
               </a:ext>
             </a:extLst>
           </p:cNvPr>
           <p:cNvSpPr>
-            <a:spLocks xmlns:a="http://schemas.openxmlformats.org/drawingml/2006/main" noGrp="1"/>
-          </p:cNvSpPr>
-          <p:nvPr/>
-        </p:nvSpPr>
-        <p:spPr>
-          <a:xfrm xmlns:a="http://schemas.openxmlformats.org/drawingml/2006/main">
+            <a:spLocks noGrp="1"/>
+          </p:cNvSpPr>
+          <p:nvPr/>
+        </p:nvSpPr>
+        <p:spPr>
+          <a:xfrm>
             <a:off x="514350" y="1733550"/>
             <a:ext cx="9334500" cy="266700"/>
           </a:xfrm>
-          <a:prstGeom xmlns:a="http://schemas.openxmlformats.org/drawingml/2006/main" prst="rect">
+          <a:prstGeom prst="rect">
             <a:avLst/>
           </a:prstGeom>
-          <a:noFill xmlns:a="http://schemas.openxmlformats.org/drawingml/2006/main"/>
-          <a:ln xmlns:a="http://schemas.openxmlformats.org/drawingml/2006/main" w="0">
+          <a:noFill/>
+          <a:ln w="0">
             <a:noFill/>
             <a:prstDash val="solid"/>
           </a:ln>
         </p:spPr>
         <p:txBody>
-          <a:bodyPr xmlns:a="http://schemas.openxmlformats.org/drawingml/2006/main" lIns="0" tIns="0" rIns="0" bIns="0" anchor="t">
+          <a:bodyPr lIns="0" tIns="0" rIns="0" bIns="0" anchor="t">
             <a:normAutofit fontScale="100000"/>
           </a:bodyPr>
-          <a:lstStyle xmlns:a="http://schemas.openxmlformats.org/drawingml/2006/main"/>
-          <a:p xmlns:a="http://schemas.openxmlformats.org/drawingml/2006/main">
+          <a:lstStyle/>
+          <a:p>
             <a:pPr algn="ctr">
               <a:lnSpc>
                 <a:spcPct val="112000"/>
@@ -5849,37 +5849,37 @@
       <p:sp>
         <p:nvSpPr>
           <p:cNvPr id="8" name="">
-            <a:extLst xmlns:a="http://schemas.openxmlformats.org/drawingml/2006/main">
+            <a:extLst>
               <a:ext uri="{FF2B5EF4-FFF2-40B4-BE49-F238E27FC236}">
-                <a16:creationId xmlns:a16="http://schemas.microsoft.com/office/drawing/2014/main" id="{F67DF564-AF1E-46C8-A134-B2E6078ED308}"/>
+                <ns2:creationId id="{F67DF564-AF1E-46C8-A134-B2E6078ED308}"/>
               </a:ext>
             </a:extLst>
           </p:cNvPr>
           <p:cNvSpPr>
-            <a:spLocks xmlns:a="http://schemas.openxmlformats.org/drawingml/2006/main" noGrp="1"/>
-          </p:cNvSpPr>
-          <p:nvPr/>
-        </p:nvSpPr>
-        <p:spPr>
-          <a:xfrm xmlns:a="http://schemas.openxmlformats.org/drawingml/2006/main">
+            <a:spLocks noGrp="1"/>
+          </p:cNvSpPr>
+          <p:nvPr/>
+        </p:nvSpPr>
+        <p:spPr>
+          <a:xfrm>
             <a:off x="10325100" y="1695450"/>
             <a:ext cx="1143000" cy="228600"/>
           </a:xfrm>
-          <a:prstGeom xmlns:a="http://schemas.openxmlformats.org/drawingml/2006/main" prst="rect">
+          <a:prstGeom prst="rect">
             <a:avLst/>
           </a:prstGeom>
-          <a:noFill xmlns:a="http://schemas.openxmlformats.org/drawingml/2006/main"/>
-          <a:ln xmlns:a="http://schemas.openxmlformats.org/drawingml/2006/main" w="0">
+          <a:noFill/>
+          <a:ln w="0">
             <a:noFill/>
             <a:prstDash val="solid"/>
           </a:ln>
         </p:spPr>
         <p:txBody>
-          <a:bodyPr xmlns:a="http://schemas.openxmlformats.org/drawingml/2006/main" lIns="0" tIns="0" rIns="0" bIns="0" anchor="t">
+          <a:bodyPr lIns="0" tIns="0" rIns="0" bIns="0" anchor="t">
             <a:normAutofit fontScale="100000"/>
           </a:bodyPr>
-          <a:lstStyle xmlns:a="http://schemas.openxmlformats.org/drawingml/2006/main"/>
-          <a:p xmlns:a="http://schemas.openxmlformats.org/drawingml/2006/main">
+          <a:lstStyle/>
+          <a:p>
             <a:pPr algn="ctr">
               <a:lnSpc>
                 <a:spcPct val="112000"/>
@@ -5911,31 +5911,31 @@
       <p:sp>
         <p:nvSpPr>
           <p:cNvPr id="9" name="">
-            <a:extLst xmlns:a="http://schemas.openxmlformats.org/drawingml/2006/main">
+            <a:extLst>
               <a:ext uri="{FF2B5EF4-FFF2-40B4-BE49-F238E27FC236}">
-                <a16:creationId xmlns:a16="http://schemas.microsoft.com/office/drawing/2014/main" id="{420FB643-C148-48BA-BDC2-BC3ECAF5C803}"/>
+                <ns2:creationId id="{420FB643-C148-48BA-BDC2-BC3ECAF5C803}"/>
               </a:ext>
             </a:extLst>
           </p:cNvPr>
           <p:cNvSpPr>
-            <a:spLocks xmlns:a="http://schemas.openxmlformats.org/drawingml/2006/main" noGrp="1"/>
-          </p:cNvSpPr>
-          <p:nvPr/>
-        </p:nvSpPr>
-        <p:spPr>
-          <a:xfrm xmlns:a="http://schemas.openxmlformats.org/drawingml/2006/main">
+            <a:spLocks noGrp="1"/>
+          </p:cNvSpPr>
+          <p:nvPr/>
+        </p:nvSpPr>
+        <p:spPr>
+          <a:xfrm>
             <a:off x="2438400" y="1952625"/>
             <a:ext cx="4953000" cy="514350"/>
           </a:xfrm>
-          <a:prstGeom xmlns:a="http://schemas.openxmlformats.org/drawingml/2006/main" prst="roundRect">
+          <a:prstGeom prst="roundRect">
             <a:avLst>
               <a:gd name="adj" fmla="val 0"/>
             </a:avLst>
           </a:prstGeom>
-          <a:solidFill xmlns:a="http://schemas.openxmlformats.org/drawingml/2006/main">
+          <a:solidFill>
             <a:srgbClr val="EDEDED"/>
           </a:solidFill>
-          <a:ln xmlns:a="http://schemas.openxmlformats.org/drawingml/2006/main" w="11430">
+          <a:ln w="11430">
             <a:solidFill>
               <a:srgbClr val="B8BCC4"/>
             </a:solidFill>
@@ -5943,11 +5943,11 @@
           </a:ln>
         </p:spPr>
         <p:txBody>
-          <a:bodyPr xmlns:a="http://schemas.openxmlformats.org/drawingml/2006/main" lIns="114300" tIns="76200" rIns="114300" bIns="76200" anchor="ctr">
+          <a:bodyPr lIns="114300" tIns="76200" rIns="114300" bIns="76200" anchor="ctr">
             <a:normAutofit fontScale="78616"/>
           </a:bodyPr>
-          <a:lstStyle xmlns:a="http://schemas.openxmlformats.org/drawingml/2006/main"/>
-          <a:p xmlns:a="http://schemas.openxmlformats.org/drawingml/2006/main">
+          <a:lstStyle/>
+          <a:p>
             <a:pPr algn="ctr">
               <a:lnSpc>
                 <a:spcPct val="106000"/>
@@ -5974,7 +5974,7 @@
               <a:t>Core SDK / Schema Registry</a:t>
             </a:r>
           </a:p>
-          <a:p xmlns:a="http://schemas.openxmlformats.org/drawingml/2006/main">
+          <a:p>
             <a:pPr algn="ctr">
               <a:lnSpc>
                 <a:spcPct val="106000"/>
@@ -6006,31 +6006,31 @@
       <p:sp>
         <p:nvSpPr>
           <p:cNvPr id="10" name="">
-            <a:extLst xmlns:a="http://schemas.openxmlformats.org/drawingml/2006/main">
+            <a:extLst>
               <a:ext uri="{FF2B5EF4-FFF2-40B4-BE49-F238E27FC236}">
-                <a16:creationId xmlns:a16="http://schemas.microsoft.com/office/drawing/2014/main" id="{DAD50144-C3BC-47BE-A1FA-EDD8B93395CC}"/>
+                <ns2:creationId id="{DAD50144-C3BC-47BE-A1FA-EDD8B93395CC}"/>
               </a:ext>
             </a:extLst>
           </p:cNvPr>
           <p:cNvSpPr>
-            <a:spLocks xmlns:a="http://schemas.openxmlformats.org/drawingml/2006/main" noGrp="1"/>
-          </p:cNvSpPr>
-          <p:nvPr/>
-        </p:nvSpPr>
-        <p:spPr>
-          <a:xfrm xmlns:a="http://schemas.openxmlformats.org/drawingml/2006/main">
+            <a:spLocks noGrp="1"/>
+          </p:cNvSpPr>
+          <p:nvPr/>
+        </p:nvSpPr>
+        <p:spPr>
+          <a:xfrm>
             <a:off x="628650" y="2705100"/>
             <a:ext cx="1104900" cy="495300"/>
           </a:xfrm>
-          <a:prstGeom xmlns:a="http://schemas.openxmlformats.org/drawingml/2006/main" prst="roundRect">
+          <a:prstGeom prst="roundRect">
             <a:avLst>
               <a:gd name="adj" fmla="val 13462"/>
             </a:avLst>
           </a:prstGeom>
-          <a:solidFill xmlns:a="http://schemas.openxmlformats.org/drawingml/2006/main">
+          <a:solidFill>
             <a:srgbClr val="E6EEF8"/>
           </a:solidFill>
-          <a:ln xmlns:a="http://schemas.openxmlformats.org/drawingml/2006/main" w="11430">
+          <a:ln w="11430">
             <a:solidFill>
               <a:srgbClr val="426A9A"/>
             </a:solidFill>
@@ -6038,11 +6038,11 @@
           </a:ln>
         </p:spPr>
         <p:txBody>
-          <a:bodyPr xmlns:a="http://schemas.openxmlformats.org/drawingml/2006/main" lIns="76200" tIns="57150" rIns="76200" bIns="57150" anchor="ctr">
+          <a:bodyPr lIns="76200" tIns="57150" rIns="76200" bIns="57150" anchor="ctr">
             <a:normAutofit fontScale="100000"/>
           </a:bodyPr>
-          <a:lstStyle xmlns:a="http://schemas.openxmlformats.org/drawingml/2006/main"/>
-          <a:p xmlns:a="http://schemas.openxmlformats.org/drawingml/2006/main">
+          <a:lstStyle/>
+          <a:p>
             <a:pPr algn="ctr">
               <a:lnSpc>
                 <a:spcPct val="105000"/>
@@ -6074,31 +6074,31 @@
       <p:sp>
         <p:nvSpPr>
           <p:cNvPr id="11" name="">
-            <a:extLst xmlns:a="http://schemas.openxmlformats.org/drawingml/2006/main">
+            <a:extLst>
               <a:ext uri="{FF2B5EF4-FFF2-40B4-BE49-F238E27FC236}">
-                <a16:creationId xmlns:a16="http://schemas.microsoft.com/office/drawing/2014/main" id="{CA866356-8538-46E9-8125-BBFE691AE14B}"/>
+                <ns2:creationId id="{CA866356-8538-46E9-8125-BBFE691AE14B}"/>
               </a:ext>
             </a:extLst>
           </p:cNvPr>
           <p:cNvSpPr>
-            <a:spLocks xmlns:a="http://schemas.openxmlformats.org/drawingml/2006/main" noGrp="1"/>
-          </p:cNvSpPr>
-          <p:nvPr/>
-        </p:nvSpPr>
-        <p:spPr>
-          <a:xfrm xmlns:a="http://schemas.openxmlformats.org/drawingml/2006/main">
+            <a:spLocks noGrp="1"/>
+          </p:cNvSpPr>
+          <p:nvPr/>
+        </p:nvSpPr>
+        <p:spPr>
+          <a:xfrm>
             <a:off x="628650" y="3733800"/>
             <a:ext cx="1104900" cy="495300"/>
           </a:xfrm>
-          <a:prstGeom xmlns:a="http://schemas.openxmlformats.org/drawingml/2006/main" prst="roundRect">
+          <a:prstGeom prst="roundRect">
             <a:avLst>
               <a:gd name="adj" fmla="val 13462"/>
             </a:avLst>
           </a:prstGeom>
-          <a:solidFill xmlns:a="http://schemas.openxmlformats.org/drawingml/2006/main">
+          <a:solidFill>
             <a:srgbClr val="F6F6F6"/>
           </a:solidFill>
-          <a:ln xmlns:a="http://schemas.openxmlformats.org/drawingml/2006/main" w="11430">
+          <a:ln w="11430">
             <a:solidFill>
               <a:srgbClr val="B8BCC4"/>
             </a:solidFill>
@@ -6106,11 +6106,11 @@
           </a:ln>
         </p:spPr>
         <p:txBody>
-          <a:bodyPr xmlns:a="http://schemas.openxmlformats.org/drawingml/2006/main" lIns="76200" tIns="57150" rIns="76200" bIns="57150" anchor="ctr">
+          <a:bodyPr lIns="76200" tIns="57150" rIns="76200" bIns="57150" anchor="ctr">
             <a:normAutofit fontScale="100000"/>
           </a:bodyPr>
-          <a:lstStyle xmlns:a="http://schemas.openxmlformats.org/drawingml/2006/main"/>
-          <a:p xmlns:a="http://schemas.openxmlformats.org/drawingml/2006/main">
+          <a:lstStyle/>
+          <a:p>
             <a:pPr algn="ctr">
               <a:lnSpc>
                 <a:spcPct val="105000"/>
@@ -6142,31 +6142,31 @@
       <p:sp>
         <p:nvSpPr>
           <p:cNvPr id="12" name="">
-            <a:extLst xmlns:a="http://schemas.openxmlformats.org/drawingml/2006/main">
+            <a:extLst>
               <a:ext uri="{FF2B5EF4-FFF2-40B4-BE49-F238E27FC236}">
-                <a16:creationId xmlns:a16="http://schemas.microsoft.com/office/drawing/2014/main" id="{399CE44E-FD3F-4350-B70A-4500BA2A71C9}"/>
+                <ns2:creationId id="{399CE44E-FD3F-4350-B70A-4500BA2A71C9}"/>
               </a:ext>
             </a:extLst>
           </p:cNvPr>
           <p:cNvSpPr>
-            <a:spLocks xmlns:a="http://schemas.openxmlformats.org/drawingml/2006/main" noGrp="1"/>
-          </p:cNvSpPr>
-          <p:nvPr/>
-        </p:nvSpPr>
-        <p:spPr>
-          <a:xfrm xmlns:a="http://schemas.openxmlformats.org/drawingml/2006/main">
+            <a:spLocks noGrp="1"/>
+          </p:cNvSpPr>
+          <p:nvPr/>
+        </p:nvSpPr>
+        <p:spPr>
+          <a:xfrm>
             <a:off x="628650" y="4762500"/>
             <a:ext cx="1104900" cy="495300"/>
           </a:xfrm>
-          <a:prstGeom xmlns:a="http://schemas.openxmlformats.org/drawingml/2006/main" prst="roundRect">
+          <a:prstGeom prst="roundRect">
             <a:avLst>
               <a:gd name="adj" fmla="val 13462"/>
             </a:avLst>
           </a:prstGeom>
-          <a:solidFill xmlns:a="http://schemas.openxmlformats.org/drawingml/2006/main">
+          <a:solidFill>
             <a:srgbClr val="E6EEF8"/>
           </a:solidFill>
-          <a:ln xmlns:a="http://schemas.openxmlformats.org/drawingml/2006/main" w="11430">
+          <a:ln w="11430">
             <a:solidFill>
               <a:srgbClr val="426A9A"/>
             </a:solidFill>
@@ -6174,11 +6174,11 @@
           </a:ln>
         </p:spPr>
         <p:txBody>
-          <a:bodyPr xmlns:a="http://schemas.openxmlformats.org/drawingml/2006/main" lIns="76200" tIns="57150" rIns="76200" bIns="57150" anchor="ctr">
+          <a:bodyPr lIns="76200" tIns="57150" rIns="76200" bIns="57150" anchor="ctr">
             <a:normAutofit fontScale="89036"/>
           </a:bodyPr>
-          <a:lstStyle xmlns:a="http://schemas.openxmlformats.org/drawingml/2006/main"/>
-          <a:p xmlns:a="http://schemas.openxmlformats.org/drawingml/2006/main">
+          <a:lstStyle/>
+          <a:p>
             <a:pPr algn="ctr">
               <a:lnSpc>
                 <a:spcPct val="105000"/>
@@ -6205,7 +6205,7 @@
               <a:t>Sub-Agent</a:t>
             </a:r>
           </a:p>
-          <a:p xmlns:a="http://schemas.openxmlformats.org/drawingml/2006/main">
+          <a:p>
             <a:pPr algn="ctr">
               <a:lnSpc>
                 <a:spcPct val="105000"/>
@@ -6237,27 +6237,27 @@
       <p:sp>
         <p:nvSpPr>
           <p:cNvPr id="13" name="">
-            <a:extLst xmlns:a="http://schemas.openxmlformats.org/drawingml/2006/main">
+            <a:extLst>
               <a:ext uri="{FF2B5EF4-FFF2-40B4-BE49-F238E27FC236}">
-                <a16:creationId xmlns:a16="http://schemas.microsoft.com/office/drawing/2014/main" id="{F8CBCFEB-0B4E-44EA-B2B5-C9BB1A51DC7C}"/>
+                <ns2:creationId id="{F8CBCFEB-0B4E-44EA-B2B5-C9BB1A51DC7C}"/>
               </a:ext>
             </a:extLst>
           </p:cNvPr>
           <p:cNvSpPr>
-            <a:spLocks xmlns:a="http://schemas.openxmlformats.org/drawingml/2006/main" noGrp="1"/>
-          </p:cNvSpPr>
-          <p:nvPr/>
-        </p:nvSpPr>
-        <p:spPr>
-          <a:xfrm xmlns:a="http://schemas.openxmlformats.org/drawingml/2006/main">
+            <a:spLocks noGrp="1"/>
+          </p:cNvSpPr>
+          <p:nvPr/>
+        </p:nvSpPr>
+        <p:spPr>
+          <a:xfrm>
             <a:off x="2209800" y="2476500"/>
             <a:ext cx="2400300" cy="742950"/>
           </a:xfrm>
-          <a:prstGeom xmlns:a="http://schemas.openxmlformats.org/drawingml/2006/main" prst="rect">
+          <a:prstGeom prst="rect">
             <a:avLst/>
           </a:prstGeom>
-          <a:noFill xmlns:a="http://schemas.openxmlformats.org/drawingml/2006/main"/>
-          <a:ln xmlns:a="http://schemas.openxmlformats.org/drawingml/2006/main" w="11430">
+          <a:noFill/>
+          <a:ln w="11430">
             <a:solidFill>
               <a:srgbClr val="4D7C2F"/>
             </a:solidFill>
@@ -6268,31 +6268,31 @@
       <p:sp>
         <p:nvSpPr>
           <p:cNvPr id="14" name="">
-            <a:extLst xmlns:a="http://schemas.openxmlformats.org/drawingml/2006/main">
+            <a:extLst>
               <a:ext uri="{FF2B5EF4-FFF2-40B4-BE49-F238E27FC236}">
-                <a16:creationId xmlns:a16="http://schemas.microsoft.com/office/drawing/2014/main" id="{226B869D-DFD8-4F62-B155-ADB48CAB5562}"/>
+                <ns2:creationId id="{226B869D-DFD8-4F62-B155-ADB48CAB5562}"/>
               </a:ext>
             </a:extLst>
           </p:cNvPr>
           <p:cNvSpPr>
-            <a:spLocks xmlns:a="http://schemas.openxmlformats.org/drawingml/2006/main" noGrp="1"/>
-          </p:cNvSpPr>
-          <p:nvPr/>
-        </p:nvSpPr>
-        <p:spPr>
-          <a:xfrm xmlns:a="http://schemas.openxmlformats.org/drawingml/2006/main">
+            <a:spLocks noGrp="1"/>
+          </p:cNvSpPr>
+          <p:nvPr/>
+        </p:nvSpPr>
+        <p:spPr>
+          <a:xfrm>
             <a:off x="2209800" y="2476500"/>
             <a:ext cx="2400300" cy="266700"/>
           </a:xfrm>
-          <a:prstGeom xmlns:a="http://schemas.openxmlformats.org/drawingml/2006/main" prst="roundRect">
+          <a:prstGeom prst="roundRect">
             <a:avLst>
               <a:gd name="adj" fmla="val 0"/>
             </a:avLst>
           </a:prstGeom>
-          <a:solidFill xmlns:a="http://schemas.openxmlformats.org/drawingml/2006/main">
+          <a:solidFill>
             <a:srgbClr val="E4F0DD"/>
           </a:solidFill>
-          <a:ln xmlns:a="http://schemas.openxmlformats.org/drawingml/2006/main" w="11430">
+          <a:ln w="11430">
             <a:solidFill>
               <a:srgbClr val="4D7C2F"/>
             </a:solidFill>
@@ -6300,11 +6300,11 @@
           </a:ln>
         </p:spPr>
         <p:txBody>
-          <a:bodyPr xmlns:a="http://schemas.openxmlformats.org/drawingml/2006/main" lIns="114300" tIns="76200" rIns="114300" bIns="76200" anchor="ctr">
+          <a:bodyPr lIns="114300" tIns="76200" rIns="114300" bIns="76200" anchor="ctr">
             <a:normAutofit fontScale="58962"/>
           </a:bodyPr>
-          <a:lstStyle xmlns:a="http://schemas.openxmlformats.org/drawingml/2006/main"/>
-          <a:p xmlns:a="http://schemas.openxmlformats.org/drawingml/2006/main">
+          <a:lstStyle/>
+          <a:p>
             <a:pPr algn="ctr">
               <a:lnSpc>
                 <a:spcPct val="106000"/>
@@ -6336,31 +6336,31 @@
       <p:sp>
         <p:nvSpPr>
           <p:cNvPr id="15" name="">
-            <a:extLst xmlns:a="http://schemas.openxmlformats.org/drawingml/2006/main">
+            <a:extLst>
               <a:ext uri="{FF2B5EF4-FFF2-40B4-BE49-F238E27FC236}">
-                <a16:creationId xmlns:a16="http://schemas.microsoft.com/office/drawing/2014/main" id="{B015A3DB-D978-4546-AD55-8CC8158655E1}"/>
+                <ns2:creationId id="{B015A3DB-D978-4546-AD55-8CC8158655E1}"/>
               </a:ext>
             </a:extLst>
           </p:cNvPr>
           <p:cNvSpPr>
-            <a:spLocks xmlns:a="http://schemas.openxmlformats.org/drawingml/2006/main" noGrp="1"/>
-          </p:cNvSpPr>
-          <p:nvPr/>
-        </p:nvSpPr>
-        <p:spPr>
-          <a:xfrm xmlns:a="http://schemas.openxmlformats.org/drawingml/2006/main">
+            <a:spLocks noGrp="1"/>
+          </p:cNvSpPr>
+          <p:nvPr/>
+        </p:nvSpPr>
+        <p:spPr>
+          <a:xfrm>
             <a:off x="2362200" y="2857500"/>
             <a:ext cx="876300" cy="247650"/>
           </a:xfrm>
-          <a:prstGeom xmlns:a="http://schemas.openxmlformats.org/drawingml/2006/main" prst="roundRect">
+          <a:prstGeom prst="roundRect">
             <a:avLst>
               <a:gd name="adj" fmla="val 26923"/>
             </a:avLst>
           </a:prstGeom>
-          <a:solidFill xmlns:a="http://schemas.openxmlformats.org/drawingml/2006/main">
+          <a:solidFill>
             <a:srgbClr val="EAF2E4"/>
           </a:solidFill>
-          <a:ln xmlns:a="http://schemas.openxmlformats.org/drawingml/2006/main" w="11430">
+          <a:ln w="11430">
             <a:solidFill>
               <a:srgbClr val="4D7C2F"/>
             </a:solidFill>
@@ -6368,11 +6368,11 @@
           </a:ln>
         </p:spPr>
         <p:txBody>
-          <a:bodyPr xmlns:a="http://schemas.openxmlformats.org/drawingml/2006/main" lIns="38100" tIns="19050" rIns="38100" bIns="19050" anchor="ctr">
+          <a:bodyPr lIns="38100" tIns="19050" rIns="38100" bIns="19050" anchor="ctr">
             <a:normAutofit fontScale="88787"/>
           </a:bodyPr>
-          <a:lstStyle xmlns:a="http://schemas.openxmlformats.org/drawingml/2006/main"/>
-          <a:p xmlns:a="http://schemas.openxmlformats.org/drawingml/2006/main">
+          <a:lstStyle/>
+          <a:p>
             <a:pPr algn="ctr">
               <a:lnSpc>
                 <a:spcPct val="105000"/>
@@ -6404,31 +6404,31 @@
       <p:sp>
         <p:nvSpPr>
           <p:cNvPr id="16" name="">
-            <a:extLst xmlns:a="http://schemas.openxmlformats.org/drawingml/2006/main">
+            <a:extLst>
               <a:ext uri="{FF2B5EF4-FFF2-40B4-BE49-F238E27FC236}">
-                <a16:creationId xmlns:a16="http://schemas.microsoft.com/office/drawing/2014/main" id="{C7261A99-C75F-40BA-894F-585CF0C24B23}"/>
+                <ns2:creationId id="{C7261A99-C75F-40BA-894F-585CF0C24B23}"/>
               </a:ext>
             </a:extLst>
           </p:cNvPr>
           <p:cNvSpPr>
-            <a:spLocks xmlns:a="http://schemas.openxmlformats.org/drawingml/2006/main" noGrp="1"/>
-          </p:cNvSpPr>
-          <p:nvPr/>
-        </p:nvSpPr>
-        <p:spPr>
-          <a:xfrm xmlns:a="http://schemas.openxmlformats.org/drawingml/2006/main">
+            <a:spLocks noGrp="1"/>
+          </p:cNvSpPr>
+          <p:nvPr/>
+        </p:nvSpPr>
+        <p:spPr>
+          <a:xfrm>
             <a:off x="3371850" y="2857500"/>
             <a:ext cx="1066800" cy="247650"/>
           </a:xfrm>
-          <a:prstGeom xmlns:a="http://schemas.openxmlformats.org/drawingml/2006/main" prst="roundRect">
+          <a:prstGeom prst="roundRect">
             <a:avLst>
               <a:gd name="adj" fmla="val 26923"/>
             </a:avLst>
           </a:prstGeom>
-          <a:solidFill xmlns:a="http://schemas.openxmlformats.org/drawingml/2006/main">
+          <a:solidFill>
             <a:srgbClr val="E4F0DD"/>
           </a:solidFill>
-          <a:ln xmlns:a="http://schemas.openxmlformats.org/drawingml/2006/main" w="11430">
+          <a:ln w="11430">
             <a:solidFill>
               <a:srgbClr val="4D7C2F"/>
             </a:solidFill>
@@ -6436,11 +6436,11 @@
           </a:ln>
         </p:spPr>
         <p:txBody>
-          <a:bodyPr xmlns:a="http://schemas.openxmlformats.org/drawingml/2006/main" lIns="38100" tIns="19050" rIns="38100" bIns="19050" anchor="ctr">
+          <a:bodyPr lIns="38100" tIns="19050" rIns="38100" bIns="19050" anchor="ctr">
             <a:normAutofit fontScale="88787"/>
           </a:bodyPr>
-          <a:lstStyle xmlns:a="http://schemas.openxmlformats.org/drawingml/2006/main"/>
-          <a:p xmlns:a="http://schemas.openxmlformats.org/drawingml/2006/main">
+          <a:lstStyle/>
+          <a:p>
             <a:pPr algn="ctr">
               <a:lnSpc>
                 <a:spcPct val="105000"/>
@@ -6472,27 +6472,27 @@
       <p:sp>
         <p:nvSpPr>
           <p:cNvPr id="17" name="">
-            <a:extLst xmlns:a="http://schemas.openxmlformats.org/drawingml/2006/main">
+            <a:extLst>
               <a:ext uri="{FF2B5EF4-FFF2-40B4-BE49-F238E27FC236}">
-                <a16:creationId xmlns:a16="http://schemas.microsoft.com/office/drawing/2014/main" id="{69F6043E-B2ED-4C1D-B36C-8D65F93FAD00}"/>
+                <ns2:creationId id="{69F6043E-B2ED-4C1D-B36C-8D65F93FAD00}"/>
               </a:ext>
             </a:extLst>
           </p:cNvPr>
           <p:cNvSpPr>
-            <a:spLocks xmlns:a="http://schemas.openxmlformats.org/drawingml/2006/main" noGrp="1"/>
-          </p:cNvSpPr>
-          <p:nvPr/>
-        </p:nvSpPr>
-        <p:spPr>
-          <a:xfrm xmlns:a="http://schemas.openxmlformats.org/drawingml/2006/main">
+            <a:spLocks noGrp="1"/>
+          </p:cNvSpPr>
+          <p:nvPr/>
+        </p:nvSpPr>
+        <p:spPr>
+          <a:xfrm>
             <a:off x="2209800" y="3505200"/>
             <a:ext cx="2400300" cy="742950"/>
           </a:xfrm>
-          <a:prstGeom xmlns:a="http://schemas.openxmlformats.org/drawingml/2006/main" prst="rect">
+          <a:prstGeom prst="rect">
             <a:avLst/>
           </a:prstGeom>
-          <a:noFill xmlns:a="http://schemas.openxmlformats.org/drawingml/2006/main"/>
-          <a:ln xmlns:a="http://schemas.openxmlformats.org/drawingml/2006/main" w="11430">
+          <a:noFill/>
+          <a:ln w="11430">
             <a:solidFill>
               <a:srgbClr val="4D7C2F"/>
             </a:solidFill>
@@ -6503,31 +6503,31 @@
       <p:sp>
         <p:nvSpPr>
           <p:cNvPr id="18" name="">
-            <a:extLst xmlns:a="http://schemas.openxmlformats.org/drawingml/2006/main">
+            <a:extLst>
               <a:ext uri="{FF2B5EF4-FFF2-40B4-BE49-F238E27FC236}">
-                <a16:creationId xmlns:a16="http://schemas.microsoft.com/office/drawing/2014/main" id="{11811ADF-C0C6-41D4-9C7D-D1D934B9155B}"/>
+                <ns2:creationId id="{11811ADF-C0C6-41D4-9C7D-D1D934B9155B}"/>
               </a:ext>
             </a:extLst>
           </p:cNvPr>
           <p:cNvSpPr>
-            <a:spLocks xmlns:a="http://schemas.openxmlformats.org/drawingml/2006/main" noGrp="1"/>
-          </p:cNvSpPr>
-          <p:nvPr/>
-        </p:nvSpPr>
-        <p:spPr>
-          <a:xfrm xmlns:a="http://schemas.openxmlformats.org/drawingml/2006/main">
+            <a:spLocks noGrp="1"/>
+          </p:cNvSpPr>
+          <p:nvPr/>
+        </p:nvSpPr>
+        <p:spPr>
+          <a:xfrm>
             <a:off x="2209800" y="3505200"/>
             <a:ext cx="2400300" cy="266700"/>
           </a:xfrm>
-          <a:prstGeom xmlns:a="http://schemas.openxmlformats.org/drawingml/2006/main" prst="roundRect">
+          <a:prstGeom prst="roundRect">
             <a:avLst>
               <a:gd name="adj" fmla="val 0"/>
             </a:avLst>
           </a:prstGeom>
-          <a:solidFill xmlns:a="http://schemas.openxmlformats.org/drawingml/2006/main">
+          <a:solidFill>
             <a:srgbClr val="E4F0DD"/>
           </a:solidFill>
-          <a:ln xmlns:a="http://schemas.openxmlformats.org/drawingml/2006/main" w="11430">
+          <a:ln w="11430">
             <a:solidFill>
               <a:srgbClr val="4D7C2F"/>
             </a:solidFill>
@@ -6535,11 +6535,11 @@
           </a:ln>
         </p:spPr>
         <p:txBody>
-          <a:bodyPr xmlns:a="http://schemas.openxmlformats.org/drawingml/2006/main" lIns="114300" tIns="76200" rIns="114300" bIns="76200" anchor="ctr">
+          <a:bodyPr lIns="114300" tIns="76200" rIns="114300" bIns="76200" anchor="ctr">
             <a:normAutofit fontScale="58962"/>
           </a:bodyPr>
-          <a:lstStyle xmlns:a="http://schemas.openxmlformats.org/drawingml/2006/main"/>
-          <a:p xmlns:a="http://schemas.openxmlformats.org/drawingml/2006/main">
+          <a:lstStyle/>
+          <a:p>
             <a:pPr algn="ctr">
               <a:lnSpc>
                 <a:spcPct val="106000"/>
@@ -6571,31 +6571,31 @@
       <p:sp>
         <p:nvSpPr>
           <p:cNvPr id="19" name="">
-            <a:extLst xmlns:a="http://schemas.openxmlformats.org/drawingml/2006/main">
+            <a:extLst>
               <a:ext uri="{FF2B5EF4-FFF2-40B4-BE49-F238E27FC236}">
-                <a16:creationId xmlns:a16="http://schemas.microsoft.com/office/drawing/2014/main" id="{DED3AF27-95CC-4C81-9A34-1856D74C7A6B}"/>
+                <ns2:creationId id="{DED3AF27-95CC-4C81-9A34-1856D74C7A6B}"/>
               </a:ext>
             </a:extLst>
           </p:cNvPr>
           <p:cNvSpPr>
-            <a:spLocks xmlns:a="http://schemas.openxmlformats.org/drawingml/2006/main" noGrp="1"/>
-          </p:cNvSpPr>
-          <p:nvPr/>
-        </p:nvSpPr>
-        <p:spPr>
-          <a:xfrm xmlns:a="http://schemas.openxmlformats.org/drawingml/2006/main">
+            <a:spLocks noGrp="1"/>
+          </p:cNvSpPr>
+          <p:nvPr/>
+        </p:nvSpPr>
+        <p:spPr>
+          <a:xfrm>
             <a:off x="2362200" y="3886200"/>
             <a:ext cx="876300" cy="247650"/>
           </a:xfrm>
-          <a:prstGeom xmlns:a="http://schemas.openxmlformats.org/drawingml/2006/main" prst="roundRect">
+          <a:prstGeom prst="roundRect">
             <a:avLst>
               <a:gd name="adj" fmla="val 26923"/>
             </a:avLst>
           </a:prstGeom>
-          <a:solidFill xmlns:a="http://schemas.openxmlformats.org/drawingml/2006/main">
+          <a:solidFill>
             <a:srgbClr val="EAF2E4"/>
           </a:solidFill>
-          <a:ln xmlns:a="http://schemas.openxmlformats.org/drawingml/2006/main" w="11430">
+          <a:ln w="11430">
             <a:solidFill>
               <a:srgbClr val="4D7C2F"/>
             </a:solidFill>
@@ -6603,11 +6603,11 @@
           </a:ln>
         </p:spPr>
         <p:txBody>
-          <a:bodyPr xmlns:a="http://schemas.openxmlformats.org/drawingml/2006/main" lIns="38100" tIns="19050" rIns="38100" bIns="19050" anchor="ctr">
+          <a:bodyPr lIns="38100" tIns="19050" rIns="38100" bIns="19050" anchor="ctr">
             <a:normAutofit fontScale="88787"/>
           </a:bodyPr>
-          <a:lstStyle xmlns:a="http://schemas.openxmlformats.org/drawingml/2006/main"/>
-          <a:p xmlns:a="http://schemas.openxmlformats.org/drawingml/2006/main">
+          <a:lstStyle/>
+          <a:p>
             <a:pPr algn="ctr">
               <a:lnSpc>
                 <a:spcPct val="105000"/>
@@ -6639,31 +6639,31 @@
       <p:sp>
         <p:nvSpPr>
           <p:cNvPr id="20" name="">
-            <a:extLst xmlns:a="http://schemas.openxmlformats.org/drawingml/2006/main">
+            <a:extLst>
               <a:ext uri="{FF2B5EF4-FFF2-40B4-BE49-F238E27FC236}">
-                <a16:creationId xmlns:a16="http://schemas.microsoft.com/office/drawing/2014/main" id="{28A130D2-7B5E-471C-8A02-594EA918BA22}"/>
+                <ns2:creationId id="{28A130D2-7B5E-471C-8A02-594EA918BA22}"/>
               </a:ext>
             </a:extLst>
           </p:cNvPr>
           <p:cNvSpPr>
-            <a:spLocks xmlns:a="http://schemas.openxmlformats.org/drawingml/2006/main" noGrp="1"/>
-          </p:cNvSpPr>
-          <p:nvPr/>
-        </p:nvSpPr>
-        <p:spPr>
-          <a:xfrm xmlns:a="http://schemas.openxmlformats.org/drawingml/2006/main">
+            <a:spLocks noGrp="1"/>
+          </p:cNvSpPr>
+          <p:nvPr/>
+        </p:nvSpPr>
+        <p:spPr>
+          <a:xfrm>
             <a:off x="3371850" y="3886200"/>
             <a:ext cx="1066800" cy="247650"/>
           </a:xfrm>
-          <a:prstGeom xmlns:a="http://schemas.openxmlformats.org/drawingml/2006/main" prst="roundRect">
+          <a:prstGeom prst="roundRect">
             <a:avLst>
               <a:gd name="adj" fmla="val 26923"/>
             </a:avLst>
           </a:prstGeom>
-          <a:solidFill xmlns:a="http://schemas.openxmlformats.org/drawingml/2006/main">
+          <a:solidFill>
             <a:srgbClr val="E4F0DD"/>
           </a:solidFill>
-          <a:ln xmlns:a="http://schemas.openxmlformats.org/drawingml/2006/main" w="11430">
+          <a:ln w="11430">
             <a:solidFill>
               <a:srgbClr val="4D7C2F"/>
             </a:solidFill>
@@ -6671,11 +6671,11 @@
           </a:ln>
         </p:spPr>
         <p:txBody>
-          <a:bodyPr xmlns:a="http://schemas.openxmlformats.org/drawingml/2006/main" lIns="38100" tIns="19050" rIns="38100" bIns="19050" anchor="ctr">
+          <a:bodyPr lIns="38100" tIns="19050" rIns="38100" bIns="19050" anchor="ctr">
             <a:normAutofit fontScale="88787"/>
           </a:bodyPr>
-          <a:lstStyle xmlns:a="http://schemas.openxmlformats.org/drawingml/2006/main"/>
-          <a:p xmlns:a="http://schemas.openxmlformats.org/drawingml/2006/main">
+          <a:lstStyle/>
+          <a:p>
             <a:pPr algn="ctr">
               <a:lnSpc>
                 <a:spcPct val="105000"/>
@@ -6707,27 +6707,27 @@
       <p:sp>
         <p:nvSpPr>
           <p:cNvPr id="21" name="">
-            <a:extLst xmlns:a="http://schemas.openxmlformats.org/drawingml/2006/main">
+            <a:extLst>
               <a:ext uri="{FF2B5EF4-FFF2-40B4-BE49-F238E27FC236}">
-                <a16:creationId xmlns:a16="http://schemas.microsoft.com/office/drawing/2014/main" id="{4F17C854-4DF4-4B07-8F32-7A6ADD5B4209}"/>
+                <ns2:creationId id="{4F17C854-4DF4-4B07-8F32-7A6ADD5B4209}"/>
               </a:ext>
             </a:extLst>
           </p:cNvPr>
           <p:cNvSpPr>
-            <a:spLocks xmlns:a="http://schemas.openxmlformats.org/drawingml/2006/main" noGrp="1"/>
-          </p:cNvSpPr>
-          <p:nvPr/>
-        </p:nvSpPr>
-        <p:spPr>
-          <a:xfrm xmlns:a="http://schemas.openxmlformats.org/drawingml/2006/main">
+            <a:spLocks noGrp="1"/>
+          </p:cNvSpPr>
+          <p:nvPr/>
+        </p:nvSpPr>
+        <p:spPr>
+          <a:xfrm>
             <a:off x="2209800" y="4533900"/>
             <a:ext cx="2400300" cy="742950"/>
           </a:xfrm>
-          <a:prstGeom xmlns:a="http://schemas.openxmlformats.org/drawingml/2006/main" prst="rect">
+          <a:prstGeom prst="rect">
             <a:avLst/>
           </a:prstGeom>
-          <a:noFill xmlns:a="http://schemas.openxmlformats.org/drawingml/2006/main"/>
-          <a:ln xmlns:a="http://schemas.openxmlformats.org/drawingml/2006/main" w="11430">
+          <a:noFill/>
+          <a:ln w="11430">
             <a:solidFill>
               <a:srgbClr val="4D7C2F"/>
             </a:solidFill>
@@ -6738,31 +6738,31 @@
       <p:sp>
         <p:nvSpPr>
           <p:cNvPr id="22" name="">
-            <a:extLst xmlns:a="http://schemas.openxmlformats.org/drawingml/2006/main">
+            <a:extLst>
               <a:ext uri="{FF2B5EF4-FFF2-40B4-BE49-F238E27FC236}">
-                <a16:creationId xmlns:a16="http://schemas.microsoft.com/office/drawing/2014/main" id="{E7BC80B8-C791-40B6-8D41-859042171C18}"/>
+                <ns2:creationId id="{E7BC80B8-C791-40B6-8D41-859042171C18}"/>
               </a:ext>
             </a:extLst>
           </p:cNvPr>
           <p:cNvSpPr>
-            <a:spLocks xmlns:a="http://schemas.openxmlformats.org/drawingml/2006/main" noGrp="1"/>
-          </p:cNvSpPr>
-          <p:nvPr/>
-        </p:nvSpPr>
-        <p:spPr>
-          <a:xfrm xmlns:a="http://schemas.openxmlformats.org/drawingml/2006/main">
+            <a:spLocks noGrp="1"/>
+          </p:cNvSpPr>
+          <p:nvPr/>
+        </p:nvSpPr>
+        <p:spPr>
+          <a:xfrm>
             <a:off x="2209800" y="4533900"/>
             <a:ext cx="2400300" cy="266700"/>
           </a:xfrm>
-          <a:prstGeom xmlns:a="http://schemas.openxmlformats.org/drawingml/2006/main" prst="roundRect">
+          <a:prstGeom prst="roundRect">
             <a:avLst>
               <a:gd name="adj" fmla="val 0"/>
             </a:avLst>
           </a:prstGeom>
-          <a:solidFill xmlns:a="http://schemas.openxmlformats.org/drawingml/2006/main">
+          <a:solidFill>
             <a:srgbClr val="E4F0DD"/>
           </a:solidFill>
-          <a:ln xmlns:a="http://schemas.openxmlformats.org/drawingml/2006/main" w="11430">
+          <a:ln w="11430">
             <a:solidFill>
               <a:srgbClr val="4D7C2F"/>
             </a:solidFill>
@@ -6770,11 +6770,11 @@
           </a:ln>
         </p:spPr>
         <p:txBody>
-          <a:bodyPr xmlns:a="http://schemas.openxmlformats.org/drawingml/2006/main" lIns="114300" tIns="76200" rIns="114300" bIns="76200" anchor="ctr">
+          <a:bodyPr lIns="114300" tIns="76200" rIns="114300" bIns="76200" anchor="ctr">
             <a:normAutofit fontScale="58962"/>
           </a:bodyPr>
-          <a:lstStyle xmlns:a="http://schemas.openxmlformats.org/drawingml/2006/main"/>
-          <a:p xmlns:a="http://schemas.openxmlformats.org/drawingml/2006/main">
+          <a:lstStyle/>
+          <a:p>
             <a:pPr algn="ctr">
               <a:lnSpc>
                 <a:spcPct val="106000"/>
@@ -6806,31 +6806,31 @@
       <p:sp>
         <p:nvSpPr>
           <p:cNvPr id="23" name="">
-            <a:extLst xmlns:a="http://schemas.openxmlformats.org/drawingml/2006/main">
+            <a:extLst>
               <a:ext uri="{FF2B5EF4-FFF2-40B4-BE49-F238E27FC236}">
-                <a16:creationId xmlns:a16="http://schemas.microsoft.com/office/drawing/2014/main" id="{0F6EEDE0-5590-4A43-AE73-B57F9BF9DEE8}"/>
+                <ns2:creationId id="{0F6EEDE0-5590-4A43-AE73-B57F9BF9DEE8}"/>
               </a:ext>
             </a:extLst>
           </p:cNvPr>
           <p:cNvSpPr>
-            <a:spLocks xmlns:a="http://schemas.openxmlformats.org/drawingml/2006/main" noGrp="1"/>
-          </p:cNvSpPr>
-          <p:nvPr/>
-        </p:nvSpPr>
-        <p:spPr>
-          <a:xfrm xmlns:a="http://schemas.openxmlformats.org/drawingml/2006/main">
+            <a:spLocks noGrp="1"/>
+          </p:cNvSpPr>
+          <p:nvPr/>
+        </p:nvSpPr>
+        <p:spPr>
+          <a:xfrm>
             <a:off x="2362200" y="4914900"/>
             <a:ext cx="876300" cy="247650"/>
           </a:xfrm>
-          <a:prstGeom xmlns:a="http://schemas.openxmlformats.org/drawingml/2006/main" prst="roundRect">
+          <a:prstGeom prst="roundRect">
             <a:avLst>
               <a:gd name="adj" fmla="val 26923"/>
             </a:avLst>
           </a:prstGeom>
-          <a:solidFill xmlns:a="http://schemas.openxmlformats.org/drawingml/2006/main">
+          <a:solidFill>
             <a:srgbClr val="EAF2E4"/>
           </a:solidFill>
-          <a:ln xmlns:a="http://schemas.openxmlformats.org/drawingml/2006/main" w="11430">
+          <a:ln w="11430">
             <a:solidFill>
               <a:srgbClr val="4D7C2F"/>
             </a:solidFill>
@@ -6838,11 +6838,11 @@
           </a:ln>
         </p:spPr>
         <p:txBody>
-          <a:bodyPr xmlns:a="http://schemas.openxmlformats.org/drawingml/2006/main" lIns="38100" tIns="19050" rIns="38100" bIns="19050" anchor="ctr">
+          <a:bodyPr lIns="38100" tIns="19050" rIns="38100" bIns="19050" anchor="ctr">
             <a:normAutofit fontScale="88787"/>
           </a:bodyPr>
-          <a:lstStyle xmlns:a="http://schemas.openxmlformats.org/drawingml/2006/main"/>
-          <a:p xmlns:a="http://schemas.openxmlformats.org/drawingml/2006/main">
+          <a:lstStyle/>
+          <a:p>
             <a:pPr algn="ctr">
               <a:lnSpc>
                 <a:spcPct val="105000"/>
@@ -6874,31 +6874,31 @@
       <p:sp>
         <p:nvSpPr>
           <p:cNvPr id="24" name="">
-            <a:extLst xmlns:a="http://schemas.openxmlformats.org/drawingml/2006/main">
+            <a:extLst>
               <a:ext uri="{FF2B5EF4-FFF2-40B4-BE49-F238E27FC236}">
-                <a16:creationId xmlns:a16="http://schemas.microsoft.com/office/drawing/2014/main" id="{E5608948-2CA0-4ACD-AFC0-74D9C32B36D4}"/>
+                <ns2:creationId id="{E5608948-2CA0-4ACD-AFC0-74D9C32B36D4}"/>
               </a:ext>
             </a:extLst>
           </p:cNvPr>
           <p:cNvSpPr>
-            <a:spLocks xmlns:a="http://schemas.openxmlformats.org/drawingml/2006/main" noGrp="1"/>
-          </p:cNvSpPr>
-          <p:nvPr/>
-        </p:nvSpPr>
-        <p:spPr>
-          <a:xfrm xmlns:a="http://schemas.openxmlformats.org/drawingml/2006/main">
+            <a:spLocks noGrp="1"/>
+          </p:cNvSpPr>
+          <p:nvPr/>
+        </p:nvSpPr>
+        <p:spPr>
+          <a:xfrm>
             <a:off x="3371850" y="4914900"/>
             <a:ext cx="1066800" cy="247650"/>
           </a:xfrm>
-          <a:prstGeom xmlns:a="http://schemas.openxmlformats.org/drawingml/2006/main" prst="roundRect">
+          <a:prstGeom prst="roundRect">
             <a:avLst>
               <a:gd name="adj" fmla="val 26923"/>
             </a:avLst>
           </a:prstGeom>
-          <a:solidFill xmlns:a="http://schemas.openxmlformats.org/drawingml/2006/main">
+          <a:solidFill>
             <a:srgbClr val="E4F0DD"/>
           </a:solidFill>
-          <a:ln xmlns:a="http://schemas.openxmlformats.org/drawingml/2006/main" w="11430">
+          <a:ln w="11430">
             <a:solidFill>
               <a:srgbClr val="4D7C2F"/>
             </a:solidFill>
@@ -6906,11 +6906,11 @@
           </a:ln>
         </p:spPr>
         <p:txBody>
-          <a:bodyPr xmlns:a="http://schemas.openxmlformats.org/drawingml/2006/main" lIns="38100" tIns="19050" rIns="38100" bIns="19050" anchor="ctr">
+          <a:bodyPr lIns="38100" tIns="19050" rIns="38100" bIns="19050" anchor="ctr">
             <a:normAutofit fontScale="88787"/>
           </a:bodyPr>
-          <a:lstStyle xmlns:a="http://schemas.openxmlformats.org/drawingml/2006/main"/>
-          <a:p xmlns:a="http://schemas.openxmlformats.org/drawingml/2006/main">
+          <a:lstStyle/>
+          <a:p>
             <a:pPr algn="ctr">
               <a:lnSpc>
                 <a:spcPct val="105000"/>
@@ -6943,20 +6943,20 @@
         <p:nvCxnSpPr>
           <p:cNvPr id="81" name=""/>
           <p:cNvCxnSpPr>
-            <a:stCxn xmlns:a="http://schemas.openxmlformats.org/drawingml/2006/main" id="10" idx="3"/>
-            <a:endCxn xmlns:a="http://schemas.openxmlformats.org/drawingml/2006/main" id="15" idx="1"/>
+            <a:stCxn id="10" idx="3"/>
+            <a:endCxn id="15" idx="1"/>
           </p:cNvCxnSpPr>
           <p:nvPr/>
         </p:nvCxnSpPr>
         <p:spPr>
-          <a:xfrm xmlns:a="http://schemas.openxmlformats.org/drawingml/2006/main">
+          <a:xfrm>
             <a:off x="1733550" y="2952750"/>
             <a:ext cx="628650" cy="28575"/>
           </a:xfrm>
-          <a:prstGeom xmlns:a="http://schemas.openxmlformats.org/drawingml/2006/main" prst="straightConnector1">
+          <a:prstGeom prst="straightConnector1">
             <a:avLst/>
           </a:prstGeom>
-          <a:ln xmlns:a="http://schemas.openxmlformats.org/drawingml/2006/main" w="15240">
+          <a:ln w="15240">
             <a:solidFill>
               <a:srgbClr val="000000"/>
             </a:solidFill>
@@ -6970,20 +6970,20 @@
         <p:nvCxnSpPr>
           <p:cNvPr id="82" name=""/>
           <p:cNvCxnSpPr>
-            <a:stCxn xmlns:a="http://schemas.openxmlformats.org/drawingml/2006/main" id="15" idx="3"/>
-            <a:endCxn xmlns:a="http://schemas.openxmlformats.org/drawingml/2006/main" id="16" idx="1"/>
+            <a:stCxn id="15" idx="3"/>
+            <a:endCxn id="16" idx="1"/>
           </p:cNvCxnSpPr>
           <p:nvPr/>
         </p:nvCxnSpPr>
         <p:spPr>
-          <a:xfrm xmlns:a="http://schemas.openxmlformats.org/drawingml/2006/main">
+          <a:xfrm>
             <a:off x="3238500" y="2981325"/>
             <a:ext cx="133350" cy="0"/>
           </a:xfrm>
-          <a:prstGeom xmlns:a="http://schemas.openxmlformats.org/drawingml/2006/main" prst="straightConnector1">
+          <a:prstGeom prst="straightConnector1">
             <a:avLst/>
           </a:prstGeom>
-          <a:ln xmlns:a="http://schemas.openxmlformats.org/drawingml/2006/main" w="15240">
+          <a:ln w="15240">
             <a:solidFill>
               <a:srgbClr val="000000"/>
             </a:solidFill>
@@ -6997,20 +6997,20 @@
         <p:nvCxnSpPr>
           <p:cNvPr id="83" name=""/>
           <p:cNvCxnSpPr>
-            <a:stCxn xmlns:a="http://schemas.openxmlformats.org/drawingml/2006/main" id="11" idx="3"/>
-            <a:endCxn xmlns:a="http://schemas.openxmlformats.org/drawingml/2006/main" id="19" idx="1"/>
+            <a:stCxn id="11" idx="3"/>
+            <a:endCxn id="19" idx="1"/>
           </p:cNvCxnSpPr>
           <p:nvPr/>
         </p:nvCxnSpPr>
         <p:spPr>
-          <a:xfrm xmlns:a="http://schemas.openxmlformats.org/drawingml/2006/main">
+          <a:xfrm>
             <a:off x="1733550" y="3981450"/>
             <a:ext cx="628650" cy="28575"/>
           </a:xfrm>
-          <a:prstGeom xmlns:a="http://schemas.openxmlformats.org/drawingml/2006/main" prst="straightConnector1">
+          <a:prstGeom prst="straightConnector1">
             <a:avLst/>
           </a:prstGeom>
-          <a:ln xmlns:a="http://schemas.openxmlformats.org/drawingml/2006/main" w="15240">
+          <a:ln w="15240">
             <a:solidFill>
               <a:srgbClr val="000000"/>
             </a:solidFill>
@@ -7024,20 +7024,20 @@
         <p:nvCxnSpPr>
           <p:cNvPr id="84" name=""/>
           <p:cNvCxnSpPr>
-            <a:stCxn xmlns:a="http://schemas.openxmlformats.org/drawingml/2006/main" id="19" idx="3"/>
-            <a:endCxn xmlns:a="http://schemas.openxmlformats.org/drawingml/2006/main" id="20" idx="1"/>
+            <a:stCxn id="19" idx="3"/>
+            <a:endCxn id="20" idx="1"/>
           </p:cNvCxnSpPr>
           <p:nvPr/>
         </p:nvCxnSpPr>
         <p:spPr>
-          <a:xfrm xmlns:a="http://schemas.openxmlformats.org/drawingml/2006/main">
+          <a:xfrm>
             <a:off x="3238500" y="4010025"/>
             <a:ext cx="133350" cy="0"/>
           </a:xfrm>
-          <a:prstGeom xmlns:a="http://schemas.openxmlformats.org/drawingml/2006/main" prst="straightConnector1">
+          <a:prstGeom prst="straightConnector1">
             <a:avLst/>
           </a:prstGeom>
-          <a:ln xmlns:a="http://schemas.openxmlformats.org/drawingml/2006/main" w="15240">
+          <a:ln w="15240">
             <a:solidFill>
               <a:srgbClr val="000000"/>
             </a:solidFill>
@@ -7051,20 +7051,20 @@
         <p:nvCxnSpPr>
           <p:cNvPr id="85" name=""/>
           <p:cNvCxnSpPr>
-            <a:stCxn xmlns:a="http://schemas.openxmlformats.org/drawingml/2006/main" id="12" idx="3"/>
-            <a:endCxn xmlns:a="http://schemas.openxmlformats.org/drawingml/2006/main" id="23" idx="1"/>
+            <a:stCxn id="12" idx="3"/>
+            <a:endCxn id="23" idx="1"/>
           </p:cNvCxnSpPr>
           <p:nvPr/>
         </p:nvCxnSpPr>
         <p:spPr>
-          <a:xfrm xmlns:a="http://schemas.openxmlformats.org/drawingml/2006/main">
+          <a:xfrm>
             <a:off x="1733550" y="5010150"/>
             <a:ext cx="628650" cy="28575"/>
           </a:xfrm>
-          <a:prstGeom xmlns:a="http://schemas.openxmlformats.org/drawingml/2006/main" prst="straightConnector1">
+          <a:prstGeom prst="straightConnector1">
             <a:avLst/>
           </a:prstGeom>
-          <a:ln xmlns:a="http://schemas.openxmlformats.org/drawingml/2006/main" w="15240">
+          <a:ln w="15240">
             <a:solidFill>
               <a:srgbClr val="000000"/>
             </a:solidFill>
@@ -7078,20 +7078,20 @@
         <p:nvCxnSpPr>
           <p:cNvPr id="86" name=""/>
           <p:cNvCxnSpPr>
-            <a:stCxn xmlns:a="http://schemas.openxmlformats.org/drawingml/2006/main" id="23" idx="3"/>
-            <a:endCxn xmlns:a="http://schemas.openxmlformats.org/drawingml/2006/main" id="24" idx="1"/>
+            <a:stCxn id="23" idx="3"/>
+            <a:endCxn id="24" idx="1"/>
           </p:cNvCxnSpPr>
           <p:nvPr/>
         </p:nvCxnSpPr>
         <p:spPr>
-          <a:xfrm xmlns:a="http://schemas.openxmlformats.org/drawingml/2006/main">
+          <a:xfrm>
             <a:off x="3238500" y="5038725"/>
             <a:ext cx="133350" cy="0"/>
           </a:xfrm>
-          <a:prstGeom xmlns:a="http://schemas.openxmlformats.org/drawingml/2006/main" prst="straightConnector1">
+          <a:prstGeom prst="straightConnector1">
             <a:avLst/>
           </a:prstGeom>
-          <a:ln xmlns:a="http://schemas.openxmlformats.org/drawingml/2006/main" w="15240">
+          <a:ln w="15240">
             <a:solidFill>
               <a:srgbClr val="000000"/>
             </a:solidFill>
@@ -7104,27 +7104,27 @@
       <p:sp>
         <p:nvSpPr>
           <p:cNvPr id="31" name="">
-            <a:extLst xmlns:a="http://schemas.openxmlformats.org/drawingml/2006/main">
+            <a:extLst>
               <a:ext uri="{FF2B5EF4-FFF2-40B4-BE49-F238E27FC236}">
-                <a16:creationId xmlns:a16="http://schemas.microsoft.com/office/drawing/2014/main" id="{7EEEFB97-8C34-49A9-ADCD-365B965474E4}"/>
+                <ns2:creationId id="{7EEEFB97-8C34-49A9-ADCD-365B965474E4}"/>
               </a:ext>
             </a:extLst>
           </p:cNvPr>
           <p:cNvSpPr>
-            <a:spLocks xmlns:a="http://schemas.openxmlformats.org/drawingml/2006/main" noGrp="1"/>
-          </p:cNvSpPr>
-          <p:nvPr/>
-        </p:nvSpPr>
-        <p:spPr>
-          <a:xfrm xmlns:a="http://schemas.openxmlformats.org/drawingml/2006/main">
+            <a:spLocks noGrp="1"/>
+          </p:cNvSpPr>
+          <p:nvPr/>
+        </p:nvSpPr>
+        <p:spPr>
+          <a:xfrm>
             <a:off x="5124450" y="3143250"/>
             <a:ext cx="2305050" cy="1657350"/>
           </a:xfrm>
-          <a:prstGeom xmlns:a="http://schemas.openxmlformats.org/drawingml/2006/main" prst="rect">
+          <a:prstGeom prst="rect">
             <a:avLst/>
           </a:prstGeom>
-          <a:noFill xmlns:a="http://schemas.openxmlformats.org/drawingml/2006/main"/>
-          <a:ln xmlns:a="http://schemas.openxmlformats.org/drawingml/2006/main" w="11430">
+          <a:noFill/>
+          <a:ln w="11430">
             <a:solidFill>
               <a:srgbClr val="4D7C2F"/>
             </a:solidFill>
@@ -7135,31 +7135,31 @@
       <p:sp>
         <p:nvSpPr>
           <p:cNvPr id="32" name="">
-            <a:extLst xmlns:a="http://schemas.openxmlformats.org/drawingml/2006/main">
+            <a:extLst>
               <a:ext uri="{FF2B5EF4-FFF2-40B4-BE49-F238E27FC236}">
-                <a16:creationId xmlns:a16="http://schemas.microsoft.com/office/drawing/2014/main" id="{A64F6C36-092C-479F-9E76-C4601F389E2E}"/>
+                <ns2:creationId id="{A64F6C36-092C-479F-9E76-C4601F389E2E}"/>
               </a:ext>
             </a:extLst>
           </p:cNvPr>
           <p:cNvSpPr>
-            <a:spLocks xmlns:a="http://schemas.openxmlformats.org/drawingml/2006/main" noGrp="1"/>
-          </p:cNvSpPr>
-          <p:nvPr/>
-        </p:nvSpPr>
-        <p:spPr>
-          <a:xfrm xmlns:a="http://schemas.openxmlformats.org/drawingml/2006/main">
+            <a:spLocks noGrp="1"/>
+          </p:cNvSpPr>
+          <p:nvPr/>
+        </p:nvSpPr>
+        <p:spPr>
+          <a:xfrm>
             <a:off x="5124450" y="3143250"/>
             <a:ext cx="2305050" cy="323850"/>
           </a:xfrm>
-          <a:prstGeom xmlns:a="http://schemas.openxmlformats.org/drawingml/2006/main" prst="roundRect">
+          <a:prstGeom prst="roundRect">
             <a:avLst>
               <a:gd name="adj" fmla="val 0"/>
             </a:avLst>
           </a:prstGeom>
-          <a:solidFill xmlns:a="http://schemas.openxmlformats.org/drawingml/2006/main">
+          <a:solidFill>
             <a:srgbClr val="E4F0DD"/>
           </a:solidFill>
-          <a:ln xmlns:a="http://schemas.openxmlformats.org/drawingml/2006/main" w="11430">
+          <a:ln w="11430">
             <a:solidFill>
               <a:srgbClr val="4D7C2F"/>
             </a:solidFill>
@@ -7167,11 +7167,11 @@
           </a:ln>
         </p:spPr>
         <p:txBody>
-          <a:bodyPr xmlns:a="http://schemas.openxmlformats.org/drawingml/2006/main" lIns="114300" tIns="76200" rIns="114300" bIns="76200" anchor="ctr">
+          <a:bodyPr lIns="114300" tIns="76200" rIns="114300" bIns="76200" anchor="ctr">
             <a:normAutofit fontScale="83241"/>
           </a:bodyPr>
-          <a:lstStyle xmlns:a="http://schemas.openxmlformats.org/drawingml/2006/main"/>
-          <a:p xmlns:a="http://schemas.openxmlformats.org/drawingml/2006/main">
+          <a:lstStyle/>
+          <a:p>
             <a:pPr algn="ctr">
               <a:lnSpc>
                 <a:spcPct val="106000"/>
@@ -7203,31 +7203,31 @@
       <p:sp>
         <p:nvSpPr>
           <p:cNvPr id="33" name="">
-            <a:extLst xmlns:a="http://schemas.openxmlformats.org/drawingml/2006/main">
+            <a:extLst>
               <a:ext uri="{FF2B5EF4-FFF2-40B4-BE49-F238E27FC236}">
-                <a16:creationId xmlns:a16="http://schemas.microsoft.com/office/drawing/2014/main" id="{F9191A6C-A2F2-4342-9012-EEE3E69AF5F1}"/>
+                <ns2:creationId id="{F9191A6C-A2F2-4342-9012-EEE3E69AF5F1}"/>
               </a:ext>
             </a:extLst>
           </p:cNvPr>
           <p:cNvSpPr>
-            <a:spLocks xmlns:a="http://schemas.openxmlformats.org/drawingml/2006/main" noGrp="1"/>
-          </p:cNvSpPr>
-          <p:nvPr/>
-        </p:nvSpPr>
-        <p:spPr>
-          <a:xfrm xmlns:a="http://schemas.openxmlformats.org/drawingml/2006/main">
+            <a:spLocks noGrp="1"/>
+          </p:cNvSpPr>
+          <p:nvPr/>
+        </p:nvSpPr>
+        <p:spPr>
+          <a:xfrm>
             <a:off x="5372100" y="3638550"/>
             <a:ext cx="1809750" cy="476250"/>
           </a:xfrm>
-          <a:prstGeom xmlns:a="http://schemas.openxmlformats.org/drawingml/2006/main" prst="roundRect">
+          <a:prstGeom prst="roundRect">
             <a:avLst>
               <a:gd name="adj" fmla="val 14000"/>
             </a:avLst>
           </a:prstGeom>
-          <a:solidFill xmlns:a="http://schemas.openxmlformats.org/drawingml/2006/main">
+          <a:solidFill>
             <a:srgbClr val="E4F0DD"/>
           </a:solidFill>
-          <a:ln xmlns:a="http://schemas.openxmlformats.org/drawingml/2006/main" w="11430">
+          <a:ln w="11430">
             <a:solidFill>
               <a:srgbClr val="4D7C2F"/>
             </a:solidFill>
@@ -7235,11 +7235,11 @@
           </a:ln>
         </p:spPr>
         <p:txBody>
-          <a:bodyPr xmlns:a="http://schemas.openxmlformats.org/drawingml/2006/main" lIns="76200" tIns="57150" rIns="76200" bIns="57150" anchor="ctr">
+          <a:bodyPr lIns="76200" tIns="57150" rIns="76200" bIns="57150" anchor="ctr">
             <a:normAutofit fontScale="84076"/>
           </a:bodyPr>
-          <a:lstStyle xmlns:a="http://schemas.openxmlformats.org/drawingml/2006/main"/>
-          <a:p xmlns:a="http://schemas.openxmlformats.org/drawingml/2006/main">
+          <a:lstStyle/>
+          <a:p>
             <a:pPr algn="ctr">
               <a:lnSpc>
                 <a:spcPct val="105000"/>
@@ -7266,7 +7266,7 @@
               <a:t>출력 빌더</a:t>
             </a:r>
           </a:p>
-          <a:p xmlns:a="http://schemas.openxmlformats.org/drawingml/2006/main">
+          <a:p>
             <a:pPr algn="ctr">
               <a:lnSpc>
                 <a:spcPct val="105000"/>
@@ -7298,31 +7298,31 @@
       <p:sp>
         <p:nvSpPr>
           <p:cNvPr id="34" name="">
-            <a:extLst xmlns:a="http://schemas.openxmlformats.org/drawingml/2006/main">
+            <a:extLst>
               <a:ext uri="{FF2B5EF4-FFF2-40B4-BE49-F238E27FC236}">
-                <a16:creationId xmlns:a16="http://schemas.microsoft.com/office/drawing/2014/main" id="{636AF546-6EB8-4247-994D-DEC37421EE66}"/>
+                <ns2:creationId id="{636AF546-6EB8-4247-994D-DEC37421EE66}"/>
               </a:ext>
             </a:extLst>
           </p:cNvPr>
           <p:cNvSpPr>
-            <a:spLocks xmlns:a="http://schemas.openxmlformats.org/drawingml/2006/main" noGrp="1"/>
-          </p:cNvSpPr>
-          <p:nvPr/>
-        </p:nvSpPr>
-        <p:spPr>
-          <a:xfrm xmlns:a="http://schemas.openxmlformats.org/drawingml/2006/main">
+            <a:spLocks noGrp="1"/>
+          </p:cNvSpPr>
+          <p:nvPr/>
+        </p:nvSpPr>
+        <p:spPr>
+          <a:xfrm>
             <a:off x="5372100" y="4229100"/>
             <a:ext cx="1809750" cy="400050"/>
           </a:xfrm>
-          <a:prstGeom xmlns:a="http://schemas.openxmlformats.org/drawingml/2006/main" prst="roundRect">
+          <a:prstGeom prst="roundRect">
             <a:avLst>
               <a:gd name="adj" fmla="val 16667"/>
             </a:avLst>
           </a:prstGeom>
-          <a:solidFill xmlns:a="http://schemas.openxmlformats.org/drawingml/2006/main">
+          <a:solidFill>
             <a:srgbClr val="F0E1CF"/>
           </a:solidFill>
-          <a:ln xmlns:a="http://schemas.openxmlformats.org/drawingml/2006/main" w="11430">
+          <a:ln w="11430">
             <a:solidFill>
               <a:srgbClr val="875214"/>
             </a:solidFill>
@@ -7330,11 +7330,11 @@
           </a:ln>
         </p:spPr>
         <p:txBody>
-          <a:bodyPr xmlns:a="http://schemas.openxmlformats.org/drawingml/2006/main" lIns="76200" tIns="57150" rIns="76200" bIns="57150" anchor="ctr">
+          <a:bodyPr lIns="76200" tIns="57150" rIns="76200" bIns="57150" anchor="ctr">
             <a:normAutofit fontScale="64235"/>
           </a:bodyPr>
-          <a:lstStyle xmlns:a="http://schemas.openxmlformats.org/drawingml/2006/main"/>
-          <a:p xmlns:a="http://schemas.openxmlformats.org/drawingml/2006/main">
+          <a:lstStyle/>
+          <a:p>
             <a:pPr algn="ctr">
               <a:lnSpc>
                 <a:spcPct val="105000"/>
@@ -7361,7 +7361,7 @@
               <a:t>공유 Vault</a:t>
             </a:r>
           </a:p>
-          <a:p xmlns:a="http://schemas.openxmlformats.org/drawingml/2006/main">
+          <a:p>
             <a:pPr algn="ctr">
               <a:lnSpc>
                 <a:spcPct val="105000"/>
@@ -7385,7 +7385,7 @@
                 <a:ea typeface="Helvetica Neue"/>
                 <a:cs typeface="Helvetica Neue"/>
               </a:rPr>
-              <a:t>PII 복원 지점</a:t>
+              <a:t>실행 시 PII 조회 지점</a:t>
             </a:r>
           </a:p>
         </p:txBody>
@@ -7394,22 +7394,22 @@
         <p:nvCxnSpPr>
           <p:cNvPr id="91" name=""/>
           <p:cNvCxnSpPr>
-            <a:stCxn xmlns:a="http://schemas.openxmlformats.org/drawingml/2006/main" id="16" idx="3"/>
-            <a:endCxn xmlns:a="http://schemas.openxmlformats.org/drawingml/2006/main" id="33" idx="1"/>
+            <a:stCxn id="16" idx="3"/>
+            <a:endCxn id="33" idx="1"/>
           </p:cNvCxnSpPr>
           <p:nvPr/>
         </p:nvCxnSpPr>
         <p:spPr>
-          <a:xfrm xmlns:a="http://schemas.openxmlformats.org/drawingml/2006/main">
+          <a:xfrm>
             <a:off x="4438650" y="2981325"/>
             <a:ext cx="933450" cy="895350"/>
           </a:xfrm>
-          <a:prstGeom xmlns:a="http://schemas.openxmlformats.org/drawingml/2006/main" prst="bentConnector3">
+          <a:prstGeom prst="bentConnector3">
             <a:avLst>
               <a:gd name="adj1" fmla="val 50000"/>
             </a:avLst>
           </a:prstGeom>
-          <a:ln xmlns:a="http://schemas.openxmlformats.org/drawingml/2006/main" w="15240">
+          <a:ln w="15240">
             <a:solidFill>
               <a:srgbClr val="000000"/>
             </a:solidFill>
@@ -7423,20 +7423,20 @@
         <p:nvCxnSpPr>
           <p:cNvPr id="92" name=""/>
           <p:cNvCxnSpPr>
-            <a:stCxn xmlns:a="http://schemas.openxmlformats.org/drawingml/2006/main" id="20" idx="3"/>
-            <a:endCxn xmlns:a="http://schemas.openxmlformats.org/drawingml/2006/main" id="33" idx="1"/>
+            <a:stCxn id="20" idx="3"/>
+            <a:endCxn id="33" idx="1"/>
           </p:cNvCxnSpPr>
           <p:nvPr/>
         </p:nvCxnSpPr>
         <p:spPr>
-          <a:xfrm xmlns:a="http://schemas.openxmlformats.org/drawingml/2006/main" flipV="1">
+          <a:xfrm flipV="1">
             <a:off x="4438650" y="3876675"/>
             <a:ext cx="933450" cy="133350"/>
           </a:xfrm>
-          <a:prstGeom xmlns:a="http://schemas.openxmlformats.org/drawingml/2006/main" prst="straightConnector1">
+          <a:prstGeom prst="straightConnector1">
             <a:avLst/>
           </a:prstGeom>
-          <a:ln xmlns:a="http://schemas.openxmlformats.org/drawingml/2006/main" w="15240">
+          <a:ln w="15240">
             <a:solidFill>
               <a:srgbClr val="000000"/>
             </a:solidFill>
@@ -7450,22 +7450,22 @@
         <p:nvCxnSpPr>
           <p:cNvPr id="93" name=""/>
           <p:cNvCxnSpPr>
-            <a:stCxn xmlns:a="http://schemas.openxmlformats.org/drawingml/2006/main" id="24" idx="3"/>
-            <a:endCxn xmlns:a="http://schemas.openxmlformats.org/drawingml/2006/main" id="33" idx="1"/>
+            <a:stCxn id="24" idx="3"/>
+            <a:endCxn id="33" idx="1"/>
           </p:cNvCxnSpPr>
           <p:nvPr/>
         </p:nvCxnSpPr>
         <p:spPr>
-          <a:xfrm xmlns:a="http://schemas.openxmlformats.org/drawingml/2006/main" flipV="1">
+          <a:xfrm flipV="1">
             <a:off x="4438650" y="3876675"/>
             <a:ext cx="933450" cy="1162050"/>
           </a:xfrm>
-          <a:prstGeom xmlns:a="http://schemas.openxmlformats.org/drawingml/2006/main" prst="bentConnector3">
+          <a:prstGeom prst="bentConnector3">
             <a:avLst>
               <a:gd name="adj1" fmla="val 50000"/>
             </a:avLst>
           </a:prstGeom>
-          <a:ln xmlns:a="http://schemas.openxmlformats.org/drawingml/2006/main" w="15240">
+          <a:ln w="15240">
             <a:solidFill>
               <a:srgbClr val="000000"/>
             </a:solidFill>
@@ -7479,20 +7479,20 @@
         <p:nvCxnSpPr>
           <p:cNvPr id="94" name=""/>
           <p:cNvCxnSpPr>
-            <a:stCxn xmlns:a="http://schemas.openxmlformats.org/drawingml/2006/main" id="33" idx="2"/>
-            <a:endCxn xmlns:a="http://schemas.openxmlformats.org/drawingml/2006/main" id="34" idx="0"/>
+            <a:stCxn id="33" idx="2"/>
+            <a:endCxn id="34" idx="0"/>
           </p:cNvCxnSpPr>
           <p:nvPr/>
         </p:nvCxnSpPr>
         <p:spPr>
-          <a:xfrm xmlns:a="http://schemas.openxmlformats.org/drawingml/2006/main">
+          <a:xfrm>
             <a:off x="6276975" y="4114800"/>
             <a:ext cx="0" cy="114300"/>
           </a:xfrm>
-          <a:prstGeom xmlns:a="http://schemas.openxmlformats.org/drawingml/2006/main" prst="straightConnector1">
+          <a:prstGeom prst="straightConnector1">
             <a:avLst/>
           </a:prstGeom>
-          <a:ln xmlns:a="http://schemas.openxmlformats.org/drawingml/2006/main" w="15240">
+          <a:ln w="15240">
             <a:solidFill>
               <a:srgbClr val="555555"/>
             </a:solidFill>
@@ -7505,27 +7505,27 @@
       <p:sp>
         <p:nvSpPr>
           <p:cNvPr id="39" name="">
-            <a:extLst xmlns:a="http://schemas.openxmlformats.org/drawingml/2006/main">
+            <a:extLst>
               <a:ext uri="{FF2B5EF4-FFF2-40B4-BE49-F238E27FC236}">
-                <a16:creationId xmlns:a16="http://schemas.microsoft.com/office/drawing/2014/main" id="{09C081B9-6F62-401B-B036-BD00CDDCC218}"/>
+                <ns2:creationId id="{09C081B9-6F62-401B-B036-BD00CDDCC218}"/>
               </a:ext>
             </a:extLst>
           </p:cNvPr>
           <p:cNvSpPr>
-            <a:spLocks xmlns:a="http://schemas.openxmlformats.org/drawingml/2006/main" noGrp="1"/>
-          </p:cNvSpPr>
-          <p:nvPr/>
-        </p:nvSpPr>
-        <p:spPr>
-          <a:xfrm xmlns:a="http://schemas.openxmlformats.org/drawingml/2006/main">
+            <a:spLocks noGrp="1"/>
+          </p:cNvSpPr>
+          <p:nvPr/>
+        </p:nvSpPr>
+        <p:spPr>
+          <a:xfrm>
             <a:off x="7886700" y="2133600"/>
             <a:ext cx="1847850" cy="1581150"/>
           </a:xfrm>
-          <a:prstGeom xmlns:a="http://schemas.openxmlformats.org/drawingml/2006/main" prst="rect">
+          <a:prstGeom prst="rect">
             <a:avLst/>
           </a:prstGeom>
-          <a:noFill xmlns:a="http://schemas.openxmlformats.org/drawingml/2006/main"/>
-          <a:ln xmlns:a="http://schemas.openxmlformats.org/drawingml/2006/main" w="11430">
+          <a:noFill/>
+          <a:ln w="11430">
             <a:solidFill>
               <a:srgbClr val="8A5A00"/>
             </a:solidFill>
@@ -7536,31 +7536,31 @@
       <p:sp>
         <p:nvSpPr>
           <p:cNvPr id="40" name="">
-            <a:extLst xmlns:a="http://schemas.openxmlformats.org/drawingml/2006/main">
+            <a:extLst>
               <a:ext uri="{FF2B5EF4-FFF2-40B4-BE49-F238E27FC236}">
-                <a16:creationId xmlns:a16="http://schemas.microsoft.com/office/drawing/2014/main" id="{AEE1F53C-FD4E-4701-A49F-988A3BBD8EF8}"/>
+                <ns2:creationId id="{AEE1F53C-FD4E-4701-A49F-988A3BBD8EF8}"/>
               </a:ext>
             </a:extLst>
           </p:cNvPr>
           <p:cNvSpPr>
-            <a:spLocks xmlns:a="http://schemas.openxmlformats.org/drawingml/2006/main" noGrp="1"/>
-          </p:cNvSpPr>
-          <p:nvPr/>
-        </p:nvSpPr>
-        <p:spPr>
-          <a:xfrm xmlns:a="http://schemas.openxmlformats.org/drawingml/2006/main">
+            <a:spLocks noGrp="1"/>
+          </p:cNvSpPr>
+          <p:nvPr/>
+        </p:nvSpPr>
+        <p:spPr>
+          <a:xfrm>
             <a:off x="7886700" y="2133600"/>
             <a:ext cx="1847850" cy="323850"/>
           </a:xfrm>
-          <a:prstGeom xmlns:a="http://schemas.openxmlformats.org/drawingml/2006/main" prst="roundRect">
+          <a:prstGeom prst="roundRect">
             <a:avLst>
               <a:gd name="adj" fmla="val 0"/>
             </a:avLst>
           </a:prstGeom>
-          <a:solidFill xmlns:a="http://schemas.openxmlformats.org/drawingml/2006/main">
+          <a:solidFill>
             <a:srgbClr val="F2E5C4"/>
           </a:solidFill>
-          <a:ln xmlns:a="http://schemas.openxmlformats.org/drawingml/2006/main" w="11430">
+          <a:ln w="11430">
             <a:solidFill>
               <a:srgbClr val="8A5A00"/>
             </a:solidFill>
@@ -7568,11 +7568,11 @@
           </a:ln>
         </p:spPr>
         <p:txBody>
-          <a:bodyPr xmlns:a="http://schemas.openxmlformats.org/drawingml/2006/main" lIns="114300" tIns="76200" rIns="114300" bIns="76200" anchor="ctr">
+          <a:bodyPr lIns="114300" tIns="76200" rIns="114300" bIns="76200" anchor="ctr">
             <a:normAutofit fontScale="83241"/>
           </a:bodyPr>
-          <a:lstStyle xmlns:a="http://schemas.openxmlformats.org/drawingml/2006/main"/>
-          <a:p xmlns:a="http://schemas.openxmlformats.org/drawingml/2006/main">
+          <a:lstStyle/>
+          <a:p>
             <a:pPr algn="ctr">
               <a:lnSpc>
                 <a:spcPct val="106000"/>
@@ -7604,31 +7604,31 @@
       <p:sp>
         <p:nvSpPr>
           <p:cNvPr id="41" name="">
-            <a:extLst xmlns:a="http://schemas.openxmlformats.org/drawingml/2006/main">
+            <a:extLst>
               <a:ext uri="{FF2B5EF4-FFF2-40B4-BE49-F238E27FC236}">
-                <a16:creationId xmlns:a16="http://schemas.microsoft.com/office/drawing/2014/main" id="{45FCAB4F-198F-4104-9CA0-4748A8A86750}"/>
+                <ns2:creationId id="{45FCAB4F-198F-4104-9CA0-4748A8A86750}"/>
               </a:ext>
             </a:extLst>
           </p:cNvPr>
           <p:cNvSpPr>
-            <a:spLocks xmlns:a="http://schemas.openxmlformats.org/drawingml/2006/main" noGrp="1"/>
-          </p:cNvSpPr>
-          <p:nvPr/>
-        </p:nvSpPr>
-        <p:spPr>
-          <a:xfrm xmlns:a="http://schemas.openxmlformats.org/drawingml/2006/main">
+            <a:spLocks noGrp="1"/>
+          </p:cNvSpPr>
+          <p:nvPr/>
+        </p:nvSpPr>
+        <p:spPr>
+          <a:xfrm>
             <a:off x="8096250" y="2628900"/>
             <a:ext cx="1428750" cy="381000"/>
           </a:xfrm>
-          <a:prstGeom xmlns:a="http://schemas.openxmlformats.org/drawingml/2006/main" prst="roundRect">
+          <a:prstGeom prst="roundRect">
             <a:avLst>
               <a:gd name="adj" fmla="val 17500"/>
             </a:avLst>
           </a:prstGeom>
-          <a:solidFill xmlns:a="http://schemas.openxmlformats.org/drawingml/2006/main">
+          <a:solidFill>
             <a:srgbClr val="F2E5C4"/>
           </a:solidFill>
-          <a:ln xmlns:a="http://schemas.openxmlformats.org/drawingml/2006/main" w="11430">
+          <a:ln w="11430">
             <a:solidFill>
               <a:srgbClr val="8A5A00"/>
             </a:solidFill>
@@ -7636,11 +7636,11 @@
           </a:ln>
         </p:spPr>
         <p:txBody>
-          <a:bodyPr xmlns:a="http://schemas.openxmlformats.org/drawingml/2006/main" lIns="76200" tIns="57150" rIns="76200" bIns="57150" anchor="ctr">
+          <a:bodyPr lIns="76200" tIns="57150" rIns="76200" bIns="57150" anchor="ctr">
             <a:normAutofit fontScale="100000"/>
           </a:bodyPr>
-          <a:lstStyle xmlns:a="http://schemas.openxmlformats.org/drawingml/2006/main"/>
-          <a:p xmlns:a="http://schemas.openxmlformats.org/drawingml/2006/main">
+          <a:lstStyle/>
+          <a:p>
             <a:pPr algn="ctr">
               <a:lnSpc>
                 <a:spcPct val="105000"/>
@@ -7664,7 +7664,8 @@
                 <a:ea typeface="Helvetica Neue"/>
                 <a:cs typeface="Helvetica Neue"/>
               </a:rPr>
-              <a:t>ufun</a:t>
+              <a:t>ufun
+선호/유보값</a:t>
             </a:r>
           </a:p>
         </p:txBody>
@@ -7672,31 +7673,31 @@
       <p:sp>
         <p:nvSpPr>
           <p:cNvPr id="42" name="">
-            <a:extLst xmlns:a="http://schemas.openxmlformats.org/drawingml/2006/main">
+            <a:extLst>
               <a:ext uri="{FF2B5EF4-FFF2-40B4-BE49-F238E27FC236}">
-                <a16:creationId xmlns:a16="http://schemas.microsoft.com/office/drawing/2014/main" id="{2C7EA09C-20F4-47F1-BA12-F4000D45EDD2}"/>
+                <ns2:creationId id="{2C7EA09C-20F4-47F1-BA12-F4000D45EDD2}"/>
               </a:ext>
             </a:extLst>
           </p:cNvPr>
           <p:cNvSpPr>
-            <a:spLocks xmlns:a="http://schemas.openxmlformats.org/drawingml/2006/main" noGrp="1"/>
-          </p:cNvSpPr>
-          <p:nvPr/>
-        </p:nvSpPr>
-        <p:spPr>
-          <a:xfrm xmlns:a="http://schemas.openxmlformats.org/drawingml/2006/main">
+            <a:spLocks noGrp="1"/>
+          </p:cNvSpPr>
+          <p:nvPr/>
+        </p:nvSpPr>
+        <p:spPr>
+          <a:xfrm>
             <a:off x="8096250" y="3143250"/>
             <a:ext cx="1428750" cy="438150"/>
           </a:xfrm>
-          <a:prstGeom xmlns:a="http://schemas.openxmlformats.org/drawingml/2006/main" prst="roundRect">
+          <a:prstGeom prst="roundRect">
             <a:avLst>
               <a:gd name="adj" fmla="val 15217"/>
             </a:avLst>
           </a:prstGeom>
-          <a:solidFill xmlns:a="http://schemas.openxmlformats.org/drawingml/2006/main">
+          <a:solidFill>
             <a:srgbClr val="F4E7C0"/>
           </a:solidFill>
-          <a:ln xmlns:a="http://schemas.openxmlformats.org/drawingml/2006/main" w="11430">
+          <a:ln w="11430">
             <a:solidFill>
               <a:srgbClr val="8A5A00"/>
             </a:solidFill>
@@ -7704,11 +7705,11 @@
           </a:ln>
         </p:spPr>
         <p:txBody>
-          <a:bodyPr xmlns:a="http://schemas.openxmlformats.org/drawingml/2006/main" lIns="76200" tIns="57150" rIns="76200" bIns="57150" anchor="ctr">
+          <a:bodyPr lIns="76200" tIns="57150" rIns="76200" bIns="57150" anchor="ctr">
             <a:normAutofit fontScale="74156"/>
           </a:bodyPr>
-          <a:lstStyle xmlns:a="http://schemas.openxmlformats.org/drawingml/2006/main"/>
-          <a:p xmlns:a="http://schemas.openxmlformats.org/drawingml/2006/main">
+          <a:lstStyle/>
+          <a:p>
             <a:pPr algn="ctr">
               <a:lnSpc>
                 <a:spcPct val="105000"/>
@@ -7735,7 +7736,7 @@
               <a:t>협상 엔진</a:t>
             </a:r>
           </a:p>
-          <a:p xmlns:a="http://schemas.openxmlformats.org/drawingml/2006/main">
+          <a:p>
             <a:pPr algn="ctr">
               <a:lnSpc>
                 <a:spcPct val="105000"/>
@@ -7767,31 +7768,31 @@
       <p:sp>
         <p:nvSpPr>
           <p:cNvPr id="43" name="">
-            <a:extLst xmlns:a="http://schemas.openxmlformats.org/drawingml/2006/main">
+            <a:extLst>
               <a:ext uri="{FF2B5EF4-FFF2-40B4-BE49-F238E27FC236}">
-                <a16:creationId xmlns:a16="http://schemas.microsoft.com/office/drawing/2014/main" id="{640DA1BB-BF5B-45B4-8DFE-42BC6698059A}"/>
+                <ns2:creationId id="{640DA1BB-BF5B-45B4-8DFE-42BC6698059A}"/>
               </a:ext>
             </a:extLst>
           </p:cNvPr>
           <p:cNvSpPr>
-            <a:spLocks xmlns:a="http://schemas.openxmlformats.org/drawingml/2006/main" noGrp="1"/>
-          </p:cNvSpPr>
-          <p:nvPr/>
-        </p:nvSpPr>
-        <p:spPr>
-          <a:xfrm xmlns:a="http://schemas.openxmlformats.org/drawingml/2006/main">
+            <a:spLocks noGrp="1"/>
+          </p:cNvSpPr>
+          <p:nvPr/>
+        </p:nvSpPr>
+        <p:spPr>
+          <a:xfrm>
             <a:off x="7886700" y="4019550"/>
             <a:ext cx="1847850" cy="514350"/>
           </a:xfrm>
-          <a:prstGeom xmlns:a="http://schemas.openxmlformats.org/drawingml/2006/main" prst="roundRect">
+          <a:prstGeom prst="roundRect">
             <a:avLst>
               <a:gd name="adj" fmla="val 12963"/>
             </a:avLst>
           </a:prstGeom>
-          <a:solidFill xmlns:a="http://schemas.openxmlformats.org/drawingml/2006/main">
+          <a:solidFill>
             <a:srgbClr val="E6EEF8"/>
           </a:solidFill>
-          <a:ln xmlns:a="http://schemas.openxmlformats.org/drawingml/2006/main" w="11430">
+          <a:ln w="11430">
             <a:solidFill>
               <a:srgbClr val="426A9A"/>
             </a:solidFill>
@@ -7799,11 +7800,11 @@
           </a:ln>
         </p:spPr>
         <p:txBody>
-          <a:bodyPr xmlns:a="http://schemas.openxmlformats.org/drawingml/2006/main" lIns="76200" tIns="57150" rIns="76200" bIns="57150" anchor="ctr">
+          <a:bodyPr lIns="76200" tIns="57150" rIns="76200" bIns="57150" anchor="ctr">
             <a:normAutofit fontScale="93997"/>
           </a:bodyPr>
-          <a:lstStyle xmlns:a="http://schemas.openxmlformats.org/drawingml/2006/main"/>
-          <a:p xmlns:a="http://schemas.openxmlformats.org/drawingml/2006/main">
+          <a:lstStyle/>
+          <a:p>
             <a:pPr algn="ctr">
               <a:lnSpc>
                 <a:spcPct val="105000"/>
@@ -7830,7 +7831,7 @@
               <a:t>Orchestrator</a:t>
             </a:r>
           </a:p>
-          <a:p xmlns:a="http://schemas.openxmlformats.org/drawingml/2006/main">
+          <a:p>
             <a:pPr algn="ctr">
               <a:lnSpc>
                 <a:spcPct val="105000"/>
@@ -7862,31 +7863,31 @@
       <p:sp>
         <p:nvSpPr>
           <p:cNvPr id="44" name="">
-            <a:extLst xmlns:a="http://schemas.openxmlformats.org/drawingml/2006/main">
+            <a:extLst>
               <a:ext uri="{FF2B5EF4-FFF2-40B4-BE49-F238E27FC236}">
-                <a16:creationId xmlns:a16="http://schemas.microsoft.com/office/drawing/2014/main" id="{CE9F0D20-11E2-4B18-8FD0-83265AE1AFA2}"/>
+                <ns2:creationId id="{CE9F0D20-11E2-4B18-8FD0-83265AE1AFA2}"/>
               </a:ext>
             </a:extLst>
           </p:cNvPr>
           <p:cNvSpPr>
-            <a:spLocks xmlns:a="http://schemas.openxmlformats.org/drawingml/2006/main" noGrp="1"/>
-          </p:cNvSpPr>
-          <p:nvPr/>
-        </p:nvSpPr>
-        <p:spPr>
-          <a:xfrm xmlns:a="http://schemas.openxmlformats.org/drawingml/2006/main">
+            <a:spLocks noGrp="1"/>
+          </p:cNvSpPr>
+          <p:nvPr/>
+        </p:nvSpPr>
+        <p:spPr>
+          <a:xfrm>
             <a:off x="7886700" y="4972050"/>
             <a:ext cx="1847850" cy="514350"/>
           </a:xfrm>
-          <a:prstGeom xmlns:a="http://schemas.openxmlformats.org/drawingml/2006/main" prst="roundRect">
+          <a:prstGeom prst="roundRect">
             <a:avLst>
               <a:gd name="adj" fmla="val 12963"/>
             </a:avLst>
           </a:prstGeom>
-          <a:solidFill xmlns:a="http://schemas.openxmlformats.org/drawingml/2006/main">
+          <a:solidFill>
             <a:srgbClr val="E6EEF8"/>
           </a:solidFill>
-          <a:ln xmlns:a="http://schemas.openxmlformats.org/drawingml/2006/main" w="11430">
+          <a:ln w="11430">
             <a:solidFill>
               <a:srgbClr val="426A9A"/>
             </a:solidFill>
@@ -7894,11 +7895,11 @@
           </a:ln>
         </p:spPr>
         <p:txBody>
-          <a:bodyPr xmlns:a="http://schemas.openxmlformats.org/drawingml/2006/main" lIns="76200" tIns="57150" rIns="76200" bIns="57150" anchor="ctr">
+          <a:bodyPr lIns="76200" tIns="57150" rIns="76200" bIns="57150" anchor="ctr">
             <a:normAutofit fontScale="93997"/>
           </a:bodyPr>
-          <a:lstStyle xmlns:a="http://schemas.openxmlformats.org/drawingml/2006/main"/>
-          <a:p xmlns:a="http://schemas.openxmlformats.org/drawingml/2006/main">
+          <a:lstStyle/>
+          <a:p>
             <a:pPr algn="ctr">
               <a:lnSpc>
                 <a:spcPct val="105000"/>
@@ -7925,7 +7926,7 @@
               <a:t>Sub-Agent</a:t>
             </a:r>
           </a:p>
-          <a:p xmlns:a="http://schemas.openxmlformats.org/drawingml/2006/main">
+          <a:p>
             <a:pPr algn="ctr">
               <a:lnSpc>
                 <a:spcPct val="105000"/>
@@ -7958,22 +7959,22 @@
         <p:nvCxnSpPr>
           <p:cNvPr id="101" name=""/>
           <p:cNvCxnSpPr>
-            <a:stCxn xmlns:a="http://schemas.openxmlformats.org/drawingml/2006/main" id="33" idx="3"/>
-            <a:endCxn xmlns:a="http://schemas.openxmlformats.org/drawingml/2006/main" id="41" idx="1"/>
+            <a:stCxn id="33" idx="3"/>
+            <a:endCxn id="41" idx="1"/>
           </p:cNvCxnSpPr>
           <p:nvPr/>
         </p:nvCxnSpPr>
         <p:spPr>
-          <a:xfrm xmlns:a="http://schemas.openxmlformats.org/drawingml/2006/main" flipV="1">
+          <a:xfrm flipV="1">
             <a:off x="7181850" y="2819400"/>
             <a:ext cx="914400" cy="1057275"/>
           </a:xfrm>
-          <a:prstGeom xmlns:a="http://schemas.openxmlformats.org/drawingml/2006/main" prst="bentConnector3">
+          <a:prstGeom prst="bentConnector3">
             <a:avLst>
               <a:gd name="adj1" fmla="val 50000"/>
             </a:avLst>
           </a:prstGeom>
-          <a:ln xmlns:a="http://schemas.openxmlformats.org/drawingml/2006/main" w="15240">
+          <a:ln w="15240">
             <a:solidFill>
               <a:srgbClr val="000000"/>
             </a:solidFill>
@@ -7987,22 +7988,22 @@
         <p:nvCxnSpPr>
           <p:cNvPr id="102" name=""/>
           <p:cNvCxnSpPr>
-            <a:stCxn xmlns:a="http://schemas.openxmlformats.org/drawingml/2006/main" id="33" idx="3"/>
-            <a:endCxn xmlns:a="http://schemas.openxmlformats.org/drawingml/2006/main" id="42" idx="1"/>
+            <a:stCxn id="33" idx="3"/>
+            <a:endCxn id="42" idx="1"/>
           </p:cNvCxnSpPr>
           <p:nvPr/>
         </p:nvCxnSpPr>
         <p:spPr>
-          <a:xfrm xmlns:a="http://schemas.openxmlformats.org/drawingml/2006/main" flipV="1">
+          <a:xfrm flipV="1">
             <a:off x="7181850" y="3362325"/>
             <a:ext cx="914400" cy="514350"/>
           </a:xfrm>
-          <a:prstGeom xmlns:a="http://schemas.openxmlformats.org/drawingml/2006/main" prst="bentConnector3">
+          <a:prstGeom prst="bentConnector3">
             <a:avLst>
               <a:gd name="adj1" fmla="val 50000"/>
             </a:avLst>
           </a:prstGeom>
-          <a:ln xmlns:a="http://schemas.openxmlformats.org/drawingml/2006/main" w="15240">
+          <a:ln w="15240">
             <a:solidFill>
               <a:srgbClr val="000000"/>
             </a:solidFill>
@@ -8016,20 +8017,20 @@
         <p:nvCxnSpPr>
           <p:cNvPr id="103" name=""/>
           <p:cNvCxnSpPr>
-            <a:stCxn xmlns:a="http://schemas.openxmlformats.org/drawingml/2006/main" id="33" idx="3"/>
-            <a:endCxn xmlns:a="http://schemas.openxmlformats.org/drawingml/2006/main" id="43" idx="1"/>
+            <a:stCxn id="33" idx="3"/>
+            <a:endCxn id="43" idx="1"/>
           </p:cNvCxnSpPr>
           <p:nvPr/>
         </p:nvCxnSpPr>
         <p:spPr>
-          <a:xfrm xmlns:a="http://schemas.openxmlformats.org/drawingml/2006/main">
+          <a:xfrm>
             <a:off x="7181850" y="3876675"/>
             <a:ext cx="704850" cy="400050"/>
           </a:xfrm>
-          <a:prstGeom xmlns:a="http://schemas.openxmlformats.org/drawingml/2006/main" prst="straightConnector1">
+          <a:prstGeom prst="straightConnector1">
             <a:avLst/>
           </a:prstGeom>
-          <a:ln xmlns:a="http://schemas.openxmlformats.org/drawingml/2006/main" w="15240">
+          <a:ln w="15240">
             <a:solidFill>
               <a:srgbClr val="000000"/>
             </a:solidFill>
@@ -8043,20 +8044,20 @@
         <p:nvCxnSpPr>
           <p:cNvPr id="104" name=""/>
           <p:cNvCxnSpPr>
-            <a:stCxn xmlns:a="http://schemas.openxmlformats.org/drawingml/2006/main" id="43" idx="2"/>
-            <a:endCxn xmlns:a="http://schemas.openxmlformats.org/drawingml/2006/main" id="44" idx="0"/>
+            <a:stCxn id="43" idx="2"/>
+            <a:endCxn id="44" idx="0"/>
           </p:cNvCxnSpPr>
           <p:nvPr/>
         </p:nvCxnSpPr>
         <p:spPr>
-          <a:xfrm xmlns:a="http://schemas.openxmlformats.org/drawingml/2006/main">
+          <a:xfrm>
             <a:off x="8810625" y="4533900"/>
             <a:ext cx="0" cy="438150"/>
           </a:xfrm>
-          <a:prstGeom xmlns:a="http://schemas.openxmlformats.org/drawingml/2006/main" prst="straightConnector1">
+          <a:prstGeom prst="straightConnector1">
             <a:avLst/>
           </a:prstGeom>
-          <a:ln xmlns:a="http://schemas.openxmlformats.org/drawingml/2006/main" w="15240">
+          <a:ln w="15240">
             <a:solidFill>
               <a:srgbClr val="000000"/>
             </a:solidFill>
@@ -8069,31 +8070,31 @@
       <p:sp>
         <p:nvSpPr>
           <p:cNvPr id="49" name="">
-            <a:extLst xmlns:a="http://schemas.openxmlformats.org/drawingml/2006/main">
+            <a:extLst>
               <a:ext uri="{FF2B5EF4-FFF2-40B4-BE49-F238E27FC236}">
-                <a16:creationId xmlns:a16="http://schemas.microsoft.com/office/drawing/2014/main" id="{DF927AE7-2665-4C77-861C-5CC6002C5D77}"/>
+                <ns2:creationId id="{DF927AE7-2665-4C77-861C-5CC6002C5D77}"/>
               </a:ext>
             </a:extLst>
           </p:cNvPr>
           <p:cNvSpPr>
-            <a:spLocks xmlns:a="http://schemas.openxmlformats.org/drawingml/2006/main" noGrp="1"/>
-          </p:cNvSpPr>
-          <p:nvPr/>
-        </p:nvSpPr>
-        <p:spPr>
-          <a:xfrm xmlns:a="http://schemas.openxmlformats.org/drawingml/2006/main">
+            <a:spLocks noGrp="1"/>
+          </p:cNvSpPr>
+          <p:nvPr/>
+        </p:nvSpPr>
+        <p:spPr>
+          <a:xfrm>
             <a:off x="10325100" y="3143250"/>
             <a:ext cx="1466850" cy="514350"/>
           </a:xfrm>
-          <a:prstGeom xmlns:a="http://schemas.openxmlformats.org/drawingml/2006/main" prst="roundRect">
+          <a:prstGeom prst="roundRect">
             <a:avLst>
               <a:gd name="adj" fmla="val 12963"/>
             </a:avLst>
           </a:prstGeom>
-          <a:solidFill xmlns:a="http://schemas.openxmlformats.org/drawingml/2006/main">
+          <a:solidFill>
             <a:srgbClr val="EFE7F4"/>
           </a:solidFill>
-          <a:ln xmlns:a="http://schemas.openxmlformats.org/drawingml/2006/main" w="11430">
+          <a:ln w="11430">
             <a:solidFill>
               <a:srgbClr val="7B5B8E"/>
             </a:solidFill>
@@ -8101,11 +8102,11 @@
           </a:ln>
         </p:spPr>
         <p:txBody>
-          <a:bodyPr xmlns:a="http://schemas.openxmlformats.org/drawingml/2006/main" lIns="76200" tIns="57150" rIns="76200" bIns="57150" anchor="ctr">
+          <a:bodyPr lIns="76200" tIns="57150" rIns="76200" bIns="57150" anchor="ctr">
             <a:normAutofit fontScale="100000"/>
           </a:bodyPr>
-          <a:lstStyle xmlns:a="http://schemas.openxmlformats.org/drawingml/2006/main"/>
-          <a:p xmlns:a="http://schemas.openxmlformats.org/drawingml/2006/main">
+          <a:lstStyle/>
+          <a:p>
             <a:pPr algn="ctr">
               <a:lnSpc>
                 <a:spcPct val="105000"/>
@@ -8137,31 +8138,31 @@
       <p:sp>
         <p:nvSpPr>
           <p:cNvPr id="50" name="">
-            <a:extLst xmlns:a="http://schemas.openxmlformats.org/drawingml/2006/main">
+            <a:extLst>
               <a:ext uri="{FF2B5EF4-FFF2-40B4-BE49-F238E27FC236}">
-                <a16:creationId xmlns:a16="http://schemas.microsoft.com/office/drawing/2014/main" id="{D69C0780-0C18-41DD-8AFA-6F114FEC3638}"/>
+                <ns2:creationId id="{D69C0780-0C18-41DD-8AFA-6F114FEC3638}"/>
               </a:ext>
             </a:extLst>
           </p:cNvPr>
           <p:cNvSpPr>
-            <a:spLocks xmlns:a="http://schemas.openxmlformats.org/drawingml/2006/main" noGrp="1"/>
-          </p:cNvSpPr>
-          <p:nvPr/>
-        </p:nvSpPr>
-        <p:spPr>
-          <a:xfrm xmlns:a="http://schemas.openxmlformats.org/drawingml/2006/main">
+            <a:spLocks noGrp="1"/>
+          </p:cNvSpPr>
+          <p:nvPr/>
+        </p:nvSpPr>
+        <p:spPr>
+          <a:xfrm>
             <a:off x="10325100" y="4019550"/>
             <a:ext cx="1466850" cy="514350"/>
           </a:xfrm>
-          <a:prstGeom xmlns:a="http://schemas.openxmlformats.org/drawingml/2006/main" prst="roundRect">
+          <a:prstGeom prst="roundRect">
             <a:avLst>
               <a:gd name="adj" fmla="val 12963"/>
             </a:avLst>
           </a:prstGeom>
-          <a:solidFill xmlns:a="http://schemas.openxmlformats.org/drawingml/2006/main">
+          <a:solidFill>
             <a:srgbClr val="EFE7F4"/>
           </a:solidFill>
-          <a:ln xmlns:a="http://schemas.openxmlformats.org/drawingml/2006/main" w="11430">
+          <a:ln w="11430">
             <a:solidFill>
               <a:srgbClr val="7B5B8E"/>
             </a:solidFill>
@@ -8169,11 +8170,11 @@
           </a:ln>
         </p:spPr>
         <p:txBody>
-          <a:bodyPr xmlns:a="http://schemas.openxmlformats.org/drawingml/2006/main" lIns="76200" tIns="57150" rIns="76200" bIns="57150" anchor="ctr">
+          <a:bodyPr lIns="76200" tIns="57150" rIns="76200" bIns="57150" anchor="ctr">
             <a:normAutofit fontScale="100000"/>
           </a:bodyPr>
-          <a:lstStyle xmlns:a="http://schemas.openxmlformats.org/drawingml/2006/main"/>
-          <a:p xmlns:a="http://schemas.openxmlformats.org/drawingml/2006/main">
+          <a:lstStyle/>
+          <a:p>
             <a:pPr algn="ctr">
               <a:lnSpc>
                 <a:spcPct val="105000"/>
@@ -8205,31 +8206,31 @@
       <p:sp>
         <p:nvSpPr>
           <p:cNvPr id="51" name="">
-            <a:extLst xmlns:a="http://schemas.openxmlformats.org/drawingml/2006/main">
+            <a:extLst>
               <a:ext uri="{FF2B5EF4-FFF2-40B4-BE49-F238E27FC236}">
-                <a16:creationId xmlns:a16="http://schemas.microsoft.com/office/drawing/2014/main" id="{FD865A1A-AA44-40CB-8CD3-CE2714B03A7C}"/>
+                <ns2:creationId id="{FD865A1A-AA44-40CB-8CD3-CE2714B03A7C}"/>
               </a:ext>
             </a:extLst>
           </p:cNvPr>
           <p:cNvSpPr>
-            <a:spLocks xmlns:a="http://schemas.openxmlformats.org/drawingml/2006/main" noGrp="1"/>
-          </p:cNvSpPr>
-          <p:nvPr/>
-        </p:nvSpPr>
-        <p:spPr>
-          <a:xfrm xmlns:a="http://schemas.openxmlformats.org/drawingml/2006/main">
+            <a:spLocks noGrp="1"/>
+          </p:cNvSpPr>
+          <p:nvPr/>
+        </p:nvSpPr>
+        <p:spPr>
+          <a:xfrm>
             <a:off x="10325100" y="4972050"/>
             <a:ext cx="1466850" cy="514350"/>
           </a:xfrm>
-          <a:prstGeom xmlns:a="http://schemas.openxmlformats.org/drawingml/2006/main" prst="roundRect">
+          <a:prstGeom prst="roundRect">
             <a:avLst>
               <a:gd name="adj" fmla="val 12963"/>
             </a:avLst>
           </a:prstGeom>
-          <a:solidFill xmlns:a="http://schemas.openxmlformats.org/drawingml/2006/main">
+          <a:solidFill>
             <a:srgbClr val="EFE7F4"/>
           </a:solidFill>
-          <a:ln xmlns:a="http://schemas.openxmlformats.org/drawingml/2006/main" w="11430">
+          <a:ln w="11430">
             <a:solidFill>
               <a:srgbClr val="7B5B8E"/>
             </a:solidFill>
@@ -8237,11 +8238,11 @@
           </a:ln>
         </p:spPr>
         <p:txBody>
-          <a:bodyPr xmlns:a="http://schemas.openxmlformats.org/drawingml/2006/main" lIns="76200" tIns="57150" rIns="76200" bIns="57150" anchor="ctr">
+          <a:bodyPr lIns="76200" tIns="57150" rIns="76200" bIns="57150" anchor="ctr">
             <a:normAutofit fontScale="100000"/>
           </a:bodyPr>
-          <a:lstStyle xmlns:a="http://schemas.openxmlformats.org/drawingml/2006/main"/>
-          <a:p xmlns:a="http://schemas.openxmlformats.org/drawingml/2006/main">
+          <a:lstStyle/>
+          <a:p>
             <a:pPr algn="ctr">
               <a:lnSpc>
                 <a:spcPct val="105000"/>
@@ -8274,20 +8275,20 @@
         <p:nvCxnSpPr>
           <p:cNvPr id="108" name=""/>
           <p:cNvCxnSpPr>
-            <a:stCxn xmlns:a="http://schemas.openxmlformats.org/drawingml/2006/main" id="42" idx="3"/>
-            <a:endCxn xmlns:a="http://schemas.openxmlformats.org/drawingml/2006/main" id="49" idx="1"/>
+            <a:stCxn id="42" idx="3"/>
+            <a:endCxn id="49" idx="1"/>
           </p:cNvCxnSpPr>
           <p:nvPr/>
         </p:nvCxnSpPr>
         <p:spPr>
-          <a:xfrm xmlns:a="http://schemas.openxmlformats.org/drawingml/2006/main">
+          <a:xfrm>
             <a:off x="9525000" y="3362325"/>
             <a:ext cx="800100" cy="38100"/>
           </a:xfrm>
-          <a:prstGeom xmlns:a="http://schemas.openxmlformats.org/drawingml/2006/main" prst="straightConnector1">
+          <a:prstGeom prst="straightConnector1">
             <a:avLst/>
           </a:prstGeom>
-          <a:ln xmlns:a="http://schemas.openxmlformats.org/drawingml/2006/main" w="15240">
+          <a:ln w="15240">
             <a:solidFill>
               <a:srgbClr val="000000"/>
             </a:solidFill>
@@ -8301,20 +8302,20 @@
         <p:nvCxnSpPr>
           <p:cNvPr id="109" name=""/>
           <p:cNvCxnSpPr>
-            <a:stCxn xmlns:a="http://schemas.openxmlformats.org/drawingml/2006/main" id="43" idx="3"/>
-            <a:endCxn xmlns:a="http://schemas.openxmlformats.org/drawingml/2006/main" id="50" idx="1"/>
+            <a:stCxn id="43" idx="3"/>
+            <a:endCxn id="50" idx="1"/>
           </p:cNvCxnSpPr>
           <p:nvPr/>
         </p:nvCxnSpPr>
         <p:spPr>
-          <a:xfrm xmlns:a="http://schemas.openxmlformats.org/drawingml/2006/main">
+          <a:xfrm>
             <a:off x="9734550" y="4276725"/>
             <a:ext cx="590550" cy="0"/>
           </a:xfrm>
-          <a:prstGeom xmlns:a="http://schemas.openxmlformats.org/drawingml/2006/main" prst="straightConnector1">
+          <a:prstGeom prst="straightConnector1">
             <a:avLst/>
           </a:prstGeom>
-          <a:ln xmlns:a="http://schemas.openxmlformats.org/drawingml/2006/main" w="15240">
+          <a:ln w="15240">
             <a:solidFill>
               <a:srgbClr val="555555"/>
             </a:solidFill>
@@ -8328,20 +8329,20 @@
         <p:nvCxnSpPr>
           <p:cNvPr id="110" name=""/>
           <p:cNvCxnSpPr>
-            <a:stCxn xmlns:a="http://schemas.openxmlformats.org/drawingml/2006/main" id="44" idx="3"/>
-            <a:endCxn xmlns:a="http://schemas.openxmlformats.org/drawingml/2006/main" id="51" idx="1"/>
+            <a:stCxn id="44" idx="3"/>
+            <a:endCxn id="51" idx="1"/>
           </p:cNvCxnSpPr>
           <p:nvPr/>
         </p:nvCxnSpPr>
         <p:spPr>
-          <a:xfrm xmlns:a="http://schemas.openxmlformats.org/drawingml/2006/main">
+          <a:xfrm>
             <a:off x="9734550" y="5229225"/>
             <a:ext cx="590550" cy="0"/>
           </a:xfrm>
-          <a:prstGeom xmlns:a="http://schemas.openxmlformats.org/drawingml/2006/main" prst="straightConnector1">
+          <a:prstGeom prst="straightConnector1">
             <a:avLst/>
           </a:prstGeom>
-          <a:ln xmlns:a="http://schemas.openxmlformats.org/drawingml/2006/main" w="15240">
+          <a:ln w="15240">
             <a:solidFill>
               <a:srgbClr val="555555"/>
             </a:solidFill>
@@ -8354,37 +8355,37 @@
       <p:sp>
         <p:nvSpPr>
           <p:cNvPr id="55" name="">
-            <a:extLst xmlns:a="http://schemas.openxmlformats.org/drawingml/2006/main">
+            <a:extLst>
               <a:ext uri="{FF2B5EF4-FFF2-40B4-BE49-F238E27FC236}">
-                <a16:creationId xmlns:a16="http://schemas.microsoft.com/office/drawing/2014/main" id="{0DBE2E4B-8E9B-4B59-95EE-59A41BE41389}"/>
+                <ns2:creationId id="{0DBE2E4B-8E9B-4B59-95EE-59A41BE41389}"/>
               </a:ext>
             </a:extLst>
           </p:cNvPr>
           <p:cNvSpPr>
-            <a:spLocks xmlns:a="http://schemas.openxmlformats.org/drawingml/2006/main" noGrp="1"/>
-          </p:cNvSpPr>
-          <p:nvPr/>
-        </p:nvSpPr>
-        <p:spPr>
-          <a:xfrm xmlns:a="http://schemas.openxmlformats.org/drawingml/2006/main">
+            <a:spLocks noGrp="1"/>
+          </p:cNvSpPr>
+          <p:nvPr/>
+        </p:nvSpPr>
+        <p:spPr>
+          <a:xfrm>
             <a:off x="2781300" y="5448300"/>
             <a:ext cx="1905000" cy="247650"/>
           </a:xfrm>
-          <a:prstGeom xmlns:a="http://schemas.openxmlformats.org/drawingml/2006/main" prst="rect">
+          <a:prstGeom prst="rect">
             <a:avLst/>
           </a:prstGeom>
-          <a:noFill xmlns:a="http://schemas.openxmlformats.org/drawingml/2006/main"/>
-          <a:ln xmlns:a="http://schemas.openxmlformats.org/drawingml/2006/main" w="0">
+          <a:noFill/>
+          <a:ln w="0">
             <a:noFill/>
             <a:prstDash val="solid"/>
           </a:ln>
         </p:spPr>
         <p:txBody>
-          <a:bodyPr xmlns:a="http://schemas.openxmlformats.org/drawingml/2006/main" lIns="0" tIns="0" rIns="0" bIns="0" anchor="t">
+          <a:bodyPr lIns="0" tIns="0" rIns="0" bIns="0" anchor="t">
             <a:normAutofit fontScale="100000"/>
           </a:bodyPr>
-          <a:lstStyle xmlns:a="http://schemas.openxmlformats.org/drawingml/2006/main"/>
-          <a:p xmlns:a="http://schemas.openxmlformats.org/drawingml/2006/main">
+          <a:lstStyle/>
+          <a:p>
             <a:pPr algn="ctr">
               <a:lnSpc>
                 <a:spcPct val="112000"/>
@@ -8416,37 +8417,37 @@
       <p:sp>
         <p:nvSpPr>
           <p:cNvPr id="56" name="">
-            <a:extLst xmlns:a="http://schemas.openxmlformats.org/drawingml/2006/main">
+            <a:extLst>
               <a:ext uri="{FF2B5EF4-FFF2-40B4-BE49-F238E27FC236}">
-                <a16:creationId xmlns:a16="http://schemas.microsoft.com/office/drawing/2014/main" id="{5AB2D358-6370-4BEE-A69B-9CED26BA4735}"/>
+                <ns2:creationId id="{5AB2D358-6370-4BEE-A69B-9CED26BA4735}"/>
               </a:ext>
             </a:extLst>
           </p:cNvPr>
           <p:cNvSpPr>
-            <a:spLocks xmlns:a="http://schemas.openxmlformats.org/drawingml/2006/main" noGrp="1"/>
-          </p:cNvSpPr>
-          <p:nvPr/>
-        </p:nvSpPr>
-        <p:spPr>
-          <a:xfrm xmlns:a="http://schemas.openxmlformats.org/drawingml/2006/main">
+            <a:spLocks noGrp="1"/>
+          </p:cNvSpPr>
+          <p:nvPr/>
+        </p:nvSpPr>
+        <p:spPr>
+          <a:xfrm>
             <a:off x="2057400" y="5715000"/>
             <a:ext cx="7848600" cy="342900"/>
           </a:xfrm>
-          <a:prstGeom xmlns:a="http://schemas.openxmlformats.org/drawingml/2006/main" prst="rect">
+          <a:prstGeom prst="rect">
             <a:avLst/>
           </a:prstGeom>
-          <a:noFill xmlns:a="http://schemas.openxmlformats.org/drawingml/2006/main"/>
-          <a:ln xmlns:a="http://schemas.openxmlformats.org/drawingml/2006/main" w="0">
+          <a:noFill/>
+          <a:ln w="0">
             <a:noFill/>
             <a:prstDash val="solid"/>
           </a:ln>
         </p:spPr>
         <p:txBody>
-          <a:bodyPr xmlns:a="http://schemas.openxmlformats.org/drawingml/2006/main" lIns="0" tIns="0" rIns="0" bIns="0" anchor="t">
+          <a:bodyPr lIns="0" tIns="0" rIns="0" bIns="0" anchor="t">
             <a:normAutofit fontScale="100000"/>
           </a:bodyPr>
-          <a:lstStyle xmlns:a="http://schemas.openxmlformats.org/drawingml/2006/main"/>
-          <a:p xmlns:a="http://schemas.openxmlformats.org/drawingml/2006/main">
+          <a:lstStyle/>
+          <a:p>
             <a:pPr algn="ctr">
               <a:lnSpc>
                 <a:spcPct val="112000"/>
@@ -8478,7 +8479,7 @@
     </p:spTree>
     <p:extLst>
       <p:ext uri="{BB962C8B-B14F-4D97-AF65-F5344CB8AC3E}">
-        <p14:creationId xmlns:p14="http://schemas.microsoft.com/office/powerpoint/2010/main" val="506935382"/>
+        <ns3:creationId val="506935382"/>
       </p:ext>
     </p:extLst>
   </p:cSld>
